--- a/presentations/0624_Methodology_Update_Final.pptx
+++ b/presentations/0624_Methodology_Update_Final.pptx
@@ -1310,60 +1310,2376 @@
           <a:lstStyle/>
           <a:p>
             <a:r>
-              <a:rPr sz="1200"/>
+              <a:rPr sz="1200" dirty="0"/>
               <a:t>Briefly recap where we were at the June 16 presentation.</a:t>
             </a:r>
           </a:p>
           <a:p>
             <a:r>
-              <a:rPr sz="1200"/>
+              <a:rPr sz="1200" dirty="0"/>
               <a:t>Our previous main result was β₃ = −4.385 (p = 0.001) in the symmetric threshold spec at L &lt; 4%.</a:t>
             </a:r>
           </a:p>
           <a:p>
             <a:r>
-              <a:rPr sz="1200"/>
+              <a:rPr sz="1200" dirty="0"/>
               <a:t>The sign is negative — spread compression when supply grows in low-buffer states.</a:t>
             </a:r>
           </a:p>
           <a:p>
             <a:r>
-              <a:rPr sz="1200"/>
+              <a:rPr sz="1200" dirty="0"/>
               <a:t>But the theory predicts WIDENING during redemption episodes, not compression during growth.</a:t>
             </a:r>
           </a:p>
           <a:p>
             <a:r>
-              <a:rPr sz="1200"/>
-              <a:t>The issue: ΔlnS combines both inflows (new supply, T-bill purchases) and outflows (redemptions,</a:t>
-            </a:r>
-          </a:p>
-          <a:p>
-            <a:r>
-              <a:rPr sz="1200"/>
+              <a:rPr sz="1200" dirty="0"/>
+              <a:t>The issue: </a:t>
+            </a:r>
+            <a:r>
+              <a:rPr sz="1200" dirty="0" err="1"/>
+              <a:t>ΔlnS</a:t>
+            </a:r>
+            <a:r>
+              <a:rPr sz="1200" dirty="0"/>
+              <a:t> combines both inflows (new supply, T-bill purchases) and outflows (redemptions,</a:t>
+            </a:r>
+          </a:p>
+          <a:p>
+            <a:r>
+              <a:rPr sz="1200" dirty="0"/>
               <a:t>possible T-bill sales) in a single coefficient. The forced-sale channel only operates for outflows.</a:t>
             </a:r>
           </a:p>
           <a:p>
             <a:r>
-              <a:rPr sz="1200"/>
+              <a:rPr sz="1200" dirty="0"/>
               <a:t>Professor Hur identified this and proposed the fix: separate inflows from outflows.</a:t>
             </a:r>
           </a:p>
           <a:p>
-            <a:endParaRPr sz="1200"/>
-          </a:p>
-          <a:p>
-            <a:r>
-              <a:rPr sz="1200"/>
+            <a:endParaRPr sz="1200" dirty="0"/>
+          </a:p>
+          <a:p>
+            <a:r>
+              <a:rPr sz="1200" dirty="0"/>
               <a:t>Also note: all 9 low-buffer observations (L &lt; 4%) are from USDT in a single 9-month window</a:t>
             </a:r>
           </a:p>
           <a:p>
             <a:r>
-              <a:rPr sz="1200"/>
+              <a:rPr sz="1200" dirty="0"/>
               <a:t>(mid-2025 to early 2026). That single-issuer concern is also addressed in the new specification.</a:t>
             </a:r>
+            <a:endParaRPr lang="en-US" sz="1200" dirty="0"/>
+          </a:p>
+          <a:p>
+            <a:endParaRPr lang="en-US" sz="1200" dirty="0"/>
+          </a:p>
+          <a:p>
+            <a:endParaRPr lang="en-US" sz="1200" dirty="0"/>
+          </a:p>
+          <a:p>
+            <a:r>
+              <a:rPr lang="ko-KR" altLang="ko-KR" sz="1200" b="1" i="0" kern="1200" dirty="0">
+                <a:solidFill>
+                  <a:schemeClr val="tx1"/>
+                </a:solidFill>
+                <a:effectLst/>
+                <a:latin typeface="+mn-lt"/>
+                <a:ea typeface="+mn-ea"/>
+                <a:cs typeface="+mn-cs"/>
+              </a:rPr>
+              <a:t>β₁</a:t>
+            </a:r>
+            <a:r>
+              <a:rPr lang="ko-KR" altLang="ko-KR" sz="1200" b="0" i="0" kern="1200" dirty="0" err="1">
+                <a:solidFill>
+                  <a:schemeClr val="tx1"/>
+                </a:solidFill>
+                <a:effectLst/>
+                <a:latin typeface="+mn-lt"/>
+                <a:ea typeface="+mn-ea"/>
+                <a:cs typeface="+mn-cs"/>
+              </a:rPr>
+              <a:t>Inflow</a:t>
+            </a:r>
+            <a:r>
+              <a:rPr lang="ko-KR" altLang="ko-KR" sz="1200" b="0" i="0" kern="1200" dirty="0">
+                <a:solidFill>
+                  <a:schemeClr val="tx1"/>
+                </a:solidFill>
+                <a:effectLst/>
+                <a:latin typeface="+mn-lt"/>
+                <a:ea typeface="+mn-ea"/>
+                <a:cs typeface="+mn-cs"/>
+              </a:rPr>
+              <a:t> = </a:t>
+            </a:r>
+            <a:r>
+              <a:rPr lang="ko-KR" altLang="ko-KR" sz="1200" b="0" i="0" kern="1200" dirty="0" err="1">
+                <a:solidFill>
+                  <a:schemeClr val="tx1"/>
+                </a:solidFill>
+                <a:effectLst/>
+                <a:latin typeface="+mn-lt"/>
+                <a:ea typeface="+mn-ea"/>
+                <a:cs typeface="+mn-cs"/>
+              </a:rPr>
+              <a:t>max</a:t>
+            </a:r>
+            <a:r>
+              <a:rPr lang="ko-KR" altLang="ko-KR" sz="1200" b="0" i="0" kern="1200" dirty="0">
+                <a:solidFill>
+                  <a:schemeClr val="tx1"/>
+                </a:solidFill>
+                <a:effectLst/>
+                <a:latin typeface="+mn-lt"/>
+                <a:ea typeface="+mn-ea"/>
+                <a:cs typeface="+mn-cs"/>
+              </a:rPr>
+              <a:t>(</a:t>
+            </a:r>
+            <a:r>
+              <a:rPr lang="ko-KR" altLang="ko-KR" sz="1200" b="0" i="0" kern="1200" dirty="0" err="1">
+                <a:solidFill>
+                  <a:schemeClr val="tx1"/>
+                </a:solidFill>
+                <a:effectLst/>
+                <a:latin typeface="+mn-lt"/>
+                <a:ea typeface="+mn-ea"/>
+                <a:cs typeface="+mn-cs"/>
+              </a:rPr>
+              <a:t>ΔlnS</a:t>
+            </a:r>
+            <a:r>
+              <a:rPr lang="ko-KR" altLang="ko-KR" sz="1200" b="0" i="0" kern="1200" dirty="0">
+                <a:solidFill>
+                  <a:schemeClr val="tx1"/>
+                </a:solidFill>
+                <a:effectLst/>
+                <a:latin typeface="+mn-lt"/>
+                <a:ea typeface="+mn-ea"/>
+                <a:cs typeface="+mn-cs"/>
+              </a:rPr>
+              <a:t>, 0)</a:t>
+            </a:r>
+            <a:r>
+              <a:rPr lang="ko-KR" altLang="ko-KR" sz="1200" b="0" i="0" kern="1200" dirty="0" err="1">
+                <a:solidFill>
+                  <a:schemeClr val="tx1"/>
+                </a:solidFill>
+                <a:effectLst/>
+                <a:latin typeface="+mn-lt"/>
+                <a:ea typeface="+mn-ea"/>
+                <a:cs typeface="+mn-cs"/>
+              </a:rPr>
+              <a:t>Effect</a:t>
+            </a:r>
+            <a:r>
+              <a:rPr lang="ko-KR" altLang="ko-KR" sz="1200" b="0" i="0" kern="1200" dirty="0">
+                <a:solidFill>
+                  <a:schemeClr val="tx1"/>
+                </a:solidFill>
+                <a:effectLst/>
+                <a:latin typeface="+mn-lt"/>
+                <a:ea typeface="+mn-ea"/>
+                <a:cs typeface="+mn-cs"/>
+              </a:rPr>
+              <a:t> of </a:t>
+            </a:r>
+            <a:r>
+              <a:rPr lang="ko-KR" altLang="ko-KR" sz="1200" b="0" i="0" kern="1200" dirty="0" err="1">
+                <a:solidFill>
+                  <a:schemeClr val="tx1"/>
+                </a:solidFill>
+                <a:effectLst/>
+                <a:latin typeface="+mn-lt"/>
+                <a:ea typeface="+mn-ea"/>
+                <a:cs typeface="+mn-cs"/>
+              </a:rPr>
+              <a:t>supply</a:t>
+            </a:r>
+            <a:r>
+              <a:rPr lang="ko-KR" altLang="ko-KR" sz="1200" b="0" i="0" kern="1200" dirty="0">
+                <a:solidFill>
+                  <a:schemeClr val="tx1"/>
+                </a:solidFill>
+                <a:effectLst/>
+                <a:latin typeface="+mn-lt"/>
+                <a:ea typeface="+mn-ea"/>
+                <a:cs typeface="+mn-cs"/>
+              </a:rPr>
+              <a:t> </a:t>
+            </a:r>
+            <a:r>
+              <a:rPr lang="ko-KR" altLang="ko-KR" sz="1200" b="0" i="1" kern="1200" dirty="0" err="1">
+                <a:solidFill>
+                  <a:schemeClr val="tx1"/>
+                </a:solidFill>
+                <a:effectLst/>
+                <a:latin typeface="+mn-lt"/>
+                <a:ea typeface="+mn-ea"/>
+                <a:cs typeface="+mn-cs"/>
+              </a:rPr>
+              <a:t>growth</a:t>
+            </a:r>
+            <a:r>
+              <a:rPr lang="ko-KR" altLang="ko-KR" sz="1200" b="0" i="0" kern="1200" dirty="0">
+                <a:solidFill>
+                  <a:schemeClr val="tx1"/>
+                </a:solidFill>
+                <a:effectLst/>
+                <a:latin typeface="+mn-lt"/>
+                <a:ea typeface="+mn-ea"/>
+                <a:cs typeface="+mn-cs"/>
+              </a:rPr>
+              <a:t> </a:t>
+            </a:r>
+            <a:r>
+              <a:rPr lang="ko-KR" altLang="ko-KR" sz="1200" b="0" i="0" kern="1200" dirty="0" err="1">
+                <a:solidFill>
+                  <a:schemeClr val="tx1"/>
+                </a:solidFill>
+                <a:effectLst/>
+                <a:latin typeface="+mn-lt"/>
+                <a:ea typeface="+mn-ea"/>
+                <a:cs typeface="+mn-cs"/>
+              </a:rPr>
+              <a:t>on</a:t>
+            </a:r>
+            <a:r>
+              <a:rPr lang="ko-KR" altLang="ko-KR" sz="1200" b="0" i="0" kern="1200" dirty="0">
+                <a:solidFill>
+                  <a:schemeClr val="tx1"/>
+                </a:solidFill>
+                <a:effectLst/>
+                <a:latin typeface="+mn-lt"/>
+                <a:ea typeface="+mn-ea"/>
+                <a:cs typeface="+mn-cs"/>
+              </a:rPr>
+              <a:t> </a:t>
+            </a:r>
+            <a:r>
+              <a:rPr lang="ko-KR" altLang="ko-KR" sz="1200" b="0" i="0" kern="1200" dirty="0" err="1">
+                <a:solidFill>
+                  <a:schemeClr val="tx1"/>
+                </a:solidFill>
+                <a:effectLst/>
+                <a:latin typeface="+mn-lt"/>
+                <a:ea typeface="+mn-ea"/>
+                <a:cs typeface="+mn-cs"/>
+              </a:rPr>
+              <a:t>spread</a:t>
+            </a:r>
+            <a:r>
+              <a:rPr lang="ko-KR" altLang="ko-KR" sz="1200" b="0" i="0" kern="1200" dirty="0">
+                <a:solidFill>
+                  <a:schemeClr val="tx1"/>
+                </a:solidFill>
+                <a:effectLst/>
+                <a:latin typeface="+mn-lt"/>
+                <a:ea typeface="+mn-ea"/>
+                <a:cs typeface="+mn-cs"/>
+              </a:rPr>
+              <a:t> </a:t>
+            </a:r>
+            <a:r>
+              <a:rPr lang="ko-KR" altLang="ko-KR" sz="1200" b="0" i="0" kern="1200" dirty="0" err="1">
+                <a:solidFill>
+                  <a:schemeClr val="tx1"/>
+                </a:solidFill>
+                <a:effectLst/>
+                <a:latin typeface="+mn-lt"/>
+                <a:ea typeface="+mn-ea"/>
+                <a:cs typeface="+mn-cs"/>
+              </a:rPr>
+              <a:t>change</a:t>
+            </a:r>
+            <a:r>
+              <a:rPr lang="ko-KR" altLang="ko-KR" sz="1200" b="0" i="0" kern="1200" dirty="0">
+                <a:solidFill>
+                  <a:schemeClr val="tx1"/>
+                </a:solidFill>
+                <a:effectLst/>
+                <a:latin typeface="+mn-lt"/>
+                <a:ea typeface="+mn-ea"/>
+                <a:cs typeface="+mn-cs"/>
+              </a:rPr>
+              <a:t> (</a:t>
+            </a:r>
+            <a:r>
+              <a:rPr lang="ko-KR" altLang="ko-KR" sz="1200" b="0" i="0" kern="1200" dirty="0" err="1">
+                <a:solidFill>
+                  <a:schemeClr val="tx1"/>
+                </a:solidFill>
+                <a:effectLst/>
+                <a:latin typeface="+mn-lt"/>
+                <a:ea typeface="+mn-ea"/>
+                <a:cs typeface="+mn-cs"/>
+              </a:rPr>
+              <a:t>regardless</a:t>
+            </a:r>
+            <a:r>
+              <a:rPr lang="ko-KR" altLang="ko-KR" sz="1200" b="0" i="0" kern="1200" dirty="0">
+                <a:solidFill>
+                  <a:schemeClr val="tx1"/>
+                </a:solidFill>
+                <a:effectLst/>
+                <a:latin typeface="+mn-lt"/>
+                <a:ea typeface="+mn-ea"/>
+                <a:cs typeface="+mn-cs"/>
+              </a:rPr>
+              <a:t> of </a:t>
+            </a:r>
+            <a:r>
+              <a:rPr lang="ko-KR" altLang="ko-KR" sz="1200" b="0" i="0" kern="1200" dirty="0" err="1">
+                <a:solidFill>
+                  <a:schemeClr val="tx1"/>
+                </a:solidFill>
+                <a:effectLst/>
+                <a:latin typeface="+mn-lt"/>
+                <a:ea typeface="+mn-ea"/>
+                <a:cs typeface="+mn-cs"/>
+              </a:rPr>
+              <a:t>buffer</a:t>
+            </a:r>
+            <a:r>
+              <a:rPr lang="ko-KR" altLang="ko-KR" sz="1200" b="0" i="0" kern="1200" dirty="0">
+                <a:solidFill>
+                  <a:schemeClr val="tx1"/>
+                </a:solidFill>
+                <a:effectLst/>
+                <a:latin typeface="+mn-lt"/>
+                <a:ea typeface="+mn-ea"/>
+                <a:cs typeface="+mn-cs"/>
+              </a:rPr>
+              <a:t> </a:t>
+            </a:r>
+            <a:r>
+              <a:rPr lang="ko-KR" altLang="ko-KR" sz="1200" b="0" i="0" kern="1200" dirty="0" err="1">
+                <a:solidFill>
+                  <a:schemeClr val="tx1"/>
+                </a:solidFill>
+                <a:effectLst/>
+                <a:latin typeface="+mn-lt"/>
+                <a:ea typeface="+mn-ea"/>
+                <a:cs typeface="+mn-cs"/>
+              </a:rPr>
+              <a:t>level</a:t>
+            </a:r>
+            <a:r>
+              <a:rPr lang="ko-KR" altLang="ko-KR" sz="1200" b="0" i="0" kern="1200" dirty="0">
+                <a:solidFill>
+                  <a:schemeClr val="tx1"/>
+                </a:solidFill>
+                <a:effectLst/>
+                <a:latin typeface="+mn-lt"/>
+                <a:ea typeface="+mn-ea"/>
+                <a:cs typeface="+mn-cs"/>
+              </a:rPr>
+              <a:t>)+0.518, </a:t>
+            </a:r>
+            <a:r>
+              <a:rPr lang="ko-KR" altLang="ko-KR" sz="1200" b="0" i="0" kern="1200" dirty="0" err="1">
+                <a:solidFill>
+                  <a:schemeClr val="tx1"/>
+                </a:solidFill>
+                <a:effectLst/>
+                <a:latin typeface="+mn-lt"/>
+                <a:ea typeface="+mn-ea"/>
+                <a:cs typeface="+mn-cs"/>
+              </a:rPr>
+              <a:t>insig</a:t>
+            </a:r>
+            <a:r>
+              <a:rPr lang="ko-KR" altLang="ko-KR" sz="1200" b="0" i="0" kern="1200" dirty="0">
+                <a:solidFill>
+                  <a:schemeClr val="tx1"/>
+                </a:solidFill>
+                <a:effectLst/>
+                <a:latin typeface="+mn-lt"/>
+                <a:ea typeface="+mn-ea"/>
+                <a:cs typeface="+mn-cs"/>
+              </a:rPr>
+              <a:t>.</a:t>
+            </a:r>
+          </a:p>
+          <a:p>
+            <a:r>
+              <a:rPr lang="ko-KR" altLang="ko-KR" sz="1200" b="1" i="0" kern="1200" dirty="0">
+                <a:solidFill>
+                  <a:schemeClr val="tx1"/>
+                </a:solidFill>
+                <a:effectLst/>
+                <a:latin typeface="+mn-lt"/>
+                <a:ea typeface="+mn-ea"/>
+                <a:cs typeface="+mn-cs"/>
+              </a:rPr>
+              <a:t>β₂</a:t>
+            </a:r>
+            <a:r>
+              <a:rPr lang="ko-KR" altLang="ko-KR" sz="1200" b="0" i="0" kern="1200" dirty="0" err="1">
+                <a:solidFill>
+                  <a:schemeClr val="tx1"/>
+                </a:solidFill>
+                <a:effectLst/>
+                <a:latin typeface="+mn-lt"/>
+                <a:ea typeface="+mn-ea"/>
+                <a:cs typeface="+mn-cs"/>
+              </a:rPr>
+              <a:t>Outflow</a:t>
+            </a:r>
+            <a:r>
+              <a:rPr lang="ko-KR" altLang="ko-KR" sz="1200" b="0" i="0" kern="1200" dirty="0">
+                <a:solidFill>
+                  <a:schemeClr val="tx1"/>
+                </a:solidFill>
+                <a:effectLst/>
+                <a:latin typeface="+mn-lt"/>
+                <a:ea typeface="+mn-ea"/>
+                <a:cs typeface="+mn-cs"/>
+              </a:rPr>
+              <a:t> = </a:t>
+            </a:r>
+            <a:r>
+              <a:rPr lang="ko-KR" altLang="ko-KR" sz="1200" b="0" i="0" kern="1200" dirty="0" err="1">
+                <a:solidFill>
+                  <a:schemeClr val="tx1"/>
+                </a:solidFill>
+                <a:effectLst/>
+                <a:latin typeface="+mn-lt"/>
+                <a:ea typeface="+mn-ea"/>
+                <a:cs typeface="+mn-cs"/>
+              </a:rPr>
+              <a:t>max</a:t>
+            </a:r>
+            <a:r>
+              <a:rPr lang="ko-KR" altLang="ko-KR" sz="1200" b="0" i="0" kern="1200" dirty="0">
+                <a:solidFill>
+                  <a:schemeClr val="tx1"/>
+                </a:solidFill>
+                <a:effectLst/>
+                <a:latin typeface="+mn-lt"/>
+                <a:ea typeface="+mn-ea"/>
+                <a:cs typeface="+mn-cs"/>
+              </a:rPr>
+              <a:t>(−</a:t>
+            </a:r>
+            <a:r>
+              <a:rPr lang="ko-KR" altLang="ko-KR" sz="1200" b="0" i="0" kern="1200" dirty="0" err="1">
+                <a:solidFill>
+                  <a:schemeClr val="tx1"/>
+                </a:solidFill>
+                <a:effectLst/>
+                <a:latin typeface="+mn-lt"/>
+                <a:ea typeface="+mn-ea"/>
+                <a:cs typeface="+mn-cs"/>
+              </a:rPr>
+              <a:t>ΔlnS</a:t>
+            </a:r>
+            <a:r>
+              <a:rPr lang="ko-KR" altLang="ko-KR" sz="1200" b="0" i="0" kern="1200" dirty="0">
+                <a:solidFill>
+                  <a:schemeClr val="tx1"/>
+                </a:solidFill>
+                <a:effectLst/>
+                <a:latin typeface="+mn-lt"/>
+                <a:ea typeface="+mn-ea"/>
+                <a:cs typeface="+mn-cs"/>
+              </a:rPr>
+              <a:t>, 0)</a:t>
+            </a:r>
+            <a:r>
+              <a:rPr lang="ko-KR" altLang="ko-KR" sz="1200" b="0" i="0" kern="1200" dirty="0" err="1">
+                <a:solidFill>
+                  <a:schemeClr val="tx1"/>
+                </a:solidFill>
+                <a:effectLst/>
+                <a:latin typeface="+mn-lt"/>
+                <a:ea typeface="+mn-ea"/>
+                <a:cs typeface="+mn-cs"/>
+              </a:rPr>
+              <a:t>Effect</a:t>
+            </a:r>
+            <a:r>
+              <a:rPr lang="ko-KR" altLang="ko-KR" sz="1200" b="0" i="0" kern="1200" dirty="0">
+                <a:solidFill>
+                  <a:schemeClr val="tx1"/>
+                </a:solidFill>
+                <a:effectLst/>
+                <a:latin typeface="+mn-lt"/>
+                <a:ea typeface="+mn-ea"/>
+                <a:cs typeface="+mn-cs"/>
+              </a:rPr>
+              <a:t> of </a:t>
+            </a:r>
+            <a:r>
+              <a:rPr lang="ko-KR" altLang="ko-KR" sz="1200" b="0" i="0" kern="1200" dirty="0" err="1">
+                <a:solidFill>
+                  <a:schemeClr val="tx1"/>
+                </a:solidFill>
+                <a:effectLst/>
+                <a:latin typeface="+mn-lt"/>
+                <a:ea typeface="+mn-ea"/>
+                <a:cs typeface="+mn-cs"/>
+              </a:rPr>
+              <a:t>supply</a:t>
+            </a:r>
+            <a:r>
+              <a:rPr lang="ko-KR" altLang="ko-KR" sz="1200" b="0" i="0" kern="1200" dirty="0">
+                <a:solidFill>
+                  <a:schemeClr val="tx1"/>
+                </a:solidFill>
+                <a:effectLst/>
+                <a:latin typeface="+mn-lt"/>
+                <a:ea typeface="+mn-ea"/>
+                <a:cs typeface="+mn-cs"/>
+              </a:rPr>
+              <a:t> </a:t>
+            </a:r>
+            <a:r>
+              <a:rPr lang="ko-KR" altLang="ko-KR" sz="1200" b="0" i="1" kern="1200" dirty="0" err="1">
+                <a:solidFill>
+                  <a:schemeClr val="tx1"/>
+                </a:solidFill>
+                <a:effectLst/>
+                <a:latin typeface="+mn-lt"/>
+                <a:ea typeface="+mn-ea"/>
+                <a:cs typeface="+mn-cs"/>
+              </a:rPr>
+              <a:t>contraction</a:t>
+            </a:r>
+            <a:r>
+              <a:rPr lang="ko-KR" altLang="ko-KR" sz="1200" b="0" i="0" kern="1200" dirty="0">
+                <a:solidFill>
+                  <a:schemeClr val="tx1"/>
+                </a:solidFill>
+                <a:effectLst/>
+                <a:latin typeface="+mn-lt"/>
+                <a:ea typeface="+mn-ea"/>
+                <a:cs typeface="+mn-cs"/>
+              </a:rPr>
+              <a:t> </a:t>
+            </a:r>
+            <a:r>
+              <a:rPr lang="ko-KR" altLang="ko-KR" sz="1200" b="0" i="0" kern="1200" dirty="0" err="1">
+                <a:solidFill>
+                  <a:schemeClr val="tx1"/>
+                </a:solidFill>
+                <a:effectLst/>
+                <a:latin typeface="+mn-lt"/>
+                <a:ea typeface="+mn-ea"/>
+                <a:cs typeface="+mn-cs"/>
+              </a:rPr>
+              <a:t>on</a:t>
+            </a:r>
+            <a:r>
+              <a:rPr lang="ko-KR" altLang="ko-KR" sz="1200" b="0" i="0" kern="1200" dirty="0">
+                <a:solidFill>
+                  <a:schemeClr val="tx1"/>
+                </a:solidFill>
+                <a:effectLst/>
+                <a:latin typeface="+mn-lt"/>
+                <a:ea typeface="+mn-ea"/>
+                <a:cs typeface="+mn-cs"/>
+              </a:rPr>
+              <a:t> </a:t>
+            </a:r>
+            <a:r>
+              <a:rPr lang="ko-KR" altLang="ko-KR" sz="1200" b="0" i="0" kern="1200" dirty="0" err="1">
+                <a:solidFill>
+                  <a:schemeClr val="tx1"/>
+                </a:solidFill>
+                <a:effectLst/>
+                <a:latin typeface="+mn-lt"/>
+                <a:ea typeface="+mn-ea"/>
+                <a:cs typeface="+mn-cs"/>
+              </a:rPr>
+              <a:t>spread</a:t>
+            </a:r>
+            <a:r>
+              <a:rPr lang="ko-KR" altLang="ko-KR" sz="1200" b="0" i="0" kern="1200" dirty="0">
+                <a:solidFill>
+                  <a:schemeClr val="tx1"/>
+                </a:solidFill>
+                <a:effectLst/>
+                <a:latin typeface="+mn-lt"/>
+                <a:ea typeface="+mn-ea"/>
+                <a:cs typeface="+mn-cs"/>
+              </a:rPr>
+              <a:t> </a:t>
+            </a:r>
+            <a:r>
+              <a:rPr lang="ko-KR" altLang="ko-KR" sz="1200" b="0" i="0" kern="1200" dirty="0" err="1">
+                <a:solidFill>
+                  <a:schemeClr val="tx1"/>
+                </a:solidFill>
+                <a:effectLst/>
+                <a:latin typeface="+mn-lt"/>
+                <a:ea typeface="+mn-ea"/>
+                <a:cs typeface="+mn-cs"/>
+              </a:rPr>
+              <a:t>change</a:t>
+            </a:r>
+            <a:r>
+              <a:rPr lang="ko-KR" altLang="ko-KR" sz="1200" b="0" i="0" kern="1200" dirty="0">
+                <a:solidFill>
+                  <a:schemeClr val="tx1"/>
+                </a:solidFill>
+                <a:effectLst/>
+                <a:latin typeface="+mn-lt"/>
+                <a:ea typeface="+mn-ea"/>
+                <a:cs typeface="+mn-cs"/>
+              </a:rPr>
+              <a:t> (</a:t>
+            </a:r>
+            <a:r>
+              <a:rPr lang="ko-KR" altLang="ko-KR" sz="1200" b="0" i="0" kern="1200" dirty="0" err="1">
+                <a:solidFill>
+                  <a:schemeClr val="tx1"/>
+                </a:solidFill>
+                <a:effectLst/>
+                <a:latin typeface="+mn-lt"/>
+                <a:ea typeface="+mn-ea"/>
+                <a:cs typeface="+mn-cs"/>
+              </a:rPr>
+              <a:t>regardless</a:t>
+            </a:r>
+            <a:r>
+              <a:rPr lang="ko-KR" altLang="ko-KR" sz="1200" b="0" i="0" kern="1200" dirty="0">
+                <a:solidFill>
+                  <a:schemeClr val="tx1"/>
+                </a:solidFill>
+                <a:effectLst/>
+                <a:latin typeface="+mn-lt"/>
+                <a:ea typeface="+mn-ea"/>
+                <a:cs typeface="+mn-cs"/>
+              </a:rPr>
+              <a:t> of </a:t>
+            </a:r>
+            <a:r>
+              <a:rPr lang="ko-KR" altLang="ko-KR" sz="1200" b="0" i="0" kern="1200" dirty="0" err="1">
+                <a:solidFill>
+                  <a:schemeClr val="tx1"/>
+                </a:solidFill>
+                <a:effectLst/>
+                <a:latin typeface="+mn-lt"/>
+                <a:ea typeface="+mn-ea"/>
+                <a:cs typeface="+mn-cs"/>
+              </a:rPr>
+              <a:t>buffer</a:t>
+            </a:r>
+            <a:r>
+              <a:rPr lang="ko-KR" altLang="ko-KR" sz="1200" b="0" i="0" kern="1200" dirty="0">
+                <a:solidFill>
+                  <a:schemeClr val="tx1"/>
+                </a:solidFill>
+                <a:effectLst/>
+                <a:latin typeface="+mn-lt"/>
+                <a:ea typeface="+mn-ea"/>
+                <a:cs typeface="+mn-cs"/>
+              </a:rPr>
+              <a:t> </a:t>
+            </a:r>
+            <a:r>
+              <a:rPr lang="ko-KR" altLang="ko-KR" sz="1200" b="0" i="0" kern="1200" dirty="0" err="1">
+                <a:solidFill>
+                  <a:schemeClr val="tx1"/>
+                </a:solidFill>
+                <a:effectLst/>
+                <a:latin typeface="+mn-lt"/>
+                <a:ea typeface="+mn-ea"/>
+                <a:cs typeface="+mn-cs"/>
+              </a:rPr>
+              <a:t>level</a:t>
+            </a:r>
+            <a:r>
+              <a:rPr lang="ko-KR" altLang="ko-KR" sz="1200" b="0" i="0" kern="1200" dirty="0">
+                <a:solidFill>
+                  <a:schemeClr val="tx1"/>
+                </a:solidFill>
+                <a:effectLst/>
+                <a:latin typeface="+mn-lt"/>
+                <a:ea typeface="+mn-ea"/>
+                <a:cs typeface="+mn-cs"/>
+              </a:rPr>
+              <a:t>)−0.081, </a:t>
+            </a:r>
+            <a:r>
+              <a:rPr lang="ko-KR" altLang="ko-KR" sz="1200" b="0" i="0" kern="1200" dirty="0" err="1">
+                <a:solidFill>
+                  <a:schemeClr val="tx1"/>
+                </a:solidFill>
+                <a:effectLst/>
+                <a:latin typeface="+mn-lt"/>
+                <a:ea typeface="+mn-ea"/>
+                <a:cs typeface="+mn-cs"/>
+              </a:rPr>
+              <a:t>insig</a:t>
+            </a:r>
+            <a:r>
+              <a:rPr lang="ko-KR" altLang="ko-KR" sz="1200" b="0" i="0" kern="1200" dirty="0">
+                <a:solidFill>
+                  <a:schemeClr val="tx1"/>
+                </a:solidFill>
+                <a:effectLst/>
+                <a:latin typeface="+mn-lt"/>
+                <a:ea typeface="+mn-ea"/>
+                <a:cs typeface="+mn-cs"/>
+              </a:rPr>
+              <a:t>.</a:t>
+            </a:r>
+          </a:p>
+          <a:p>
+            <a:r>
+              <a:rPr lang="ko-KR" altLang="ko-KR" sz="1200" b="1" i="0" kern="1200" dirty="0">
+                <a:solidFill>
+                  <a:schemeClr val="tx1"/>
+                </a:solidFill>
+                <a:effectLst/>
+                <a:latin typeface="+mn-lt"/>
+                <a:ea typeface="+mn-ea"/>
+                <a:cs typeface="+mn-cs"/>
+              </a:rPr>
+              <a:t>β₃</a:t>
+            </a:r>
+            <a:r>
+              <a:rPr lang="ko-KR" altLang="ko-KR" sz="1200" b="0" i="0" kern="1200" dirty="0" err="1">
+                <a:solidFill>
+                  <a:schemeClr val="tx1"/>
+                </a:solidFill>
+                <a:effectLst/>
+                <a:latin typeface="+mn-lt"/>
+                <a:ea typeface="+mn-ea"/>
+                <a:cs typeface="+mn-cs"/>
+              </a:rPr>
+              <a:t>Low</a:t>
+            </a:r>
+            <a:r>
+              <a:rPr lang="ko-KR" altLang="ko-KR" sz="1200" b="0" i="0" kern="1200" dirty="0">
+                <a:solidFill>
+                  <a:schemeClr val="tx1"/>
+                </a:solidFill>
+                <a:effectLst/>
+                <a:latin typeface="+mn-lt"/>
+                <a:ea typeface="+mn-ea"/>
+                <a:cs typeface="+mn-cs"/>
+              </a:rPr>
+              <a:t> = 1[</a:t>
+            </a:r>
+            <a:r>
+              <a:rPr lang="ko-KR" altLang="ko-KR" sz="1200" b="0" i="0" kern="1200" dirty="0" err="1">
+                <a:solidFill>
+                  <a:schemeClr val="tx1"/>
+                </a:solidFill>
+                <a:effectLst/>
+                <a:latin typeface="+mn-lt"/>
+                <a:ea typeface="+mn-ea"/>
+                <a:cs typeface="+mn-cs"/>
+              </a:rPr>
+              <a:t>L</a:t>
+            </a:r>
+            <a:r>
+              <a:rPr lang="ko-KR" altLang="ko-KR" sz="1200" b="0" i="0" kern="1200" dirty="0">
+                <a:solidFill>
+                  <a:schemeClr val="tx1"/>
+                </a:solidFill>
+                <a:effectLst/>
+                <a:latin typeface="+mn-lt"/>
+                <a:ea typeface="+mn-ea"/>
+                <a:cs typeface="+mn-cs"/>
+              </a:rPr>
+              <a:t> &lt; 12%]</a:t>
+            </a:r>
+            <a:r>
+              <a:rPr lang="ko-KR" altLang="ko-KR" sz="1200" b="0" i="0" kern="1200" dirty="0" err="1">
+                <a:solidFill>
+                  <a:schemeClr val="tx1"/>
+                </a:solidFill>
+                <a:effectLst/>
+                <a:latin typeface="+mn-lt"/>
+                <a:ea typeface="+mn-ea"/>
+                <a:cs typeface="+mn-cs"/>
+              </a:rPr>
+              <a:t>Whether</a:t>
+            </a:r>
+            <a:r>
+              <a:rPr lang="ko-KR" altLang="ko-KR" sz="1200" b="0" i="0" kern="1200" dirty="0">
+                <a:solidFill>
+                  <a:schemeClr val="tx1"/>
+                </a:solidFill>
+                <a:effectLst/>
+                <a:latin typeface="+mn-lt"/>
+                <a:ea typeface="+mn-ea"/>
+                <a:cs typeface="+mn-cs"/>
+              </a:rPr>
+              <a:t> </a:t>
+            </a:r>
+            <a:r>
+              <a:rPr lang="ko-KR" altLang="ko-KR" sz="1200" b="0" i="0" kern="1200" dirty="0" err="1">
+                <a:solidFill>
+                  <a:schemeClr val="tx1"/>
+                </a:solidFill>
+                <a:effectLst/>
+                <a:latin typeface="+mn-lt"/>
+                <a:ea typeface="+mn-ea"/>
+                <a:cs typeface="+mn-cs"/>
+              </a:rPr>
+              <a:t>being</a:t>
+            </a:r>
+            <a:r>
+              <a:rPr lang="ko-KR" altLang="ko-KR" sz="1200" b="0" i="0" kern="1200" dirty="0">
+                <a:solidFill>
+                  <a:schemeClr val="tx1"/>
+                </a:solidFill>
+                <a:effectLst/>
+                <a:latin typeface="+mn-lt"/>
+                <a:ea typeface="+mn-ea"/>
+                <a:cs typeface="+mn-cs"/>
+              </a:rPr>
+              <a:t> </a:t>
+            </a:r>
+            <a:r>
+              <a:rPr lang="ko-KR" altLang="ko-KR" sz="1200" b="0" i="0" kern="1200" dirty="0" err="1">
+                <a:solidFill>
+                  <a:schemeClr val="tx1"/>
+                </a:solidFill>
+                <a:effectLst/>
+                <a:latin typeface="+mn-lt"/>
+                <a:ea typeface="+mn-ea"/>
+                <a:cs typeface="+mn-cs"/>
+              </a:rPr>
+              <a:t>in</a:t>
+            </a:r>
+            <a:r>
+              <a:rPr lang="ko-KR" altLang="ko-KR" sz="1200" b="0" i="0" kern="1200" dirty="0">
+                <a:solidFill>
+                  <a:schemeClr val="tx1"/>
+                </a:solidFill>
+                <a:effectLst/>
+                <a:latin typeface="+mn-lt"/>
+                <a:ea typeface="+mn-ea"/>
+                <a:cs typeface="+mn-cs"/>
+              </a:rPr>
+              <a:t> </a:t>
+            </a:r>
+            <a:r>
+              <a:rPr lang="ko-KR" altLang="ko-KR" sz="1200" b="0" i="0" kern="1200" dirty="0" err="1">
+                <a:solidFill>
+                  <a:schemeClr val="tx1"/>
+                </a:solidFill>
+                <a:effectLst/>
+                <a:latin typeface="+mn-lt"/>
+                <a:ea typeface="+mn-ea"/>
+                <a:cs typeface="+mn-cs"/>
+              </a:rPr>
+              <a:t>a</a:t>
+            </a:r>
+            <a:r>
+              <a:rPr lang="ko-KR" altLang="ko-KR" sz="1200" b="0" i="0" kern="1200" dirty="0">
+                <a:solidFill>
+                  <a:schemeClr val="tx1"/>
+                </a:solidFill>
+                <a:effectLst/>
+                <a:latin typeface="+mn-lt"/>
+                <a:ea typeface="+mn-ea"/>
+                <a:cs typeface="+mn-cs"/>
+              </a:rPr>
+              <a:t> </a:t>
+            </a:r>
+            <a:r>
+              <a:rPr lang="ko-KR" altLang="ko-KR" sz="1200" b="0" i="0" kern="1200" dirty="0" err="1">
+                <a:solidFill>
+                  <a:schemeClr val="tx1"/>
+                </a:solidFill>
+                <a:effectLst/>
+                <a:latin typeface="+mn-lt"/>
+                <a:ea typeface="+mn-ea"/>
+                <a:cs typeface="+mn-cs"/>
+              </a:rPr>
+              <a:t>low-buffer</a:t>
+            </a:r>
+            <a:r>
+              <a:rPr lang="ko-KR" altLang="ko-KR" sz="1200" b="0" i="0" kern="1200" dirty="0">
+                <a:solidFill>
+                  <a:schemeClr val="tx1"/>
+                </a:solidFill>
+                <a:effectLst/>
+                <a:latin typeface="+mn-lt"/>
+                <a:ea typeface="+mn-ea"/>
+                <a:cs typeface="+mn-cs"/>
+              </a:rPr>
+              <a:t> </a:t>
+            </a:r>
+            <a:r>
+              <a:rPr lang="ko-KR" altLang="ko-KR" sz="1200" b="0" i="0" kern="1200" dirty="0" err="1">
+                <a:solidFill>
+                  <a:schemeClr val="tx1"/>
+                </a:solidFill>
+                <a:effectLst/>
+                <a:latin typeface="+mn-lt"/>
+                <a:ea typeface="+mn-ea"/>
+                <a:cs typeface="+mn-cs"/>
+              </a:rPr>
+              <a:t>state</a:t>
+            </a:r>
+            <a:r>
+              <a:rPr lang="ko-KR" altLang="ko-KR" sz="1200" b="0" i="0" kern="1200" dirty="0">
+                <a:solidFill>
+                  <a:schemeClr val="tx1"/>
+                </a:solidFill>
+                <a:effectLst/>
+                <a:latin typeface="+mn-lt"/>
+                <a:ea typeface="+mn-ea"/>
+                <a:cs typeface="+mn-cs"/>
+              </a:rPr>
+              <a:t> </a:t>
+            </a:r>
+            <a:r>
+              <a:rPr lang="ko-KR" altLang="ko-KR" sz="1200" b="0" i="0" kern="1200" dirty="0" err="1">
+                <a:solidFill>
+                  <a:schemeClr val="tx1"/>
+                </a:solidFill>
+                <a:effectLst/>
+                <a:latin typeface="+mn-lt"/>
+                <a:ea typeface="+mn-ea"/>
+                <a:cs typeface="+mn-cs"/>
+              </a:rPr>
+              <a:t>itself</a:t>
+            </a:r>
+            <a:r>
+              <a:rPr lang="ko-KR" altLang="ko-KR" sz="1200" b="0" i="0" kern="1200" dirty="0">
+                <a:solidFill>
+                  <a:schemeClr val="tx1"/>
+                </a:solidFill>
+                <a:effectLst/>
+                <a:latin typeface="+mn-lt"/>
+                <a:ea typeface="+mn-ea"/>
+                <a:cs typeface="+mn-cs"/>
+              </a:rPr>
+              <a:t> </a:t>
+            </a:r>
+            <a:r>
+              <a:rPr lang="ko-KR" altLang="ko-KR" sz="1200" b="0" i="0" kern="1200" dirty="0" err="1">
+                <a:solidFill>
+                  <a:schemeClr val="tx1"/>
+                </a:solidFill>
+                <a:effectLst/>
+                <a:latin typeface="+mn-lt"/>
+                <a:ea typeface="+mn-ea"/>
+                <a:cs typeface="+mn-cs"/>
+              </a:rPr>
+              <a:t>shifts</a:t>
+            </a:r>
+            <a:r>
+              <a:rPr lang="ko-KR" altLang="ko-KR" sz="1200" b="0" i="0" kern="1200" dirty="0">
+                <a:solidFill>
+                  <a:schemeClr val="tx1"/>
+                </a:solidFill>
+                <a:effectLst/>
+                <a:latin typeface="+mn-lt"/>
+                <a:ea typeface="+mn-ea"/>
+                <a:cs typeface="+mn-cs"/>
+              </a:rPr>
+              <a:t> </a:t>
+            </a:r>
+            <a:r>
+              <a:rPr lang="ko-KR" altLang="ko-KR" sz="1200" b="0" i="0" kern="1200" dirty="0" err="1">
+                <a:solidFill>
+                  <a:schemeClr val="tx1"/>
+                </a:solidFill>
+                <a:effectLst/>
+                <a:latin typeface="+mn-lt"/>
+                <a:ea typeface="+mn-ea"/>
+                <a:cs typeface="+mn-cs"/>
+              </a:rPr>
+              <a:t>the</a:t>
+            </a:r>
+            <a:r>
+              <a:rPr lang="ko-KR" altLang="ko-KR" sz="1200" b="0" i="0" kern="1200" dirty="0">
+                <a:solidFill>
+                  <a:schemeClr val="tx1"/>
+                </a:solidFill>
+                <a:effectLst/>
+                <a:latin typeface="+mn-lt"/>
+                <a:ea typeface="+mn-ea"/>
+                <a:cs typeface="+mn-cs"/>
+              </a:rPr>
+              <a:t> </a:t>
+            </a:r>
+            <a:r>
+              <a:rPr lang="ko-KR" altLang="ko-KR" sz="1200" b="0" i="0" kern="1200" dirty="0" err="1">
+                <a:solidFill>
+                  <a:schemeClr val="tx1"/>
+                </a:solidFill>
+                <a:effectLst/>
+                <a:latin typeface="+mn-lt"/>
+                <a:ea typeface="+mn-ea"/>
+                <a:cs typeface="+mn-cs"/>
+              </a:rPr>
+              <a:t>spread</a:t>
+            </a:r>
+            <a:r>
+              <a:rPr lang="ko-KR" altLang="ko-KR" sz="1200" b="0" i="0" kern="1200" dirty="0">
+                <a:solidFill>
+                  <a:schemeClr val="tx1"/>
+                </a:solidFill>
+                <a:effectLst/>
+                <a:latin typeface="+mn-lt"/>
+                <a:ea typeface="+mn-ea"/>
+                <a:cs typeface="+mn-cs"/>
+              </a:rPr>
+              <a:t> level+0.008, </a:t>
+            </a:r>
+            <a:r>
+              <a:rPr lang="ko-KR" altLang="ko-KR" sz="1200" b="0" i="0" kern="1200" dirty="0" err="1">
+                <a:solidFill>
+                  <a:schemeClr val="tx1"/>
+                </a:solidFill>
+                <a:effectLst/>
+                <a:latin typeface="+mn-lt"/>
+                <a:ea typeface="+mn-ea"/>
+                <a:cs typeface="+mn-cs"/>
+              </a:rPr>
+              <a:t>insig</a:t>
+            </a:r>
+            <a:r>
+              <a:rPr lang="ko-KR" altLang="ko-KR" sz="1200" b="0" i="0" kern="1200" dirty="0">
+                <a:solidFill>
+                  <a:schemeClr val="tx1"/>
+                </a:solidFill>
+                <a:effectLst/>
+                <a:latin typeface="+mn-lt"/>
+                <a:ea typeface="+mn-ea"/>
+                <a:cs typeface="+mn-cs"/>
+              </a:rPr>
+              <a:t>.</a:t>
+            </a:r>
+          </a:p>
+          <a:p>
+            <a:r>
+              <a:rPr lang="ko-KR" altLang="ko-KR" sz="1200" b="1" i="0" kern="1200" dirty="0">
+                <a:solidFill>
+                  <a:schemeClr val="tx1"/>
+                </a:solidFill>
+                <a:effectLst/>
+                <a:latin typeface="+mn-lt"/>
+                <a:ea typeface="+mn-ea"/>
+                <a:cs typeface="+mn-cs"/>
+              </a:rPr>
+              <a:t>β₄</a:t>
+            </a:r>
+            <a:r>
+              <a:rPr lang="ko-KR" altLang="ko-KR" sz="1200" b="0" i="0" kern="1200" dirty="0" err="1">
+                <a:solidFill>
+                  <a:schemeClr val="tx1"/>
+                </a:solidFill>
+                <a:effectLst/>
+                <a:latin typeface="+mn-lt"/>
+                <a:ea typeface="+mn-ea"/>
+                <a:cs typeface="+mn-cs"/>
+              </a:rPr>
+              <a:t>Low</a:t>
+            </a:r>
+            <a:r>
+              <a:rPr lang="ko-KR" altLang="ko-KR" sz="1200" b="0" i="0" kern="1200" dirty="0">
+                <a:solidFill>
+                  <a:schemeClr val="tx1"/>
+                </a:solidFill>
+                <a:effectLst/>
+                <a:latin typeface="+mn-lt"/>
+                <a:ea typeface="+mn-ea"/>
+                <a:cs typeface="+mn-cs"/>
+              </a:rPr>
+              <a:t> × </a:t>
+            </a:r>
+            <a:r>
+              <a:rPr lang="ko-KR" altLang="ko-KR" sz="1200" b="0" i="0" kern="1200" dirty="0" err="1">
+                <a:solidFill>
+                  <a:schemeClr val="tx1"/>
+                </a:solidFill>
+                <a:effectLst/>
+                <a:latin typeface="+mn-lt"/>
+                <a:ea typeface="+mn-ea"/>
+                <a:cs typeface="+mn-cs"/>
+              </a:rPr>
+              <a:t>InflowDoes</a:t>
+            </a:r>
+            <a:r>
+              <a:rPr lang="ko-KR" altLang="ko-KR" sz="1200" b="0" i="0" kern="1200" dirty="0">
+                <a:solidFill>
+                  <a:schemeClr val="tx1"/>
+                </a:solidFill>
+                <a:effectLst/>
+                <a:latin typeface="+mn-lt"/>
+                <a:ea typeface="+mn-ea"/>
+                <a:cs typeface="+mn-cs"/>
+              </a:rPr>
+              <a:t> </a:t>
+            </a:r>
+            <a:r>
+              <a:rPr lang="ko-KR" altLang="ko-KR" sz="1200" b="0" i="0" kern="1200" dirty="0" err="1">
+                <a:solidFill>
+                  <a:schemeClr val="tx1"/>
+                </a:solidFill>
+                <a:effectLst/>
+                <a:latin typeface="+mn-lt"/>
+                <a:ea typeface="+mn-ea"/>
+                <a:cs typeface="+mn-cs"/>
+              </a:rPr>
+              <a:t>low</a:t>
+            </a:r>
+            <a:r>
+              <a:rPr lang="ko-KR" altLang="ko-KR" sz="1200" b="0" i="0" kern="1200" dirty="0">
+                <a:solidFill>
+                  <a:schemeClr val="tx1"/>
+                </a:solidFill>
+                <a:effectLst/>
+                <a:latin typeface="+mn-lt"/>
+                <a:ea typeface="+mn-ea"/>
+                <a:cs typeface="+mn-cs"/>
+              </a:rPr>
+              <a:t> </a:t>
+            </a:r>
+            <a:r>
+              <a:rPr lang="ko-KR" altLang="ko-KR" sz="1200" b="0" i="0" kern="1200" dirty="0" err="1">
+                <a:solidFill>
+                  <a:schemeClr val="tx1"/>
+                </a:solidFill>
+                <a:effectLst/>
+                <a:latin typeface="+mn-lt"/>
+                <a:ea typeface="+mn-ea"/>
+                <a:cs typeface="+mn-cs"/>
+              </a:rPr>
+              <a:t>buffer</a:t>
+            </a:r>
+            <a:r>
+              <a:rPr lang="ko-KR" altLang="ko-KR" sz="1200" b="0" i="0" kern="1200" dirty="0">
+                <a:solidFill>
+                  <a:schemeClr val="tx1"/>
+                </a:solidFill>
+                <a:effectLst/>
+                <a:latin typeface="+mn-lt"/>
+                <a:ea typeface="+mn-ea"/>
+                <a:cs typeface="+mn-cs"/>
+              </a:rPr>
+              <a:t> </a:t>
+            </a:r>
+            <a:r>
+              <a:rPr lang="ko-KR" altLang="ko-KR" sz="1200" b="0" i="1" kern="1200" dirty="0" err="1">
+                <a:solidFill>
+                  <a:schemeClr val="tx1"/>
+                </a:solidFill>
+                <a:effectLst/>
+                <a:latin typeface="+mn-lt"/>
+                <a:ea typeface="+mn-ea"/>
+                <a:cs typeface="+mn-cs"/>
+              </a:rPr>
+              <a:t>change</a:t>
+            </a:r>
+            <a:r>
+              <a:rPr lang="ko-KR" altLang="ko-KR" sz="1200" b="0" i="0" kern="1200" dirty="0">
+                <a:solidFill>
+                  <a:schemeClr val="tx1"/>
+                </a:solidFill>
+                <a:effectLst/>
+                <a:latin typeface="+mn-lt"/>
+                <a:ea typeface="+mn-ea"/>
+                <a:cs typeface="+mn-cs"/>
+              </a:rPr>
+              <a:t> </a:t>
+            </a:r>
+            <a:r>
+              <a:rPr lang="ko-KR" altLang="ko-KR" sz="1200" b="0" i="0" kern="1200" dirty="0" err="1">
+                <a:solidFill>
+                  <a:schemeClr val="tx1"/>
+                </a:solidFill>
+                <a:effectLst/>
+                <a:latin typeface="+mn-lt"/>
+                <a:ea typeface="+mn-ea"/>
+                <a:cs typeface="+mn-cs"/>
+              </a:rPr>
+              <a:t>how</a:t>
+            </a:r>
+            <a:r>
+              <a:rPr lang="ko-KR" altLang="ko-KR" sz="1200" b="0" i="0" kern="1200" dirty="0">
+                <a:solidFill>
+                  <a:schemeClr val="tx1"/>
+                </a:solidFill>
+                <a:effectLst/>
+                <a:latin typeface="+mn-lt"/>
+                <a:ea typeface="+mn-ea"/>
+                <a:cs typeface="+mn-cs"/>
+              </a:rPr>
+              <a:t> </a:t>
+            </a:r>
+            <a:r>
+              <a:rPr lang="ko-KR" altLang="ko-KR" sz="1200" b="0" i="0" kern="1200" dirty="0" err="1">
+                <a:solidFill>
+                  <a:schemeClr val="tx1"/>
+                </a:solidFill>
+                <a:effectLst/>
+                <a:latin typeface="+mn-lt"/>
+                <a:ea typeface="+mn-ea"/>
+                <a:cs typeface="+mn-cs"/>
+              </a:rPr>
+              <a:t>inflows</a:t>
+            </a:r>
+            <a:r>
+              <a:rPr lang="ko-KR" altLang="ko-KR" sz="1200" b="0" i="0" kern="1200" dirty="0">
+                <a:solidFill>
+                  <a:schemeClr val="tx1"/>
+                </a:solidFill>
+                <a:effectLst/>
+                <a:latin typeface="+mn-lt"/>
+                <a:ea typeface="+mn-ea"/>
+                <a:cs typeface="+mn-cs"/>
+              </a:rPr>
+              <a:t> </a:t>
+            </a:r>
+            <a:r>
+              <a:rPr lang="ko-KR" altLang="ko-KR" sz="1200" b="0" i="0" kern="1200" dirty="0" err="1">
+                <a:solidFill>
+                  <a:schemeClr val="tx1"/>
+                </a:solidFill>
+                <a:effectLst/>
+                <a:latin typeface="+mn-lt"/>
+                <a:ea typeface="+mn-ea"/>
+                <a:cs typeface="+mn-cs"/>
+              </a:rPr>
+              <a:t>affect</a:t>
+            </a:r>
+            <a:r>
+              <a:rPr lang="ko-KR" altLang="ko-KR" sz="1200" b="0" i="0" kern="1200" dirty="0">
+                <a:solidFill>
+                  <a:schemeClr val="tx1"/>
+                </a:solidFill>
+                <a:effectLst/>
+                <a:latin typeface="+mn-lt"/>
+                <a:ea typeface="+mn-ea"/>
+                <a:cs typeface="+mn-cs"/>
+              </a:rPr>
+              <a:t> </a:t>
+            </a:r>
+            <a:r>
+              <a:rPr lang="ko-KR" altLang="ko-KR" sz="1200" b="0" i="0" kern="1200" dirty="0" err="1">
+                <a:solidFill>
+                  <a:schemeClr val="tx1"/>
+                </a:solidFill>
+                <a:effectLst/>
+                <a:latin typeface="+mn-lt"/>
+                <a:ea typeface="+mn-ea"/>
+                <a:cs typeface="+mn-cs"/>
+              </a:rPr>
+              <a:t>spread</a:t>
+            </a:r>
+            <a:r>
+              <a:rPr lang="ko-KR" altLang="ko-KR" sz="1200" b="0" i="0" kern="1200" dirty="0">
+                <a:solidFill>
+                  <a:schemeClr val="tx1"/>
+                </a:solidFill>
+                <a:effectLst/>
+                <a:latin typeface="+mn-lt"/>
+                <a:ea typeface="+mn-ea"/>
+                <a:cs typeface="+mn-cs"/>
+              </a:rPr>
+              <a:t>?−0.335, </a:t>
+            </a:r>
+            <a:r>
+              <a:rPr lang="ko-KR" altLang="ko-KR" sz="1200" b="0" i="0" kern="1200" dirty="0" err="1">
+                <a:solidFill>
+                  <a:schemeClr val="tx1"/>
+                </a:solidFill>
+                <a:effectLst/>
+                <a:latin typeface="+mn-lt"/>
+                <a:ea typeface="+mn-ea"/>
+                <a:cs typeface="+mn-cs"/>
+              </a:rPr>
+              <a:t>insig</a:t>
+            </a:r>
+            <a:r>
+              <a:rPr lang="ko-KR" altLang="ko-KR" sz="1200" b="0" i="0" kern="1200" dirty="0">
+                <a:solidFill>
+                  <a:schemeClr val="tx1"/>
+                </a:solidFill>
+                <a:effectLst/>
+                <a:latin typeface="+mn-lt"/>
+                <a:ea typeface="+mn-ea"/>
+                <a:cs typeface="+mn-cs"/>
+              </a:rPr>
+              <a:t>.</a:t>
+            </a:r>
+          </a:p>
+          <a:p>
+            <a:r>
+              <a:rPr lang="ko-KR" altLang="ko-KR" sz="1200" b="1" i="0" kern="1200" dirty="0">
+                <a:solidFill>
+                  <a:schemeClr val="tx1"/>
+                </a:solidFill>
+                <a:effectLst/>
+                <a:latin typeface="+mn-lt"/>
+                <a:ea typeface="+mn-ea"/>
+                <a:cs typeface="+mn-cs"/>
+              </a:rPr>
+              <a:t>β₅</a:t>
+            </a:r>
+            <a:r>
+              <a:rPr lang="ko-KR" altLang="ko-KR" sz="1200" b="0" i="0" kern="1200" dirty="0" err="1">
+                <a:solidFill>
+                  <a:schemeClr val="tx1"/>
+                </a:solidFill>
+                <a:effectLst/>
+                <a:latin typeface="+mn-lt"/>
+                <a:ea typeface="+mn-ea"/>
+                <a:cs typeface="+mn-cs"/>
+              </a:rPr>
+              <a:t>Low</a:t>
+            </a:r>
+            <a:r>
+              <a:rPr lang="ko-KR" altLang="ko-KR" sz="1200" b="0" i="0" kern="1200" dirty="0">
+                <a:solidFill>
+                  <a:schemeClr val="tx1"/>
+                </a:solidFill>
+                <a:effectLst/>
+                <a:latin typeface="+mn-lt"/>
+                <a:ea typeface="+mn-ea"/>
+                <a:cs typeface="+mn-cs"/>
+              </a:rPr>
+              <a:t> × </a:t>
+            </a:r>
+            <a:r>
+              <a:rPr lang="ko-KR" altLang="ko-KR" sz="1200" b="0" i="0" kern="1200" dirty="0" err="1">
+                <a:solidFill>
+                  <a:schemeClr val="tx1"/>
+                </a:solidFill>
+                <a:effectLst/>
+                <a:latin typeface="+mn-lt"/>
+                <a:ea typeface="+mn-ea"/>
+                <a:cs typeface="+mn-cs"/>
+              </a:rPr>
+              <a:t>OutflowDoes</a:t>
+            </a:r>
+            <a:r>
+              <a:rPr lang="ko-KR" altLang="ko-KR" sz="1200" b="0" i="0" kern="1200" dirty="0">
+                <a:solidFill>
+                  <a:schemeClr val="tx1"/>
+                </a:solidFill>
+                <a:effectLst/>
+                <a:latin typeface="+mn-lt"/>
+                <a:ea typeface="+mn-ea"/>
+                <a:cs typeface="+mn-cs"/>
+              </a:rPr>
+              <a:t> </a:t>
+            </a:r>
+            <a:r>
+              <a:rPr lang="ko-KR" altLang="ko-KR" sz="1200" b="0" i="0" kern="1200" dirty="0" err="1">
+                <a:solidFill>
+                  <a:schemeClr val="tx1"/>
+                </a:solidFill>
+                <a:effectLst/>
+                <a:latin typeface="+mn-lt"/>
+                <a:ea typeface="+mn-ea"/>
+                <a:cs typeface="+mn-cs"/>
+              </a:rPr>
+              <a:t>low</a:t>
+            </a:r>
+            <a:r>
+              <a:rPr lang="ko-KR" altLang="ko-KR" sz="1200" b="0" i="0" kern="1200" dirty="0">
+                <a:solidFill>
+                  <a:schemeClr val="tx1"/>
+                </a:solidFill>
+                <a:effectLst/>
+                <a:latin typeface="+mn-lt"/>
+                <a:ea typeface="+mn-ea"/>
+                <a:cs typeface="+mn-cs"/>
+              </a:rPr>
+              <a:t> </a:t>
+            </a:r>
+            <a:r>
+              <a:rPr lang="ko-KR" altLang="ko-KR" sz="1200" b="0" i="0" kern="1200" dirty="0" err="1">
+                <a:solidFill>
+                  <a:schemeClr val="tx1"/>
+                </a:solidFill>
+                <a:effectLst/>
+                <a:latin typeface="+mn-lt"/>
+                <a:ea typeface="+mn-ea"/>
+                <a:cs typeface="+mn-cs"/>
+              </a:rPr>
+              <a:t>buffer</a:t>
+            </a:r>
+            <a:r>
+              <a:rPr lang="ko-KR" altLang="ko-KR" sz="1200" b="0" i="0" kern="1200" dirty="0">
+                <a:solidFill>
+                  <a:schemeClr val="tx1"/>
+                </a:solidFill>
+                <a:effectLst/>
+                <a:latin typeface="+mn-lt"/>
+                <a:ea typeface="+mn-ea"/>
+                <a:cs typeface="+mn-cs"/>
+              </a:rPr>
+              <a:t> </a:t>
+            </a:r>
+            <a:r>
+              <a:rPr lang="ko-KR" altLang="ko-KR" sz="1200" b="0" i="1" kern="1200" dirty="0" err="1">
+                <a:solidFill>
+                  <a:schemeClr val="tx1"/>
+                </a:solidFill>
+                <a:effectLst/>
+                <a:latin typeface="+mn-lt"/>
+                <a:ea typeface="+mn-ea"/>
+                <a:cs typeface="+mn-cs"/>
+              </a:rPr>
+              <a:t>change</a:t>
+            </a:r>
+            <a:r>
+              <a:rPr lang="ko-KR" altLang="ko-KR" sz="1200" b="0" i="0" kern="1200" dirty="0">
+                <a:solidFill>
+                  <a:schemeClr val="tx1"/>
+                </a:solidFill>
+                <a:effectLst/>
+                <a:latin typeface="+mn-lt"/>
+                <a:ea typeface="+mn-ea"/>
+                <a:cs typeface="+mn-cs"/>
+              </a:rPr>
+              <a:t> </a:t>
+            </a:r>
+            <a:r>
+              <a:rPr lang="ko-KR" altLang="ko-KR" sz="1200" b="0" i="0" kern="1200" dirty="0" err="1">
+                <a:solidFill>
+                  <a:schemeClr val="tx1"/>
+                </a:solidFill>
+                <a:effectLst/>
+                <a:latin typeface="+mn-lt"/>
+                <a:ea typeface="+mn-ea"/>
+                <a:cs typeface="+mn-cs"/>
+              </a:rPr>
+              <a:t>how</a:t>
+            </a:r>
+            <a:r>
+              <a:rPr lang="ko-KR" altLang="ko-KR" sz="1200" b="0" i="0" kern="1200" dirty="0">
+                <a:solidFill>
+                  <a:schemeClr val="tx1"/>
+                </a:solidFill>
+                <a:effectLst/>
+                <a:latin typeface="+mn-lt"/>
+                <a:ea typeface="+mn-ea"/>
+                <a:cs typeface="+mn-cs"/>
+              </a:rPr>
+              <a:t> </a:t>
+            </a:r>
+            <a:r>
+              <a:rPr lang="ko-KR" altLang="ko-KR" sz="1200" b="0" i="0" kern="1200" dirty="0" err="1">
+                <a:solidFill>
+                  <a:schemeClr val="tx1"/>
+                </a:solidFill>
+                <a:effectLst/>
+                <a:latin typeface="+mn-lt"/>
+                <a:ea typeface="+mn-ea"/>
+                <a:cs typeface="+mn-cs"/>
+              </a:rPr>
+              <a:t>outflows</a:t>
+            </a:r>
+            <a:r>
+              <a:rPr lang="ko-KR" altLang="ko-KR" sz="1200" b="0" i="0" kern="1200" dirty="0">
+                <a:solidFill>
+                  <a:schemeClr val="tx1"/>
+                </a:solidFill>
+                <a:effectLst/>
+                <a:latin typeface="+mn-lt"/>
+                <a:ea typeface="+mn-ea"/>
+                <a:cs typeface="+mn-cs"/>
+              </a:rPr>
+              <a:t> </a:t>
+            </a:r>
+            <a:r>
+              <a:rPr lang="ko-KR" altLang="ko-KR" sz="1200" b="0" i="0" kern="1200" dirty="0" err="1">
+                <a:solidFill>
+                  <a:schemeClr val="tx1"/>
+                </a:solidFill>
+                <a:effectLst/>
+                <a:latin typeface="+mn-lt"/>
+                <a:ea typeface="+mn-ea"/>
+                <a:cs typeface="+mn-cs"/>
+              </a:rPr>
+              <a:t>affect</a:t>
+            </a:r>
+            <a:r>
+              <a:rPr lang="ko-KR" altLang="ko-KR" sz="1200" b="0" i="0" kern="1200" dirty="0">
+                <a:solidFill>
+                  <a:schemeClr val="tx1"/>
+                </a:solidFill>
+                <a:effectLst/>
+                <a:latin typeface="+mn-lt"/>
+                <a:ea typeface="+mn-ea"/>
+                <a:cs typeface="+mn-cs"/>
+              </a:rPr>
+              <a:t> </a:t>
+            </a:r>
+            <a:r>
+              <a:rPr lang="ko-KR" altLang="ko-KR" sz="1200" b="0" i="0" kern="1200" dirty="0" err="1">
+                <a:solidFill>
+                  <a:schemeClr val="tx1"/>
+                </a:solidFill>
+                <a:effectLst/>
+                <a:latin typeface="+mn-lt"/>
+                <a:ea typeface="+mn-ea"/>
+                <a:cs typeface="+mn-cs"/>
+              </a:rPr>
+              <a:t>spread</a:t>
+            </a:r>
+            <a:r>
+              <a:rPr lang="ko-KR" altLang="ko-KR" sz="1200" b="0" i="0" kern="1200" dirty="0">
+                <a:solidFill>
+                  <a:schemeClr val="tx1"/>
+                </a:solidFill>
+                <a:effectLst/>
+                <a:latin typeface="+mn-lt"/>
+                <a:ea typeface="+mn-ea"/>
+                <a:cs typeface="+mn-cs"/>
+              </a:rPr>
+              <a:t>?</a:t>
+            </a:r>
+            <a:r>
+              <a:rPr lang="ko-KR" altLang="ko-KR" sz="1200" b="1" i="0" kern="1200" dirty="0">
+                <a:solidFill>
+                  <a:schemeClr val="tx1"/>
+                </a:solidFill>
+                <a:effectLst/>
+                <a:latin typeface="+mn-lt"/>
+                <a:ea typeface="+mn-ea"/>
+                <a:cs typeface="+mn-cs"/>
+              </a:rPr>
+              <a:t>+7.552, </a:t>
+            </a:r>
+            <a:r>
+              <a:rPr lang="ko-KR" altLang="ko-KR" sz="1200" b="1" i="0" kern="1200" dirty="0" err="1">
+                <a:solidFill>
+                  <a:schemeClr val="tx1"/>
+                </a:solidFill>
+                <a:effectLst/>
+                <a:latin typeface="+mn-lt"/>
+                <a:ea typeface="+mn-ea"/>
+                <a:cs typeface="+mn-cs"/>
+              </a:rPr>
+              <a:t>p</a:t>
+            </a:r>
+            <a:r>
+              <a:rPr lang="ko-KR" altLang="ko-KR" sz="1200" b="1" i="0" kern="1200" dirty="0">
+                <a:solidFill>
+                  <a:schemeClr val="tx1"/>
+                </a:solidFill>
+                <a:effectLst/>
+                <a:latin typeface="+mn-lt"/>
+                <a:ea typeface="+mn-ea"/>
+                <a:cs typeface="+mn-cs"/>
+              </a:rPr>
+              <a:t> = 0.065 ★</a:t>
+            </a:r>
+            <a:endParaRPr lang="en-US" altLang="ko-KR" sz="1200" b="1" i="0" kern="1200" dirty="0">
+              <a:solidFill>
+                <a:schemeClr val="tx1"/>
+              </a:solidFill>
+              <a:effectLst/>
+              <a:latin typeface="+mn-lt"/>
+              <a:ea typeface="+mn-ea"/>
+              <a:cs typeface="+mn-cs"/>
+            </a:endParaRPr>
+          </a:p>
+          <a:p>
+            <a:r>
+              <a:rPr lang="ko-KR" altLang="ko-KR" sz="1200" kern="1200" dirty="0">
+                <a:solidFill>
+                  <a:schemeClr val="tx1"/>
+                </a:solidFill>
+                <a:effectLst/>
+                <a:latin typeface="+mn-lt"/>
+                <a:ea typeface="+mn-ea"/>
+                <a:cs typeface="+mn-cs"/>
+              </a:rPr>
+              <a:t>The </a:t>
+            </a:r>
+            <a:r>
+              <a:rPr lang="ko-KR" altLang="ko-KR" sz="1200" kern="1200" dirty="0" err="1">
+                <a:solidFill>
+                  <a:schemeClr val="tx1"/>
+                </a:solidFill>
+                <a:effectLst/>
+                <a:latin typeface="+mn-lt"/>
+                <a:ea typeface="+mn-ea"/>
+                <a:cs typeface="+mn-cs"/>
+              </a:rPr>
+              <a:t>theory</a:t>
+            </a:r>
+            <a:r>
+              <a:rPr lang="ko-KR" altLang="ko-KR" sz="1200" kern="1200" dirty="0">
+                <a:solidFill>
+                  <a:schemeClr val="tx1"/>
+                </a:solidFill>
+                <a:effectLst/>
+                <a:latin typeface="+mn-lt"/>
+                <a:ea typeface="+mn-ea"/>
+                <a:cs typeface="+mn-cs"/>
+              </a:rPr>
+              <a:t> </a:t>
+            </a:r>
+            <a:r>
+              <a:rPr lang="ko-KR" altLang="ko-KR" sz="1200" kern="1200" dirty="0" err="1">
+                <a:solidFill>
+                  <a:schemeClr val="tx1"/>
+                </a:solidFill>
+                <a:effectLst/>
+                <a:latin typeface="+mn-lt"/>
+                <a:ea typeface="+mn-ea"/>
+                <a:cs typeface="+mn-cs"/>
+              </a:rPr>
+              <a:t>predicts</a:t>
+            </a:r>
+            <a:r>
+              <a:rPr lang="ko-KR" altLang="ko-KR" sz="1200" kern="1200" dirty="0">
+                <a:solidFill>
+                  <a:schemeClr val="tx1"/>
+                </a:solidFill>
+                <a:effectLst/>
+                <a:latin typeface="+mn-lt"/>
+                <a:ea typeface="+mn-ea"/>
+                <a:cs typeface="+mn-cs"/>
+              </a:rPr>
+              <a:t> β₁–β₄ </a:t>
+            </a:r>
+            <a:r>
+              <a:rPr lang="ko-KR" altLang="ko-KR" sz="1200" kern="1200" dirty="0" err="1">
+                <a:solidFill>
+                  <a:schemeClr val="tx1"/>
+                </a:solidFill>
+                <a:effectLst/>
+                <a:latin typeface="+mn-lt"/>
+                <a:ea typeface="+mn-ea"/>
+                <a:cs typeface="+mn-cs"/>
+              </a:rPr>
+              <a:t>are</a:t>
+            </a:r>
+            <a:r>
+              <a:rPr lang="ko-KR" altLang="ko-KR" sz="1200" kern="1200" dirty="0">
+                <a:solidFill>
+                  <a:schemeClr val="tx1"/>
+                </a:solidFill>
+                <a:effectLst/>
+                <a:latin typeface="+mn-lt"/>
+                <a:ea typeface="+mn-ea"/>
+                <a:cs typeface="+mn-cs"/>
+              </a:rPr>
+              <a:t> </a:t>
+            </a:r>
+            <a:r>
+              <a:rPr lang="ko-KR" altLang="ko-KR" sz="1200" kern="1200" dirty="0" err="1">
+                <a:solidFill>
+                  <a:schemeClr val="tx1"/>
+                </a:solidFill>
+                <a:effectLst/>
+                <a:latin typeface="+mn-lt"/>
+                <a:ea typeface="+mn-ea"/>
+                <a:cs typeface="+mn-cs"/>
+              </a:rPr>
+              <a:t>all</a:t>
+            </a:r>
+            <a:r>
+              <a:rPr lang="ko-KR" altLang="ko-KR" sz="1200" kern="1200" dirty="0">
+                <a:solidFill>
+                  <a:schemeClr val="tx1"/>
+                </a:solidFill>
+                <a:effectLst/>
+                <a:latin typeface="+mn-lt"/>
+                <a:ea typeface="+mn-ea"/>
+                <a:cs typeface="+mn-cs"/>
+              </a:rPr>
+              <a:t> </a:t>
+            </a:r>
+            <a:r>
+              <a:rPr lang="ko-KR" altLang="ko-KR" sz="1200" kern="1200" dirty="0" err="1">
+                <a:solidFill>
+                  <a:schemeClr val="tx1"/>
+                </a:solidFill>
+                <a:effectLst/>
+                <a:latin typeface="+mn-lt"/>
+                <a:ea typeface="+mn-ea"/>
+                <a:cs typeface="+mn-cs"/>
+              </a:rPr>
+              <a:t>insignificant</a:t>
+            </a:r>
+            <a:r>
+              <a:rPr lang="ko-KR" altLang="ko-KR" sz="1200" kern="1200" dirty="0">
+                <a:solidFill>
+                  <a:schemeClr val="tx1"/>
+                </a:solidFill>
+                <a:effectLst/>
+                <a:latin typeface="+mn-lt"/>
+                <a:ea typeface="+mn-ea"/>
+                <a:cs typeface="+mn-cs"/>
+              </a:rPr>
+              <a:t> and </a:t>
+            </a:r>
+            <a:r>
+              <a:rPr lang="ko-KR" altLang="ko-KR" sz="1200" kern="1200" dirty="0" err="1">
+                <a:solidFill>
+                  <a:schemeClr val="tx1"/>
+                </a:solidFill>
+                <a:effectLst/>
+                <a:latin typeface="+mn-lt"/>
+                <a:ea typeface="+mn-ea"/>
+                <a:cs typeface="+mn-cs"/>
+              </a:rPr>
+              <a:t>only</a:t>
+            </a:r>
+            <a:r>
+              <a:rPr lang="ko-KR" altLang="ko-KR" sz="1200" kern="1200" dirty="0">
+                <a:solidFill>
+                  <a:schemeClr val="tx1"/>
+                </a:solidFill>
+                <a:effectLst/>
+                <a:latin typeface="+mn-lt"/>
+                <a:ea typeface="+mn-ea"/>
+                <a:cs typeface="+mn-cs"/>
+              </a:rPr>
+              <a:t> </a:t>
+            </a:r>
+            <a:r>
+              <a:rPr lang="ko-KR" altLang="ko-KR" sz="1200" b="1" kern="1200" dirty="0">
+                <a:solidFill>
+                  <a:schemeClr val="tx1"/>
+                </a:solidFill>
+                <a:effectLst/>
+                <a:latin typeface="+mn-lt"/>
+                <a:ea typeface="+mn-ea"/>
+                <a:cs typeface="+mn-cs"/>
+              </a:rPr>
+              <a:t>β₅ &gt; 0</a:t>
+            </a:r>
+            <a:r>
+              <a:rPr lang="ko-KR" altLang="ko-KR" sz="1200" kern="1200" dirty="0">
+                <a:solidFill>
+                  <a:schemeClr val="tx1"/>
+                </a:solidFill>
+                <a:effectLst/>
+                <a:latin typeface="+mn-lt"/>
+                <a:ea typeface="+mn-ea"/>
+                <a:cs typeface="+mn-cs"/>
+              </a:rPr>
+              <a:t> — </a:t>
+            </a:r>
+            <a:r>
+              <a:rPr lang="ko-KR" altLang="ko-KR" sz="1200" kern="1200" dirty="0" err="1">
+                <a:solidFill>
+                  <a:schemeClr val="tx1"/>
+                </a:solidFill>
+                <a:effectLst/>
+                <a:latin typeface="+mn-lt"/>
+                <a:ea typeface="+mn-ea"/>
+                <a:cs typeface="+mn-cs"/>
+              </a:rPr>
+              <a:t>because</a:t>
+            </a:r>
+            <a:r>
+              <a:rPr lang="ko-KR" altLang="ko-KR" sz="1200" kern="1200" dirty="0">
+                <a:solidFill>
+                  <a:schemeClr val="tx1"/>
+                </a:solidFill>
+                <a:effectLst/>
+                <a:latin typeface="+mn-lt"/>
+                <a:ea typeface="+mn-ea"/>
+                <a:cs typeface="+mn-cs"/>
+              </a:rPr>
+              <a:t> </a:t>
+            </a:r>
+            <a:r>
+              <a:rPr lang="ko-KR" altLang="ko-KR" sz="1200" kern="1200" dirty="0" err="1">
+                <a:solidFill>
+                  <a:schemeClr val="tx1"/>
+                </a:solidFill>
+                <a:effectLst/>
+                <a:latin typeface="+mn-lt"/>
+                <a:ea typeface="+mn-ea"/>
+                <a:cs typeface="+mn-cs"/>
+              </a:rPr>
+              <a:t>the</a:t>
+            </a:r>
+            <a:r>
+              <a:rPr lang="ko-KR" altLang="ko-KR" sz="1200" kern="1200" dirty="0">
+                <a:solidFill>
+                  <a:schemeClr val="tx1"/>
+                </a:solidFill>
+                <a:effectLst/>
+                <a:latin typeface="+mn-lt"/>
+                <a:ea typeface="+mn-ea"/>
+                <a:cs typeface="+mn-cs"/>
+              </a:rPr>
+              <a:t> </a:t>
+            </a:r>
+            <a:r>
+              <a:rPr lang="ko-KR" altLang="ko-KR" sz="1200" kern="1200" dirty="0" err="1">
+                <a:solidFill>
+                  <a:schemeClr val="tx1"/>
+                </a:solidFill>
+                <a:effectLst/>
+                <a:latin typeface="+mn-lt"/>
+                <a:ea typeface="+mn-ea"/>
+                <a:cs typeface="+mn-cs"/>
+              </a:rPr>
+              <a:t>forced-sale</a:t>
+            </a:r>
+            <a:r>
+              <a:rPr lang="ko-KR" altLang="ko-KR" sz="1200" kern="1200" dirty="0">
+                <a:solidFill>
+                  <a:schemeClr val="tx1"/>
+                </a:solidFill>
+                <a:effectLst/>
+                <a:latin typeface="+mn-lt"/>
+                <a:ea typeface="+mn-ea"/>
+                <a:cs typeface="+mn-cs"/>
+              </a:rPr>
+              <a:t> </a:t>
+            </a:r>
+            <a:r>
+              <a:rPr lang="ko-KR" altLang="ko-KR" sz="1200" kern="1200" dirty="0" err="1">
+                <a:solidFill>
+                  <a:schemeClr val="tx1"/>
+                </a:solidFill>
+                <a:effectLst/>
+                <a:latin typeface="+mn-lt"/>
+                <a:ea typeface="+mn-ea"/>
+                <a:cs typeface="+mn-cs"/>
+              </a:rPr>
+              <a:t>channel</a:t>
+            </a:r>
+            <a:r>
+              <a:rPr lang="ko-KR" altLang="ko-KR" sz="1200" kern="1200" dirty="0">
+                <a:solidFill>
+                  <a:schemeClr val="tx1"/>
+                </a:solidFill>
+                <a:effectLst/>
+                <a:latin typeface="+mn-lt"/>
+                <a:ea typeface="+mn-ea"/>
+                <a:cs typeface="+mn-cs"/>
+              </a:rPr>
+              <a:t> </a:t>
+            </a:r>
+            <a:r>
+              <a:rPr lang="ko-KR" altLang="ko-KR" sz="1200" kern="1200" dirty="0" err="1">
+                <a:solidFill>
+                  <a:schemeClr val="tx1"/>
+                </a:solidFill>
+                <a:effectLst/>
+                <a:latin typeface="+mn-lt"/>
+                <a:ea typeface="+mn-ea"/>
+                <a:cs typeface="+mn-cs"/>
+              </a:rPr>
+              <a:t>only</a:t>
+            </a:r>
+            <a:r>
+              <a:rPr lang="ko-KR" altLang="ko-KR" sz="1200" kern="1200" dirty="0">
+                <a:solidFill>
+                  <a:schemeClr val="tx1"/>
+                </a:solidFill>
+                <a:effectLst/>
+                <a:latin typeface="+mn-lt"/>
+                <a:ea typeface="+mn-ea"/>
+                <a:cs typeface="+mn-cs"/>
+              </a:rPr>
+              <a:t> </a:t>
+            </a:r>
+            <a:r>
+              <a:rPr lang="ko-KR" altLang="ko-KR" sz="1200" kern="1200" dirty="0" err="1">
+                <a:solidFill>
+                  <a:schemeClr val="tx1"/>
+                </a:solidFill>
+                <a:effectLst/>
+                <a:latin typeface="+mn-lt"/>
+                <a:ea typeface="+mn-ea"/>
+                <a:cs typeface="+mn-cs"/>
+              </a:rPr>
+              <a:t>activates</a:t>
+            </a:r>
+            <a:r>
+              <a:rPr lang="ko-KR" altLang="ko-KR" sz="1200" kern="1200" dirty="0">
+                <a:solidFill>
+                  <a:schemeClr val="tx1"/>
+                </a:solidFill>
+                <a:effectLst/>
+                <a:latin typeface="+mn-lt"/>
+                <a:ea typeface="+mn-ea"/>
+                <a:cs typeface="+mn-cs"/>
+              </a:rPr>
+              <a:t> </a:t>
+            </a:r>
+            <a:r>
+              <a:rPr lang="ko-KR" altLang="ko-KR" sz="1200" kern="1200" dirty="0" err="1">
+                <a:solidFill>
+                  <a:schemeClr val="tx1"/>
+                </a:solidFill>
+                <a:effectLst/>
+                <a:latin typeface="+mn-lt"/>
+                <a:ea typeface="+mn-ea"/>
+                <a:cs typeface="+mn-cs"/>
+              </a:rPr>
+              <a:t>when</a:t>
+            </a:r>
+            <a:r>
+              <a:rPr lang="ko-KR" altLang="ko-KR" sz="1200" kern="1200" dirty="0">
+                <a:solidFill>
+                  <a:schemeClr val="tx1"/>
+                </a:solidFill>
+                <a:effectLst/>
+                <a:latin typeface="+mn-lt"/>
+                <a:ea typeface="+mn-ea"/>
+                <a:cs typeface="+mn-cs"/>
+              </a:rPr>
+              <a:t> </a:t>
+            </a:r>
+            <a:r>
+              <a:rPr lang="ko-KR" altLang="ko-KR" sz="1200" kern="1200" dirty="0" err="1">
+                <a:solidFill>
+                  <a:schemeClr val="tx1"/>
+                </a:solidFill>
+                <a:effectLst/>
+                <a:latin typeface="+mn-lt"/>
+                <a:ea typeface="+mn-ea"/>
+                <a:cs typeface="+mn-cs"/>
+              </a:rPr>
+              <a:t>there</a:t>
+            </a:r>
+            <a:r>
+              <a:rPr lang="ko-KR" altLang="ko-KR" sz="1200" kern="1200" dirty="0">
+                <a:solidFill>
+                  <a:schemeClr val="tx1"/>
+                </a:solidFill>
+                <a:effectLst/>
+                <a:latin typeface="+mn-lt"/>
+                <a:ea typeface="+mn-ea"/>
+                <a:cs typeface="+mn-cs"/>
+              </a:rPr>
+              <a:t> </a:t>
+            </a:r>
+            <a:r>
+              <a:rPr lang="ko-KR" altLang="ko-KR" sz="1200" kern="1200" dirty="0" err="1">
+                <a:solidFill>
+                  <a:schemeClr val="tx1"/>
+                </a:solidFill>
+                <a:effectLst/>
+                <a:latin typeface="+mn-lt"/>
+                <a:ea typeface="+mn-ea"/>
+                <a:cs typeface="+mn-cs"/>
+              </a:rPr>
+              <a:t>is</a:t>
+            </a:r>
+            <a:r>
+              <a:rPr lang="ko-KR" altLang="ko-KR" sz="1200" kern="1200" dirty="0">
+                <a:solidFill>
+                  <a:schemeClr val="tx1"/>
+                </a:solidFill>
+                <a:effectLst/>
+                <a:latin typeface="+mn-lt"/>
+                <a:ea typeface="+mn-ea"/>
+                <a:cs typeface="+mn-cs"/>
+              </a:rPr>
+              <a:t> </a:t>
+            </a:r>
+            <a:r>
+              <a:rPr lang="ko-KR" altLang="ko-KR" sz="1200" i="1" kern="1200" dirty="0" err="1">
+                <a:solidFill>
+                  <a:schemeClr val="tx1"/>
+                </a:solidFill>
+                <a:effectLst/>
+                <a:latin typeface="+mn-lt"/>
+                <a:ea typeface="+mn-ea"/>
+                <a:cs typeface="+mn-cs"/>
+              </a:rPr>
+              <a:t>both</a:t>
+            </a:r>
+            <a:r>
+              <a:rPr lang="ko-KR" altLang="ko-KR" sz="1200" kern="1200" dirty="0">
+                <a:solidFill>
+                  <a:schemeClr val="tx1"/>
+                </a:solidFill>
+                <a:effectLst/>
+                <a:latin typeface="+mn-lt"/>
+                <a:ea typeface="+mn-ea"/>
+                <a:cs typeface="+mn-cs"/>
+              </a:rPr>
+              <a:t> </a:t>
+            </a:r>
+            <a:r>
+              <a:rPr lang="ko-KR" altLang="ko-KR" sz="1200" kern="1200" dirty="0" err="1">
+                <a:solidFill>
+                  <a:schemeClr val="tx1"/>
+                </a:solidFill>
+                <a:effectLst/>
+                <a:latin typeface="+mn-lt"/>
+                <a:ea typeface="+mn-ea"/>
+                <a:cs typeface="+mn-cs"/>
+              </a:rPr>
+              <a:t>a</a:t>
+            </a:r>
+            <a:r>
+              <a:rPr lang="ko-KR" altLang="ko-KR" sz="1200" kern="1200" dirty="0">
+                <a:solidFill>
+                  <a:schemeClr val="tx1"/>
+                </a:solidFill>
+                <a:effectLst/>
+                <a:latin typeface="+mn-lt"/>
+                <a:ea typeface="+mn-ea"/>
+                <a:cs typeface="+mn-cs"/>
+              </a:rPr>
+              <a:t> </a:t>
+            </a:r>
+            <a:r>
+              <a:rPr lang="ko-KR" altLang="ko-KR" sz="1200" kern="1200" dirty="0" err="1">
+                <a:solidFill>
+                  <a:schemeClr val="tx1"/>
+                </a:solidFill>
+                <a:effectLst/>
+                <a:latin typeface="+mn-lt"/>
+                <a:ea typeface="+mn-ea"/>
+                <a:cs typeface="+mn-cs"/>
+              </a:rPr>
+              <a:t>supply</a:t>
+            </a:r>
+            <a:r>
+              <a:rPr lang="ko-KR" altLang="ko-KR" sz="1200" kern="1200" dirty="0">
+                <a:solidFill>
+                  <a:schemeClr val="tx1"/>
+                </a:solidFill>
+                <a:effectLst/>
+                <a:latin typeface="+mn-lt"/>
+                <a:ea typeface="+mn-ea"/>
+                <a:cs typeface="+mn-cs"/>
+              </a:rPr>
+              <a:t> </a:t>
+            </a:r>
+            <a:r>
+              <a:rPr lang="ko-KR" altLang="ko-KR" sz="1200" kern="1200" dirty="0" err="1">
+                <a:solidFill>
+                  <a:schemeClr val="tx1"/>
+                </a:solidFill>
+                <a:effectLst/>
+                <a:latin typeface="+mn-lt"/>
+                <a:ea typeface="+mn-ea"/>
+                <a:cs typeface="+mn-cs"/>
+              </a:rPr>
+              <a:t>contraction</a:t>
+            </a:r>
+            <a:r>
+              <a:rPr lang="ko-KR" altLang="ko-KR" sz="1200" kern="1200" dirty="0">
+                <a:solidFill>
+                  <a:schemeClr val="tx1"/>
+                </a:solidFill>
+                <a:effectLst/>
+                <a:latin typeface="+mn-lt"/>
+                <a:ea typeface="+mn-ea"/>
+                <a:cs typeface="+mn-cs"/>
+              </a:rPr>
+              <a:t> </a:t>
+            </a:r>
+            <a:r>
+              <a:rPr lang="ko-KR" altLang="ko-KR" sz="1200" i="1" kern="1200" dirty="0">
+                <a:solidFill>
+                  <a:schemeClr val="tx1"/>
+                </a:solidFill>
+                <a:effectLst/>
+                <a:latin typeface="+mn-lt"/>
+                <a:ea typeface="+mn-ea"/>
+                <a:cs typeface="+mn-cs"/>
+              </a:rPr>
+              <a:t>and</a:t>
+            </a:r>
+            <a:r>
+              <a:rPr lang="ko-KR" altLang="ko-KR" sz="1200" kern="1200" dirty="0">
+                <a:solidFill>
+                  <a:schemeClr val="tx1"/>
+                </a:solidFill>
+                <a:effectLst/>
+                <a:latin typeface="+mn-lt"/>
+                <a:ea typeface="+mn-ea"/>
+                <a:cs typeface="+mn-cs"/>
+              </a:rPr>
+              <a:t> </a:t>
+            </a:r>
+            <a:r>
+              <a:rPr lang="ko-KR" altLang="ko-KR" sz="1200" kern="1200" dirty="0" err="1">
+                <a:solidFill>
+                  <a:schemeClr val="tx1"/>
+                </a:solidFill>
+                <a:effectLst/>
+                <a:latin typeface="+mn-lt"/>
+                <a:ea typeface="+mn-ea"/>
+                <a:cs typeface="+mn-cs"/>
+              </a:rPr>
+              <a:t>a</a:t>
+            </a:r>
+            <a:r>
+              <a:rPr lang="ko-KR" altLang="ko-KR" sz="1200" kern="1200" dirty="0">
+                <a:solidFill>
+                  <a:schemeClr val="tx1"/>
+                </a:solidFill>
+                <a:effectLst/>
+                <a:latin typeface="+mn-lt"/>
+                <a:ea typeface="+mn-ea"/>
+                <a:cs typeface="+mn-cs"/>
+              </a:rPr>
+              <a:t> </a:t>
+            </a:r>
+            <a:r>
+              <a:rPr lang="ko-KR" altLang="ko-KR" sz="1200" kern="1200" dirty="0" err="1">
+                <a:solidFill>
+                  <a:schemeClr val="tx1"/>
+                </a:solidFill>
+                <a:effectLst/>
+                <a:latin typeface="+mn-lt"/>
+                <a:ea typeface="+mn-ea"/>
+                <a:cs typeface="+mn-cs"/>
+              </a:rPr>
+              <a:t>depleted</a:t>
+            </a:r>
+            <a:r>
+              <a:rPr lang="ko-KR" altLang="ko-KR" sz="1200" kern="1200" dirty="0">
+                <a:solidFill>
+                  <a:schemeClr val="tx1"/>
+                </a:solidFill>
+                <a:effectLst/>
+                <a:latin typeface="+mn-lt"/>
+                <a:ea typeface="+mn-ea"/>
+                <a:cs typeface="+mn-cs"/>
+              </a:rPr>
+              <a:t> </a:t>
+            </a:r>
+            <a:r>
+              <a:rPr lang="ko-KR" altLang="ko-KR" sz="1200" kern="1200" dirty="0" err="1">
+                <a:solidFill>
+                  <a:schemeClr val="tx1"/>
+                </a:solidFill>
+                <a:effectLst/>
+                <a:latin typeface="+mn-lt"/>
+                <a:ea typeface="+mn-ea"/>
+                <a:cs typeface="+mn-cs"/>
+              </a:rPr>
+              <a:t>buffer</a:t>
+            </a:r>
+            <a:r>
+              <a:rPr lang="ko-KR" altLang="ko-KR" sz="1200" kern="1200" dirty="0">
+                <a:solidFill>
+                  <a:schemeClr val="tx1"/>
+                </a:solidFill>
+                <a:effectLst/>
+                <a:latin typeface="+mn-lt"/>
+                <a:ea typeface="+mn-ea"/>
+                <a:cs typeface="+mn-cs"/>
+              </a:rPr>
+              <a:t>. </a:t>
+            </a:r>
+            <a:r>
+              <a:rPr lang="ko-KR" altLang="ko-KR" sz="1200" kern="1200" dirty="0" err="1">
+                <a:solidFill>
+                  <a:schemeClr val="tx1"/>
+                </a:solidFill>
+                <a:effectLst/>
+                <a:latin typeface="+mn-lt"/>
+                <a:ea typeface="+mn-ea"/>
+                <a:cs typeface="+mn-cs"/>
+              </a:rPr>
+              <a:t>That</a:t>
+            </a:r>
+            <a:r>
+              <a:rPr lang="ko-KR" altLang="ko-KR" sz="1200" kern="1200" dirty="0">
+                <a:solidFill>
+                  <a:schemeClr val="tx1"/>
+                </a:solidFill>
+                <a:effectLst/>
+                <a:latin typeface="+mn-lt"/>
+                <a:ea typeface="+mn-ea"/>
+                <a:cs typeface="+mn-cs"/>
+              </a:rPr>
+              <a:t> </a:t>
+            </a:r>
+            <a:r>
+              <a:rPr lang="ko-KR" altLang="ko-KR" sz="1200" kern="1200" dirty="0" err="1">
+                <a:solidFill>
+                  <a:schemeClr val="tx1"/>
+                </a:solidFill>
+                <a:effectLst/>
+                <a:latin typeface="+mn-lt"/>
+                <a:ea typeface="+mn-ea"/>
+                <a:cs typeface="+mn-cs"/>
+              </a:rPr>
+              <a:t>is</a:t>
+            </a:r>
+            <a:r>
+              <a:rPr lang="ko-KR" altLang="ko-KR" sz="1200" kern="1200" dirty="0">
+                <a:solidFill>
+                  <a:schemeClr val="tx1"/>
+                </a:solidFill>
+                <a:effectLst/>
+                <a:latin typeface="+mn-lt"/>
+                <a:ea typeface="+mn-ea"/>
+                <a:cs typeface="+mn-cs"/>
+              </a:rPr>
+              <a:t> </a:t>
+            </a:r>
+            <a:r>
+              <a:rPr lang="ko-KR" altLang="ko-KR" sz="1200" kern="1200" dirty="0" err="1">
+                <a:solidFill>
+                  <a:schemeClr val="tx1"/>
+                </a:solidFill>
+                <a:effectLst/>
+                <a:latin typeface="+mn-lt"/>
+                <a:ea typeface="+mn-ea"/>
+                <a:cs typeface="+mn-cs"/>
+              </a:rPr>
+              <a:t>exactly</a:t>
+            </a:r>
+            <a:r>
+              <a:rPr lang="ko-KR" altLang="ko-KR" sz="1200" kern="1200" dirty="0">
+                <a:solidFill>
+                  <a:schemeClr val="tx1"/>
+                </a:solidFill>
+                <a:effectLst/>
+                <a:latin typeface="+mn-lt"/>
+                <a:ea typeface="+mn-ea"/>
+                <a:cs typeface="+mn-cs"/>
+              </a:rPr>
+              <a:t> </a:t>
+            </a:r>
+            <a:r>
+              <a:rPr lang="ko-KR" altLang="ko-KR" sz="1200" kern="1200" dirty="0" err="1">
+                <a:solidFill>
+                  <a:schemeClr val="tx1"/>
+                </a:solidFill>
+                <a:effectLst/>
+                <a:latin typeface="+mn-lt"/>
+                <a:ea typeface="+mn-ea"/>
+                <a:cs typeface="+mn-cs"/>
+              </a:rPr>
+              <a:t>what</a:t>
+            </a:r>
+            <a:r>
+              <a:rPr lang="ko-KR" altLang="ko-KR" sz="1200" kern="1200" dirty="0">
+                <a:solidFill>
+                  <a:schemeClr val="tx1"/>
+                </a:solidFill>
+                <a:effectLst/>
+                <a:latin typeface="+mn-lt"/>
+                <a:ea typeface="+mn-ea"/>
+                <a:cs typeface="+mn-cs"/>
+              </a:rPr>
+              <a:t> </a:t>
+            </a:r>
+            <a:r>
+              <a:rPr lang="ko-KR" altLang="ko-KR" sz="1200" kern="1200" dirty="0" err="1">
+                <a:solidFill>
+                  <a:schemeClr val="tx1"/>
+                </a:solidFill>
+                <a:effectLst/>
+                <a:latin typeface="+mn-lt"/>
+                <a:ea typeface="+mn-ea"/>
+                <a:cs typeface="+mn-cs"/>
+              </a:rPr>
+              <a:t>the</a:t>
+            </a:r>
+            <a:r>
+              <a:rPr lang="ko-KR" altLang="ko-KR" sz="1200" kern="1200" dirty="0">
+                <a:solidFill>
+                  <a:schemeClr val="tx1"/>
+                </a:solidFill>
+                <a:effectLst/>
+                <a:latin typeface="+mn-lt"/>
+                <a:ea typeface="+mn-ea"/>
+                <a:cs typeface="+mn-cs"/>
+              </a:rPr>
+              <a:t> </a:t>
+            </a:r>
+            <a:r>
+              <a:rPr lang="ko-KR" altLang="ko-KR" sz="1200" kern="1200" dirty="0" err="1">
+                <a:solidFill>
+                  <a:schemeClr val="tx1"/>
+                </a:solidFill>
+                <a:effectLst/>
+                <a:latin typeface="+mn-lt"/>
+                <a:ea typeface="+mn-ea"/>
+                <a:cs typeface="+mn-cs"/>
+              </a:rPr>
+              <a:t>data</a:t>
+            </a:r>
+            <a:r>
+              <a:rPr lang="ko-KR" altLang="ko-KR" sz="1200" kern="1200" dirty="0">
+                <a:solidFill>
+                  <a:schemeClr val="tx1"/>
+                </a:solidFill>
+                <a:effectLst/>
+                <a:latin typeface="+mn-lt"/>
+                <a:ea typeface="+mn-ea"/>
+                <a:cs typeface="+mn-cs"/>
+              </a:rPr>
+              <a:t> </a:t>
+            </a:r>
+            <a:r>
+              <a:rPr lang="ko-KR" altLang="ko-KR" sz="1200" kern="1200" dirty="0" err="1">
+                <a:solidFill>
+                  <a:schemeClr val="tx1"/>
+                </a:solidFill>
+                <a:effectLst/>
+                <a:latin typeface="+mn-lt"/>
+                <a:ea typeface="+mn-ea"/>
+                <a:cs typeface="+mn-cs"/>
+              </a:rPr>
+              <a:t>show</a:t>
+            </a:r>
+            <a:r>
+              <a:rPr lang="ko-KR" altLang="ko-KR" sz="1200" kern="1200" dirty="0">
+                <a:solidFill>
+                  <a:schemeClr val="tx1"/>
+                </a:solidFill>
+                <a:effectLst/>
+                <a:latin typeface="+mn-lt"/>
+                <a:ea typeface="+mn-ea"/>
+                <a:cs typeface="+mn-cs"/>
+              </a:rPr>
+              <a:t>.</a:t>
+            </a:r>
+          </a:p>
+          <a:p>
+            <a:br>
+              <a:rPr lang="ko-KR" altLang="ko-KR" sz="1200" b="0" i="0" kern="1200" dirty="0">
+                <a:solidFill>
+                  <a:schemeClr val="tx1"/>
+                </a:solidFill>
+                <a:effectLst/>
+                <a:latin typeface="+mn-lt"/>
+                <a:ea typeface="+mn-ea"/>
+                <a:cs typeface="+mn-cs"/>
+              </a:rPr>
+            </a:br>
+            <a:endParaRPr lang="ko-KR" altLang="ko-KR" sz="1200" b="0" i="0" kern="1200" dirty="0">
+              <a:solidFill>
+                <a:schemeClr val="tx1"/>
+              </a:solidFill>
+              <a:effectLst/>
+              <a:latin typeface="+mn-lt"/>
+              <a:ea typeface="+mn-ea"/>
+              <a:cs typeface="+mn-cs"/>
+            </a:endParaRPr>
+          </a:p>
+          <a:p>
+            <a:endParaRPr lang="ko-KR" altLang="ko-KR" sz="1200" b="0" i="0" kern="1200" dirty="0">
+              <a:solidFill>
+                <a:schemeClr val="tx1"/>
+              </a:solidFill>
+              <a:effectLst/>
+              <a:latin typeface="+mn-lt"/>
+              <a:ea typeface="+mn-ea"/>
+              <a:cs typeface="+mn-cs"/>
+            </a:endParaRPr>
+          </a:p>
+          <a:p>
+            <a:endParaRPr sz="1200" dirty="0"/>
           </a:p>
         </p:txBody>
       </p:sp>
@@ -1432,64 +3748,74 @@
           <a:lstStyle/>
           <a:p>
             <a:r>
-              <a:rPr sz="1200"/>
-              <a:t>Professor Hur sent this feedback after reviewing our June 16 presentation.</a:t>
-            </a:r>
-          </a:p>
-          <a:p>
-            <a:r>
-              <a:rPr sz="1200"/>
-              <a:t>He provided the exact specification to implement: Inflow = max(ΔlnS, 0), Outflow = max(−ΔlnS, 0),</a:t>
-            </a:r>
-          </a:p>
-          <a:p>
-            <a:r>
-              <a:rPr sz="1200"/>
+              <a:rPr sz="1200" dirty="0"/>
+              <a:t>Professor provided the exact specification to implement: Inflow = max(</a:t>
+            </a:r>
+            <a:r>
+              <a:rPr sz="1200" dirty="0" err="1"/>
+              <a:t>ΔlnS</a:t>
+            </a:r>
+            <a:r>
+              <a:rPr sz="1200" dirty="0"/>
+              <a:t>, 0), Outflow = max(−</a:t>
+            </a:r>
+            <a:r>
+              <a:rPr sz="1200" dirty="0" err="1"/>
+              <a:t>ΔlnS</a:t>
+            </a:r>
+            <a:r>
+              <a:rPr sz="1200" dirty="0"/>
+              <a:t>, 0),</a:t>
+            </a:r>
+          </a:p>
+          <a:p>
+            <a:r>
+              <a:rPr sz="1200" dirty="0"/>
               <a:t>and the key threshold Low12 = 1[L &lt; 0.12].</a:t>
             </a:r>
           </a:p>
           <a:p>
-            <a:endParaRPr sz="1200"/>
-          </a:p>
-          <a:p>
-            <a:r>
-              <a:rPr sz="1200"/>
+            <a:endParaRPr sz="1200" dirty="0"/>
+          </a:p>
+          <a:p>
+            <a:r>
+              <a:rPr sz="1200" dirty="0"/>
               <a:t>Importantly, he also told us the expected result: β₅ = +7.55, p = 0.065.</a:t>
             </a:r>
           </a:p>
           <a:p>
             <a:r>
-              <a:rPr sz="1200"/>
+              <a:rPr sz="1200" dirty="0"/>
               <a:t>When we ran our updated code, we got β₅ = +7.552, p = 0.065 — an exact match.</a:t>
             </a:r>
           </a:p>
           <a:p>
-            <a:endParaRPr sz="1200"/>
-          </a:p>
-          <a:p>
-            <a:r>
-              <a:rPr sz="1200"/>
+            <a:endParaRPr sz="1200" dirty="0"/>
+          </a:p>
+          <a:p>
+            <a:r>
+              <a:rPr sz="1200" dirty="0"/>
               <a:t>He also asked us to move the primary threshold from L &lt; 4% to L &lt; 12%,</a:t>
             </a:r>
           </a:p>
           <a:p>
             <a:r>
-              <a:rPr sz="1200"/>
+              <a:rPr sz="1200" dirty="0"/>
               <a:t>because L &lt; 12% gives 6 identifying observations across both issuers (not just 2 or 9 from USDT).</a:t>
             </a:r>
           </a:p>
           <a:p>
-            <a:endParaRPr sz="1200"/>
-          </a:p>
-          <a:p>
-            <a:r>
-              <a:rPr sz="1200"/>
+            <a:endParaRPr sz="1200" dirty="0"/>
+          </a:p>
+          <a:p>
+            <a:r>
+              <a:rPr sz="1200" dirty="0"/>
               <a:t>The key framing he provided: 'The evidence is strongest when we allow for asymmetry.'</a:t>
             </a:r>
           </a:p>
           <a:p>
             <a:r>
-              <a:rPr sz="1200"/>
+              <a:rPr sz="1200" dirty="0"/>
               <a:t>This is now the opening framing of our Section 3.3.</a:t>
             </a:r>
           </a:p>
@@ -1560,79 +3886,111 @@
           <a:lstStyle/>
           <a:p>
             <a:r>
-              <a:rPr sz="1200"/>
+              <a:rPr sz="1200" dirty="0"/>
               <a:t>The asymmetric specification is the core methodological innovation of the revised paper.</a:t>
             </a:r>
           </a:p>
           <a:p>
-            <a:endParaRPr sz="1200"/>
-          </a:p>
-          <a:p>
-            <a:r>
-              <a:rPr sz="1200"/>
-              <a:t>Instead of treating all supply changes as the same (ΔlnS), we decompose them:</a:t>
-            </a:r>
-          </a:p>
-          <a:p>
-            <a:r>
-              <a:rPr sz="1200"/>
-              <a:t>  - Inflow = max(ΔlnS, 0): supply expansions — issuer buys T-bills, orderly</a:t>
-            </a:r>
-          </a:p>
-          <a:p>
-            <a:r>
-              <a:rPr sz="1200"/>
-              <a:t>  - Outflow = max(−ΔlnS, 0): supply contractions (redemptions) — may require T-bill sales</a:t>
-            </a:r>
-          </a:p>
-          <a:p>
-            <a:endParaRPr sz="1200"/>
-          </a:p>
-          <a:p>
-            <a:r>
-              <a:rPr sz="1200"/>
+            <a:endParaRPr sz="1200" dirty="0"/>
+          </a:p>
+          <a:p>
+            <a:r>
+              <a:rPr sz="1200" dirty="0"/>
+              <a:t>Instead of treating all supply changes as the same (</a:t>
+            </a:r>
+            <a:r>
+              <a:rPr sz="1200" dirty="0" err="1"/>
+              <a:t>ΔlnS</a:t>
+            </a:r>
+            <a:r>
+              <a:rPr sz="1200" dirty="0"/>
+              <a:t>), we decompose them:</a:t>
+            </a:r>
+          </a:p>
+          <a:p>
+            <a:r>
+              <a:rPr sz="1200" dirty="0"/>
+              <a:t>  - Inflow = max(</a:t>
+            </a:r>
+            <a:r>
+              <a:rPr sz="1200" dirty="0" err="1"/>
+              <a:t>ΔlnS</a:t>
+            </a:r>
+            <a:r>
+              <a:rPr sz="1200" dirty="0"/>
+              <a:t>, 0): supply expansions — issuer buys T-bills, orderly</a:t>
+            </a:r>
+          </a:p>
+          <a:p>
+            <a:r>
+              <a:rPr sz="1200" dirty="0"/>
+              <a:t>  - Outflow = max(−</a:t>
+            </a:r>
+            <a:r>
+              <a:rPr sz="1200" dirty="0" err="1"/>
+              <a:t>ΔlnS</a:t>
+            </a:r>
+            <a:r>
+              <a:rPr sz="1200" dirty="0"/>
+              <a:t>, 0): supply contractions (redemptions) — may require T-bill sales</a:t>
+            </a:r>
+          </a:p>
+          <a:p>
+            <a:endParaRPr sz="1200" dirty="0"/>
+          </a:p>
+          <a:p>
+            <a:r>
+              <a:rPr sz="1200" b="1" dirty="0"/>
               <a:t>The key interaction is β₅: Low × Outflow.</a:t>
             </a:r>
           </a:p>
           <a:p>
             <a:r>
-              <a:rPr sz="1200"/>
+              <a:rPr sz="1200" b="1" dirty="0"/>
               <a:t>If β₅ &gt; 0 and significant, it means: outflows in low-buffer states widen the OIS-Treasury spread.</a:t>
             </a:r>
           </a:p>
           <a:p>
             <a:r>
-              <a:rPr sz="1200"/>
+              <a:rPr sz="1200" b="1" dirty="0"/>
               <a:t>That is the forced-sale channel.</a:t>
             </a:r>
           </a:p>
           <a:p>
-            <a:endParaRPr sz="1200"/>
-          </a:p>
-          <a:p>
-            <a:r>
-              <a:rPr sz="1200"/>
+            <a:endParaRPr sz="1200" dirty="0"/>
+          </a:p>
+          <a:p>
+            <a:r>
+              <a:rPr sz="1200" dirty="0"/>
               <a:t>β₄ (Low × Inflow) should be insignificant — inflows are orderly regardless of buffer level.</a:t>
             </a:r>
           </a:p>
           <a:p>
             <a:r>
-              <a:rPr sz="1200"/>
+              <a:rPr sz="1200" dirty="0"/>
               <a:t>This asymmetric prediction is directly from the theoretical model (Section 2.1).</a:t>
             </a:r>
           </a:p>
           <a:p>
-            <a:endParaRPr sz="1200"/>
-          </a:p>
-          <a:p>
-            <a:r>
-              <a:rPr sz="1200"/>
-              <a:t>Dependent variable: ΔSpread (first-differenced) — addresses non-stationarity of levels spread.</a:t>
-            </a:r>
-          </a:p>
-          <a:p>
-            <a:r>
-              <a:rPr sz="1200"/>
+            <a:endParaRPr sz="1200" dirty="0"/>
+          </a:p>
+          <a:p>
+            <a:r>
+              <a:rPr sz="1200" dirty="0"/>
+              <a:t>Dependent variable: </a:t>
+            </a:r>
+            <a:r>
+              <a:rPr sz="1200" dirty="0" err="1"/>
+              <a:t>ΔSpread</a:t>
+            </a:r>
+            <a:r>
+              <a:rPr sz="1200" dirty="0"/>
+              <a:t> (first-differenced) — addresses non-stationarity of levels spread.</a:t>
+            </a:r>
+          </a:p>
+          <a:p>
+            <a:r>
+              <a:rPr sz="1200" dirty="0"/>
               <a:t>N = 100 (102 minus 2 first observations lost to differencing).</a:t>
             </a:r>
           </a:p>
@@ -1703,77 +4061,101 @@
           <a:lstStyle/>
           <a:p>
             <a:r>
+              <a:rPr sz="1200" dirty="0"/>
+              <a:t>This slide explains why we chose L &lt; 12% as the primary threshold rather than L &lt; 10%.</a:t>
+            </a:r>
+          </a:p>
+          <a:p>
+            <a:endParaRPr sz="1200" dirty="0"/>
+          </a:p>
+          <a:p>
+            <a:r>
+              <a:rPr sz="1200" b="1" dirty="0"/>
+              <a:t>L &lt; 10% gives a LARGER coefficient (β₅ = +16.92, p &lt; 0.001) — seems more significant.</a:t>
+            </a:r>
+          </a:p>
+          <a:p>
+            <a:r>
+              <a:rPr sz="1200" b="1" dirty="0"/>
+              <a:t>BUT: it is identified by only 2 low-buffer outflow observations, both from USDT in early 2026.</a:t>
+            </a:r>
+          </a:p>
+          <a:p>
+            <a:r>
+              <a:rPr sz="1200" dirty="0"/>
+              <a:t>With only 2 data points from a single issuer in one narrow time window, we cannot rule out</a:t>
+            </a:r>
+          </a:p>
+          <a:p>
+            <a:r>
+              <a:rPr sz="1200" dirty="0"/>
+              <a:t>a USDT-specific or macro-regime-specific explanation. This is exploratory.</a:t>
+            </a:r>
+          </a:p>
+          <a:p>
+            <a:endParaRPr sz="1200" dirty="0"/>
+          </a:p>
+          <a:p>
+            <a:r>
+              <a:rPr sz="1200" dirty="0"/>
+              <a:t>L &lt; 12% gives β₅ = +7.55 (p = 0.065) but uses 6 observations spanning:</a:t>
+            </a:r>
+          </a:p>
+          <a:p>
+            <a:r>
+              <a:rPr sz="1200" dirty="0"/>
+              <a:t>  - Both USDT and USDC</a:t>
+            </a:r>
+          </a:p>
+          <a:p>
+            <a:r>
+              <a:rPr sz="1200" dirty="0"/>
+              <a:t>  - Multiple years (2023–2026)</a:t>
+            </a:r>
+          </a:p>
+          <a:p>
+            <a:r>
+              <a:rPr sz="1200" dirty="0"/>
+              <a:t>This is more credible identification. </a:t>
+            </a:r>
+            <a:r>
+              <a:rPr lang="en-US" sz="1200" dirty="0"/>
+              <a:t>Thus we </a:t>
+            </a:r>
+            <a:r>
+              <a:rPr sz="1200" dirty="0"/>
+              <a:t>recommend L &lt; 12% as primary.</a:t>
+            </a:r>
+          </a:p>
+          <a:p>
+            <a:endParaRPr sz="1200" dirty="0"/>
+          </a:p>
+          <a:p>
+            <a:r>
+              <a:rPr sz="1200" dirty="0"/>
+              <a:t>Expected question: why not test more thresholds?</a:t>
+            </a:r>
+          </a:p>
+          <a:p>
+            <a:r>
+              <a:rPr sz="1200" dirty="0"/>
+              <a:t>Answer</a:t>
+            </a:r>
+            <a:r>
               <a:rPr sz="1200"/>
-              <a:t>This slide explains why we chose L &lt; 12% as the primary threshold rather than L &lt; 10%.</a:t>
-            </a:r>
-          </a:p>
-          <a:p>
-            <a:endParaRPr sz="1200"/>
-          </a:p>
-          <a:p>
+              <a:t>: </a:t>
+            </a:r>
+            <a:r>
+              <a:rPr lang="en-US" sz="1200"/>
+              <a:t>we follow the professor's guidance. Also, </a:t>
+            </a:r>
             <a:r>
               <a:rPr sz="1200"/>
-              <a:t>L &lt; 10% gives a LARGER coefficient (β₅ = +16.92, p &lt; 0.001) — seems more significant.</a:t>
-            </a:r>
-          </a:p>
-          <a:p>
-            <a:r>
-              <a:rPr sz="1200"/>
-              <a:t>BUT: it is identified by only 2 low-buffer outflow observations, both from USDT in early 2026.</a:t>
-            </a:r>
-          </a:p>
-          <a:p>
-            <a:r>
-              <a:rPr sz="1200"/>
-              <a:t>With only 2 data points from a single issuer in one narrow time window, we cannot rule out</a:t>
-            </a:r>
-          </a:p>
-          <a:p>
-            <a:r>
-              <a:rPr sz="1200"/>
-              <a:t>a USDT-specific or macro-regime-specific explanation. This is exploratory.</a:t>
-            </a:r>
-          </a:p>
-          <a:p>
-            <a:endParaRPr sz="1200"/>
-          </a:p>
-          <a:p>
-            <a:r>
-              <a:rPr sz="1200"/>
-              <a:t>L &lt; 12% gives β₅ = +7.55 (p = 0.065) but uses 6 observations spanning:</a:t>
-            </a:r>
-          </a:p>
-          <a:p>
-            <a:r>
-              <a:rPr sz="1200"/>
-              <a:t>  - Both USDT and USDC</a:t>
-            </a:r>
-          </a:p>
-          <a:p>
-            <a:r>
-              <a:rPr sz="1200"/>
-              <a:t>  - Multiple years (2023–2026)</a:t>
-            </a:r>
-          </a:p>
-          <a:p>
-            <a:r>
-              <a:rPr sz="1200"/>
-              <a:t>This is more credible identification. Professor Hur explicitly recommended L &lt; 12% as primary.</a:t>
-            </a:r>
-          </a:p>
-          <a:p>
-            <a:endParaRPr sz="1200"/>
-          </a:p>
-          <a:p>
-            <a:r>
-              <a:rPr sz="1200"/>
-              <a:t>Expected question: why not test more thresholds?</a:t>
-            </a:r>
-          </a:p>
-          <a:p>
-            <a:r>
-              <a:rPr sz="1200"/>
-              <a:t>Answer: we follow the professor's guidance. Also, data sparsity at very low L limits the search space.</a:t>
+              <a:t>data </a:t>
+            </a:r>
+            <a:r>
+              <a:rPr sz="1200" dirty="0"/>
+              <a:t>sparsity at very low L limits the search space.</a:t>
             </a:r>
           </a:p>
         </p:txBody>
@@ -1843,85 +4225,122 @@
           <a:lstStyle/>
           <a:p>
             <a:r>
-              <a:rPr sz="1200"/>
+              <a:rPr sz="1200" dirty="0"/>
               <a:t>This is Table 3 from the paper — the main result.</a:t>
             </a:r>
           </a:p>
           <a:p>
-            <a:endParaRPr sz="1200"/>
-          </a:p>
-          <a:p>
-            <a:r>
-              <a:rPr sz="1200"/>
+            <a:endParaRPr sz="1200" dirty="0"/>
+          </a:p>
+          <a:p>
+            <a:r>
+              <a:rPr sz="1200" dirty="0"/>
               <a:t>Key numbers to emphasize:</a:t>
             </a:r>
           </a:p>
           <a:p>
             <a:r>
-              <a:rPr sz="1200"/>
+              <a:rPr sz="1200" dirty="0"/>
               <a:t>  PRIMARY (L &lt; 12%): β₅ = +7.552, p = 0.065 — significant at 10% level</a:t>
             </a:r>
           </a:p>
           <a:p>
             <a:r>
-              <a:rPr sz="1200"/>
-              <a:t>  ROBUSTNESS (L &lt; 10%): β₅ = +16.923, p &lt; 0.001 — but only 2 obs</a:t>
-            </a:r>
-          </a:p>
-          <a:p>
-            <a:endParaRPr sz="1200"/>
-          </a:p>
-          <a:p>
-            <a:r>
-              <a:rPr sz="1200"/>
+              <a:rPr sz="1200" dirty="0"/>
+              <a:t>  ROBUSTNESS (L &lt; 10%): β₅ = +16.923, p &lt; 0.001 — but only 2 </a:t>
+            </a:r>
+            <a:r>
+              <a:rPr sz="1200" dirty="0" err="1"/>
+              <a:t>obs</a:t>
+            </a:r>
+            <a:endParaRPr sz="1200" dirty="0"/>
+          </a:p>
+          <a:p>
+            <a:endParaRPr sz="1200" dirty="0"/>
+          </a:p>
+          <a:p>
+            <a:r>
+              <a:rPr sz="1200" dirty="0"/>
               <a:t>Other things to note:</a:t>
             </a:r>
           </a:p>
           <a:p>
             <a:r>
-              <a:rPr sz="1200"/>
+              <a:rPr sz="1200" dirty="0"/>
               <a:t>  - β₁ (Inflow) = +0.518, insignificant — supply expansions have no spread effect</a:t>
             </a:r>
           </a:p>
           <a:p>
             <a:r>
-              <a:rPr sz="1200"/>
-              <a:t>  - β₄ (Low×Inflow) = −0.335, insignificant — even in low-buffer states, inflows don't move spread</a:t>
-            </a:r>
-          </a:p>
-          <a:p>
-            <a:r>
-              <a:rPr sz="1200"/>
+              <a:rPr sz="1200" dirty="0"/>
+              <a:t>  - β₄ (</a:t>
+            </a:r>
+            <a:r>
+              <a:rPr sz="1200" dirty="0" err="1"/>
+              <a:t>Low×Inflow</a:t>
+            </a:r>
+            <a:r>
+              <a:rPr sz="1200" dirty="0"/>
+              <a:t>) = −0.335, insignificant — even in low-buffer states, inflows don't move spread</a:t>
+            </a:r>
+          </a:p>
+          <a:p>
+            <a:r>
+              <a:rPr sz="1200" dirty="0"/>
               <a:t>  - β₃ (Low) = +0.008, insignificant — just being in a low-buffer state doesn't widen the spread</a:t>
             </a:r>
           </a:p>
           <a:p>
             <a:r>
-              <a:rPr sz="1200"/>
+              <a:rPr sz="1200" dirty="0"/>
               <a:t>  - VIX is +0.010*** — risk-off episodes widen spreads, as expected</a:t>
             </a:r>
           </a:p>
           <a:p>
             <a:r>
-              <a:rPr sz="1200"/>
-              <a:t>  - USDT FE ≈ 0, insignificant in ΔSpread spec — no issuer-level trend in first differences</a:t>
-            </a:r>
-          </a:p>
-          <a:p>
-            <a:endParaRPr sz="1200"/>
-          </a:p>
-          <a:p>
-            <a:r>
-              <a:rPr sz="1200"/>
-              <a:t>N = 100 (not 102): ΔSpread loses the first observation per issuer (2 obs lost total).</a:t>
-            </a:r>
-          </a:p>
-          <a:p>
-            <a:endParaRPr sz="1200"/>
-          </a:p>
-          <a:p>
-            <a:r>
-              <a:rPr sz="1200"/>
+              <a:rPr sz="1200" dirty="0"/>
+              <a:t>  - USDT FE ≈ 0, insignificant in </a:t>
+            </a:r>
+            <a:r>
+              <a:rPr sz="1200" dirty="0" err="1"/>
+              <a:t>ΔSpread</a:t>
+            </a:r>
+            <a:r>
+              <a:rPr sz="1200" dirty="0"/>
+              <a:t> spec — no issuer-level trend in first differences</a:t>
+            </a:r>
+          </a:p>
+          <a:p>
+            <a:endParaRPr sz="1200" dirty="0"/>
+          </a:p>
+          <a:p>
+            <a:r>
+              <a:rPr sz="1200" dirty="0"/>
+              <a:t>N = 100 (not 102): </a:t>
+            </a:r>
+            <a:r>
+              <a:rPr sz="1200" dirty="0" err="1"/>
+              <a:t>ΔSpread</a:t>
+            </a:r>
+            <a:r>
+              <a:rPr sz="1200" dirty="0"/>
+              <a:t> loses the first observation per issuer (2 </a:t>
+            </a:r>
+            <a:r>
+              <a:rPr sz="1200" dirty="0" err="1"/>
+              <a:t>obs</a:t>
+            </a:r>
+            <a:r>
+              <a:rPr sz="1200" dirty="0"/>
+              <a:t> lost total).</a:t>
+            </a:r>
+          </a:p>
+          <a:p>
+            <a:endParaRPr sz="1200" dirty="0"/>
+          </a:p>
+          <a:p>
+            <a:r>
+              <a:rPr sz="1200" dirty="0"/>
               <a:t>The professor confirmed: his own run gave β₅ = +7.55, p = 0.065. Our result: +7.552, p = 0.065. Exact match.</a:t>
             </a:r>
           </a:p>
@@ -1992,45 +4411,53 @@
           <a:lstStyle/>
           <a:p>
             <a:r>
-              <a:rPr sz="1200"/>
+              <a:rPr sz="1200" dirty="0"/>
               <a:t>Walk through each box.</a:t>
             </a:r>
           </a:p>
           <a:p>
-            <a:endParaRPr sz="1200"/>
-          </a:p>
-          <a:p>
-            <a:r>
-              <a:rPr sz="1200"/>
+            <a:endParaRPr sz="1200" dirty="0"/>
+          </a:p>
+          <a:p>
+            <a:r>
+              <a:rPr sz="1200" dirty="0"/>
               <a:t>LEFT BOX — magnitude:</a:t>
             </a:r>
           </a:p>
           <a:p>
             <a:r>
-              <a:rPr sz="1200"/>
-              <a:t>β₅ = +7.55 means: per unit of outflow rate in a low-buffer state, ΔSpread rises 7.55 pp.</a:t>
-            </a:r>
-          </a:p>
-          <a:p>
-            <a:r>
-              <a:rPr sz="1200"/>
+              <a:rPr sz="1200" dirty="0"/>
+              <a:t>β₅ = +7.55 means: per unit of outflow rate in a low-buffer state, </a:t>
+            </a:r>
+            <a:r>
+              <a:rPr sz="1200" dirty="0" err="1"/>
+              <a:t>ΔSpread</a:t>
+            </a:r>
+            <a:r>
+              <a:rPr sz="1200" dirty="0"/>
+              <a:t> rises 7.55 pp.</a:t>
+            </a:r>
+          </a:p>
+          <a:p>
+            <a:r>
+              <a:rPr sz="1200" dirty="0"/>
               <a:t>Outflow rate is log-scale; a 5% outflow = 0.05 in the Outflow variable.</a:t>
             </a:r>
           </a:p>
           <a:p>
             <a:r>
-              <a:rPr sz="1200"/>
+              <a:rPr sz="1200" dirty="0"/>
               <a:t>0.05 × 7.55 = 0.378 pp = 37.8 bps. That is comparable to March 2020 dash-for-cash episode.</a:t>
             </a:r>
           </a:p>
           <a:p>
             <a:r>
-              <a:rPr sz="1200"/>
+              <a:rPr sz="1200" dirty="0"/>
               <a:t>IMPORTANT caveat: the identifying outflows are 0.3–2%, not 5%. This is an out-of-sample extrapolation.</a:t>
             </a:r>
           </a:p>
           <a:p>
-            <a:endParaRPr sz="1200"/>
+            <a:endParaRPr sz="1200" dirty="0"/>
           </a:p>
           <a:p>
             <a:r>
@@ -2040,46 +4467,46 @@
           </a:p>
           <a:p>
             <a:r>
-              <a:rPr sz="1200"/>
+              <a:rPr sz="1200" dirty="0"/>
               <a:t>The inflow coefficients being near zero is the correct result per the theory.</a:t>
             </a:r>
           </a:p>
           <a:p>
             <a:r>
-              <a:rPr sz="1200"/>
+              <a:rPr sz="1200" dirty="0"/>
               <a:t>T-bill purchases during issuance are orderly and don't create spread pressure.</a:t>
             </a:r>
           </a:p>
           <a:p>
             <a:r>
-              <a:rPr sz="1200"/>
+              <a:rPr sz="1200" dirty="0"/>
               <a:t>The point of the asymmetric spec is to isolate the forced-sale effect.</a:t>
             </a:r>
           </a:p>
           <a:p>
-            <a:endParaRPr sz="1200"/>
-          </a:p>
-          <a:p>
-            <a:r>
-              <a:rPr sz="1200"/>
+            <a:endParaRPr sz="1200" dirty="0"/>
+          </a:p>
+          <a:p>
+            <a:r>
+              <a:rPr sz="1200" dirty="0"/>
               <a:t>RIGHT BOX — who the 6 observations are:</a:t>
             </a:r>
           </a:p>
           <a:p>
             <a:r>
-              <a:rPr sz="1200"/>
+              <a:rPr sz="1200" dirty="0"/>
               <a:t>USDC observations come from 2023, when Circle restructured reserves post-SVB.</a:t>
             </a:r>
           </a:p>
           <a:p>
             <a:r>
-              <a:rPr sz="1200"/>
+              <a:rPr sz="1200" dirty="0"/>
               <a:t>USDT observations come from early 2026, at L ≈ 2.6%.</a:t>
             </a:r>
           </a:p>
           <a:p>
             <a:r>
-              <a:rPr sz="1200"/>
+              <a:rPr sz="1200" dirty="0"/>
               <a:t>Having two issuers in different years strengthens credibility substantially.</a:t>
             </a:r>
           </a:p>
@@ -2448,7 +4875,7 @@
           <a:p>
             <a:fld id="{5BCAD085-E8A6-8845-BD4E-CB4CCA059FC4}" type="datetimeFigureOut">
               <a:rPr lang="en-US" smtClean="0"/>
-              <a:t>6/23/26</a:t>
+              <a:t>6/24/26</a:t>
             </a:fld>
             <a:endParaRPr lang="en-US"/>
           </a:p>
@@ -2616,7 +5043,7 @@
           <a:p>
             <a:fld id="{5BCAD085-E8A6-8845-BD4E-CB4CCA059FC4}" type="datetimeFigureOut">
               <a:rPr lang="en-US" smtClean="0"/>
-              <a:t>6/23/26</a:t>
+              <a:t>6/24/26</a:t>
             </a:fld>
             <a:endParaRPr lang="en-US"/>
           </a:p>
@@ -2794,7 +5221,7 @@
           <a:p>
             <a:fld id="{5BCAD085-E8A6-8845-BD4E-CB4CCA059FC4}" type="datetimeFigureOut">
               <a:rPr lang="en-US" smtClean="0"/>
-              <a:t>6/23/26</a:t>
+              <a:t>6/24/26</a:t>
             </a:fld>
             <a:endParaRPr lang="en-US"/>
           </a:p>
@@ -2962,7 +5389,7 @@
           <a:p>
             <a:fld id="{5BCAD085-E8A6-8845-BD4E-CB4CCA059FC4}" type="datetimeFigureOut">
               <a:rPr lang="en-US" smtClean="0"/>
-              <a:t>6/23/26</a:t>
+              <a:t>6/24/26</a:t>
             </a:fld>
             <a:endParaRPr lang="en-US"/>
           </a:p>
@@ -3207,7 +5634,7 @@
           <a:p>
             <a:fld id="{5BCAD085-E8A6-8845-BD4E-CB4CCA059FC4}" type="datetimeFigureOut">
               <a:rPr lang="en-US" smtClean="0"/>
-              <a:t>6/23/26</a:t>
+              <a:t>6/24/26</a:t>
             </a:fld>
             <a:endParaRPr lang="en-US"/>
           </a:p>
@@ -3492,7 +5919,7 @@
           <a:p>
             <a:fld id="{5BCAD085-E8A6-8845-BD4E-CB4CCA059FC4}" type="datetimeFigureOut">
               <a:rPr lang="en-US" smtClean="0"/>
-              <a:t>6/23/26</a:t>
+              <a:t>6/24/26</a:t>
             </a:fld>
             <a:endParaRPr lang="en-US"/>
           </a:p>
@@ -3911,7 +6338,7 @@
           <a:p>
             <a:fld id="{5BCAD085-E8A6-8845-BD4E-CB4CCA059FC4}" type="datetimeFigureOut">
               <a:rPr lang="en-US" smtClean="0"/>
-              <a:t>6/23/26</a:t>
+              <a:t>6/24/26</a:t>
             </a:fld>
             <a:endParaRPr lang="en-US"/>
           </a:p>
@@ -4028,7 +6455,7 @@
           <a:p>
             <a:fld id="{5BCAD085-E8A6-8845-BD4E-CB4CCA059FC4}" type="datetimeFigureOut">
               <a:rPr lang="en-US" smtClean="0"/>
-              <a:t>6/23/26</a:t>
+              <a:t>6/24/26</a:t>
             </a:fld>
             <a:endParaRPr lang="en-US"/>
           </a:p>
@@ -4123,7 +6550,7 @@
           <a:p>
             <a:fld id="{5BCAD085-E8A6-8845-BD4E-CB4CCA059FC4}" type="datetimeFigureOut">
               <a:rPr lang="en-US" smtClean="0"/>
-              <a:t>6/23/26</a:t>
+              <a:t>6/24/26</a:t>
             </a:fld>
             <a:endParaRPr lang="en-US"/>
           </a:p>
@@ -4398,7 +6825,7 @@
           <a:p>
             <a:fld id="{5BCAD085-E8A6-8845-BD4E-CB4CCA059FC4}" type="datetimeFigureOut">
               <a:rPr lang="en-US" smtClean="0"/>
-              <a:t>6/23/26</a:t>
+              <a:t>6/24/26</a:t>
             </a:fld>
             <a:endParaRPr lang="en-US"/>
           </a:p>
@@ -4650,7 +7077,7 @@
           <a:p>
             <a:fld id="{5BCAD085-E8A6-8845-BD4E-CB4CCA059FC4}" type="datetimeFigureOut">
               <a:rPr lang="en-US" smtClean="0"/>
-              <a:t>6/23/26</a:t>
+              <a:t>6/24/26</a:t>
             </a:fld>
             <a:endParaRPr lang="en-US"/>
           </a:p>
@@ -4861,7 +7288,7 @@
           <a:p>
             <a:fld id="{5BCAD085-E8A6-8845-BD4E-CB4CCA059FC4}" type="datetimeFigureOut">
               <a:rPr lang="en-US" smtClean="0"/>
-              <a:t>6/23/26</a:t>
+              <a:t>6/24/26</a:t>
             </a:fld>
             <a:endParaRPr lang="en-US"/>
           </a:p>
@@ -9225,40 +11652,6 @@
       </p:sp>
       <p:sp>
         <p:nvSpPr>
-          <p:cNvPr id="4" name="TextBox 3"/>
-          <p:cNvSpPr txBox="1"/>
-          <p:nvPr/>
-        </p:nvSpPr>
-        <p:spPr>
-          <a:xfrm>
-            <a:off x="274320" y="749808"/>
-            <a:ext cx="9144000" cy="365760"/>
-          </a:xfrm>
-          <a:prstGeom prst="rect">
-            <a:avLst/>
-          </a:prstGeom>
-          <a:noFill/>
-        </p:spPr>
-        <p:txBody>
-          <a:bodyPr wrap="square">
-            <a:spAutoFit/>
-          </a:bodyPr>
-          <a:lstStyle/>
-          <a:p>
-            <a:pPr algn="l"/>
-            <a:r>
-              <a:rPr sz="1400" b="0" i="1">
-                <a:solidFill>
-                  <a:srgbClr val="BFD7ED"/>
-                </a:solidFill>
-              </a:rPr>
-              <a:t>30 minutes · focus on methodology changes + final findings</a:t>
-            </a:r>
-          </a:p>
-        </p:txBody>
-      </p:sp>
-      <p:sp>
-        <p:nvSpPr>
           <p:cNvPr id="5" name="Rectangle 4"/>
           <p:cNvSpPr/>
           <p:nvPr/>
@@ -11097,7 +13490,7 @@
         <p:spPr>
           <a:xfrm>
             <a:off x="548640" y="1417320"/>
-            <a:ext cx="11064240" cy="4846320"/>
+            <a:ext cx="11064240" cy="4765407"/>
           </a:xfrm>
           <a:prstGeom prst="rect">
             <a:avLst/>
@@ -11111,7 +13504,7 @@
           <a:lstStyle/>
           <a:p>
             <a:r>
-              <a:rPr sz="1500" b="1">
+              <a:rPr sz="1500" b="1" dirty="0">
                 <a:solidFill>
                   <a:srgbClr val="1F3564"/>
                 </a:solidFill>
@@ -11126,14 +13519,191 @@
               </a:spcBef>
             </a:pPr>
             <a:r>
-              <a:rPr sz="1400" b="0" i="1">
+              <a:rPr sz="1400" b="0" i="1" dirty="0">
                 <a:solidFill>
                   <a:srgbClr val="595959"/>
                 </a:solidFill>
               </a:rPr>
               <a:t>
-"Define:   Inflow = max(ΔlnS, 0)   ·   Outflow = max(−ΔlnS, 0)   ·   Low12 = 1[L &lt; 0.12]"</a:t>
-            </a:r>
+"Define:   Inflow = max(</a:t>
+            </a:r>
+            <a:r>
+              <a:rPr sz="1400" b="0" i="1" dirty="0" err="1">
+                <a:solidFill>
+                  <a:srgbClr val="595959"/>
+                </a:solidFill>
+              </a:rPr>
+              <a:t>ΔlnS</a:t>
+            </a:r>
+            <a:r>
+              <a:rPr sz="1400" b="0" i="1" dirty="0">
+                <a:solidFill>
+                  <a:srgbClr val="595959"/>
+                </a:solidFill>
+              </a:rPr>
+              <a:t>, 0)   ·   Outflow = max(−</a:t>
+            </a:r>
+            <a:r>
+              <a:rPr sz="1400" b="0" i="1" dirty="0" err="1">
+                <a:solidFill>
+                  <a:srgbClr val="595959"/>
+                </a:solidFill>
+              </a:rPr>
+              <a:t>ΔlnS</a:t>
+            </a:r>
+            <a:r>
+              <a:rPr sz="1400" b="0" i="1" dirty="0">
+                <a:solidFill>
+                  <a:srgbClr val="595959"/>
+                </a:solidFill>
+              </a:rPr>
+              <a:t>, 0)   ·   Low12 = 1[L &lt; 0.12]"</a:t>
+            </a:r>
+            <a:endParaRPr lang="en-US" sz="1400" b="0" i="1" dirty="0">
+              <a:solidFill>
+                <a:srgbClr val="595959"/>
+              </a:solidFill>
+            </a:endParaRPr>
+          </a:p>
+          <a:p>
+            <a:pPr>
+              <a:spcBef>
+                <a:spcPts val="200"/>
+              </a:spcBef>
+            </a:pPr>
+            <a:r>
+              <a:rPr lang="ko-KR" altLang="ko-KR" dirty="0" err="1"/>
+              <a:t>So</a:t>
+            </a:r>
+            <a:r>
+              <a:rPr lang="ko-KR" altLang="ko-KR" dirty="0"/>
+              <a:t> </a:t>
+            </a:r>
+            <a:r>
+              <a:rPr lang="ko-KR" altLang="ko-KR" dirty="0" err="1"/>
+              <a:t>if</a:t>
+            </a:r>
+            <a:r>
+              <a:rPr lang="ko-KR" altLang="ko-KR" dirty="0"/>
+              <a:t> </a:t>
+            </a:r>
+            <a:r>
+              <a:rPr lang="ko-KR" altLang="ko-KR" dirty="0" err="1"/>
+              <a:t>ΔlnS</a:t>
+            </a:r>
+            <a:r>
+              <a:rPr lang="ko-KR" altLang="ko-KR" dirty="0"/>
+              <a:t> = +0.03 (</a:t>
+            </a:r>
+            <a:r>
+              <a:rPr lang="ko-KR" altLang="ko-KR" dirty="0" err="1"/>
+              <a:t>supply</a:t>
+            </a:r>
+            <a:r>
+              <a:rPr lang="ko-KR" altLang="ko-KR" dirty="0"/>
+              <a:t> </a:t>
+            </a:r>
+            <a:r>
+              <a:rPr lang="ko-KR" altLang="ko-KR" dirty="0" err="1"/>
+              <a:t>grew</a:t>
+            </a:r>
+            <a:r>
+              <a:rPr lang="ko-KR" altLang="ko-KR" dirty="0"/>
+              <a:t> 3%), </a:t>
+            </a:r>
+            <a:r>
+              <a:rPr lang="ko-KR" altLang="ko-KR" dirty="0" err="1"/>
+              <a:t>then</a:t>
+            </a:r>
+            <a:r>
+              <a:rPr lang="ko-KR" altLang="ko-KR" dirty="0"/>
+              <a:t> </a:t>
+            </a:r>
+            <a:r>
+              <a:rPr lang="ko-KR" altLang="ko-KR" dirty="0" err="1"/>
+              <a:t>Inflow</a:t>
+            </a:r>
+            <a:r>
+              <a:rPr lang="ko-KR" altLang="ko-KR" dirty="0"/>
+              <a:t> = 0.03, </a:t>
+            </a:r>
+            <a:r>
+              <a:rPr lang="ko-KR" altLang="ko-KR" dirty="0" err="1"/>
+              <a:t>Outflow</a:t>
+            </a:r>
+            <a:r>
+              <a:rPr lang="ko-KR" altLang="ko-KR" dirty="0"/>
+              <a:t> = 0. </a:t>
+            </a:r>
+            <a:endParaRPr lang="en-US" altLang="ko-KR" dirty="0"/>
+          </a:p>
+          <a:p>
+            <a:pPr>
+              <a:spcBef>
+                <a:spcPts val="200"/>
+              </a:spcBef>
+            </a:pPr>
+            <a:r>
+              <a:rPr lang="ko-KR" altLang="ko-KR" dirty="0" err="1"/>
+              <a:t>If</a:t>
+            </a:r>
+            <a:r>
+              <a:rPr lang="ko-KR" altLang="ko-KR" dirty="0"/>
+              <a:t> </a:t>
+            </a:r>
+            <a:r>
+              <a:rPr lang="ko-KR" altLang="ko-KR" dirty="0" err="1"/>
+              <a:t>ΔlnS</a:t>
+            </a:r>
+            <a:r>
+              <a:rPr lang="ko-KR" altLang="ko-KR" dirty="0"/>
+              <a:t> = −0.05 (</a:t>
+            </a:r>
+            <a:r>
+              <a:rPr lang="ko-KR" altLang="ko-KR" dirty="0" err="1"/>
+              <a:t>supply</a:t>
+            </a:r>
+            <a:r>
+              <a:rPr lang="ko-KR" altLang="ko-KR" dirty="0"/>
+              <a:t> </a:t>
+            </a:r>
+            <a:r>
+              <a:rPr lang="ko-KR" altLang="ko-KR" dirty="0" err="1"/>
+              <a:t>fell</a:t>
+            </a:r>
+            <a:r>
+              <a:rPr lang="ko-KR" altLang="ko-KR" dirty="0"/>
+              <a:t> 5%), </a:t>
+            </a:r>
+            <a:r>
+              <a:rPr lang="ko-KR" altLang="ko-KR" dirty="0" err="1"/>
+              <a:t>then</a:t>
+            </a:r>
+            <a:r>
+              <a:rPr lang="ko-KR" altLang="ko-KR" dirty="0"/>
+              <a:t> </a:t>
+            </a:r>
+            <a:r>
+              <a:rPr lang="ko-KR" altLang="ko-KR" dirty="0" err="1"/>
+              <a:t>Inflow</a:t>
+            </a:r>
+            <a:r>
+              <a:rPr lang="ko-KR" altLang="ko-KR" dirty="0"/>
+              <a:t> = 0, </a:t>
+            </a:r>
+            <a:r>
+              <a:rPr lang="ko-KR" altLang="ko-KR" dirty="0" err="1"/>
+              <a:t>Outflow</a:t>
+            </a:r>
+            <a:r>
+              <a:rPr lang="ko-KR" altLang="ko-KR" dirty="0"/>
+              <a:t> = 0.05.</a:t>
+            </a:r>
+            <a:endParaRPr lang="en-US" sz="1400" i="1" dirty="0">
+              <a:solidFill>
+                <a:srgbClr val="595959"/>
+              </a:solidFill>
+            </a:endParaRPr>
           </a:p>
           <a:p>
             <a:pPr algn="l">
@@ -11142,13 +13712,69 @@
               </a:spcBef>
             </a:pPr>
             <a:r>
-              <a:rPr sz="1400" b="0" i="1">
+              <a:rPr sz="1400" b="0" i="1" dirty="0">
                 <a:solidFill>
                   <a:srgbClr val="595959"/>
                 </a:solidFill>
               </a:rPr>
               <a:t>
-"Run:  ΔSpread = α + β₁·Inflow + β₂·Outflow + β₃·Low + β₄·Low×Inflow + β₅·Low×Outflow + controls"</a:t>
+</a:t>
+            </a:r>
+            <a:r>
+              <a:rPr sz="2000" b="0" i="1" dirty="0">
+                <a:solidFill>
+                  <a:srgbClr val="595959"/>
+                </a:solidFill>
+              </a:rPr>
+              <a:t>Run:  </a:t>
+            </a:r>
+            <a:r>
+              <a:rPr sz="2000" b="0" i="1" dirty="0" err="1">
+                <a:solidFill>
+                  <a:srgbClr val="595959"/>
+                </a:solidFill>
+              </a:rPr>
+              <a:t>ΔSpread</a:t>
+            </a:r>
+            <a:r>
+              <a:rPr sz="2000" b="0" i="1" dirty="0">
+                <a:solidFill>
+                  <a:srgbClr val="595959"/>
+                </a:solidFill>
+              </a:rPr>
+              <a:t> = α + β₁·Inflow + β₂·Outflow + β₃·Low + β₄·</a:t>
+            </a:r>
+            <a:r>
+              <a:rPr sz="2000" b="0" i="1" dirty="0" err="1">
+                <a:solidFill>
+                  <a:srgbClr val="595959"/>
+                </a:solidFill>
+              </a:rPr>
+              <a:t>Low×Inflow</a:t>
+            </a:r>
+            <a:r>
+              <a:rPr sz="2000" b="0" i="1" dirty="0">
+                <a:solidFill>
+                  <a:srgbClr val="595959"/>
+                </a:solidFill>
+              </a:rPr>
+              <a:t> + β₅·</a:t>
+            </a:r>
+            <a:r>
+              <a:rPr sz="2000" b="0" i="1" dirty="0" err="1">
+                <a:solidFill>
+                  <a:srgbClr val="595959"/>
+                </a:solidFill>
+              </a:rPr>
+              <a:t>Low×Outflow</a:t>
+            </a:r>
+            <a:r>
+              <a:rPr sz="2000" b="0" i="1" dirty="0">
+                <a:solidFill>
+                  <a:srgbClr val="595959"/>
+                </a:solidFill>
+              </a:rPr>
+              <a:t> + controls</a:t>
             </a:r>
           </a:p>
           <a:p>
@@ -11158,13 +13784,29 @@
               </a:spcBef>
             </a:pPr>
             <a:r>
-              <a:rPr sz="1400" b="0" i="1">
+              <a:rPr sz="1400" b="0" i="1" dirty="0">
                 <a:solidFill>
                   <a:srgbClr val="1F8697"/>
                 </a:solidFill>
               </a:rPr>
               <a:t>
-"The coefficient of interest is β₅ (Low×Outflow). I get β₅ = +7.55, p = 0.065."</a:t>
+"The coefficient of interest is β₅ (</a:t>
+            </a:r>
+            <a:r>
+              <a:rPr sz="1400" b="0" i="1" dirty="0" err="1">
+                <a:solidFill>
+                  <a:srgbClr val="1F8697"/>
+                </a:solidFill>
+              </a:rPr>
+              <a:t>Low×Outflow</a:t>
+            </a:r>
+            <a:r>
+              <a:rPr sz="1400" b="0" i="1" dirty="0">
+                <a:solidFill>
+                  <a:srgbClr val="1F8697"/>
+                </a:solidFill>
+              </a:rPr>
+              <a:t>). I get β₅ = +7.55, p = 0.065."</a:t>
             </a:r>
           </a:p>
           <a:p>
@@ -11174,30 +13816,66 @@
               </a:spcBef>
             </a:pPr>
             <a:r>
-              <a:rPr sz="1400" b="0" i="1">
+              <a:rPr sz="1400" b="0" i="1" dirty="0">
                 <a:solidFill>
                   <a:srgbClr val="595959"/>
                 </a:solidFill>
               </a:rPr>
               <a:t>
-"Please also report robustness around the threshold, especially 10% and 12%."</a:t>
-            </a:r>
-          </a:p>
-          <a:p>
-            <a:pPr algn="l">
+</a:t>
+            </a:r>
+            <a:r>
+              <a:rPr lang="en-US" sz="1400" i="1" dirty="0">
+                <a:solidFill>
+                  <a:srgbClr val="595959"/>
+                </a:solidFill>
+              </a:rPr>
+              <a:t>R</a:t>
+            </a:r>
+            <a:r>
+              <a:rPr sz="1400" b="0" i="1" dirty="0">
+                <a:solidFill>
+                  <a:srgbClr val="595959"/>
+                </a:solidFill>
+              </a:rPr>
+              <a:t>obustness around the threshold, especially 10% and 12%.</a:t>
+            </a:r>
+          </a:p>
+          <a:p>
+            <a:pPr marL="285750" indent="-285750" algn="l">
               <a:spcBef>
                 <a:spcPts val="200"/>
               </a:spcBef>
+              <a:buFontTx/>
+              <a:buChar char="-"/>
             </a:pPr>
             <a:r>
-              <a:rPr sz="1400" b="0" i="1">
+              <a:rPr sz="1400" b="0" i="1" dirty="0">
                 <a:solidFill>
                   <a:srgbClr val="1F3564"/>
                 </a:solidFill>
               </a:rPr>
-              <a:t>
-"The evidence is strongest when we allow for asymmetry between stablecoin inflows and outflows."</a:t>
-            </a:r>
+              <a:t>The evidence is strongest when we allow for asymmetry between stablecoin inflows and outflows.</a:t>
+            </a:r>
+            <a:endParaRPr lang="en-US" sz="1400" b="0" i="1" dirty="0">
+              <a:solidFill>
+                <a:srgbClr val="1F3564"/>
+              </a:solidFill>
+            </a:endParaRPr>
+          </a:p>
+          <a:p>
+            <a:pPr marL="285750" indent="-285750" algn="l">
+              <a:spcBef>
+                <a:spcPts val="200"/>
+              </a:spcBef>
+              <a:buFontTx/>
+              <a:buChar char="-"/>
+            </a:pPr>
+            <a:endParaRPr sz="1400" b="0" i="1" dirty="0">
+              <a:solidFill>
+                <a:srgbClr val="1F3564"/>
+              </a:solidFill>
+            </a:endParaRPr>
           </a:p>
           <a:p>
             <a:pPr algn="l">
@@ -11206,13 +13884,21 @@
               </a:spcBef>
             </a:pPr>
             <a:r>
-              <a:rPr sz="1400" b="1" i="0">
+              <a:rPr sz="1400" b="1" i="0" dirty="0">
                 <a:solidFill>
                   <a:srgbClr val="1F3564"/>
                 </a:solidFill>
               </a:rPr>
               <a:t>
-What this required us to change:</a:t>
+</a:t>
+            </a:r>
+            <a:r>
+              <a:rPr sz="2000" b="1" i="0" dirty="0">
+                <a:solidFill>
+                  <a:srgbClr val="1F3564"/>
+                </a:solidFill>
+              </a:rPr>
+              <a:t>What this required us to change:</a:t>
             </a:r>
           </a:p>
           <a:p>
@@ -11222,12 +13908,44 @@
               </a:spcBef>
             </a:pPr>
             <a:r>
-              <a:rPr sz="1300" b="0" i="0">
+              <a:rPr b="0" i="0" dirty="0">
                 <a:solidFill>
                   <a:srgbClr val="595959"/>
                 </a:solidFill>
               </a:rPr>
-              <a:t>✓  Split ΔlnS into Inflow and Outflow components       ✓  Move primary threshold from L &lt; 4%  →  L &lt; 12%</a:t>
+              <a:t>✓  Split </a:t>
+            </a:r>
+            <a:r>
+              <a:rPr b="0" i="0" dirty="0" err="1">
+                <a:solidFill>
+                  <a:srgbClr val="595959"/>
+                </a:solidFill>
+              </a:rPr>
+              <a:t>ΔlnS</a:t>
+            </a:r>
+            <a:r>
+              <a:rPr b="0" i="0" dirty="0">
+                <a:solidFill>
+                  <a:srgbClr val="595959"/>
+                </a:solidFill>
+              </a:rPr>
+              <a:t> into Inflow and Outflow components       ✓  Move primary </a:t>
+            </a:r>
+            <a:r>
+              <a:rPr b="0" i="0" dirty="0" err="1">
+                <a:solidFill>
+                  <a:srgbClr val="595959"/>
+                </a:solidFill>
+              </a:rPr>
+              <a:t>threshld</a:t>
+            </a:r>
+            <a:r>
+              <a:rPr b="0" i="0" dirty="0">
+                <a:solidFill>
+                  <a:srgbClr val="595959"/>
+                </a:solidFill>
+              </a:rPr>
+              <a:t> from L &lt; 4%  →  L &lt; 12%</a:t>
             </a:r>
           </a:p>
           <a:p>
@@ -11237,13 +13955,1013 @@
               </a:spcBef>
             </a:pPr>
             <a:r>
-              <a:rPr sz="1300" b="0" i="0">
+              <a:rPr b="0" i="0" dirty="0">
                 <a:solidFill>
                   <a:srgbClr val="595959"/>
                 </a:solidFill>
               </a:rPr>
-              <a:t>✓  Focus key hypothesis on β₅ (Low×Outflow), not β₃    ✓  Report both L &lt; 10% and L &lt; 12% side by side</a:t>
-            </a:r>
+              <a:t>✓  Focus key hypothesis on β₅ (</a:t>
+            </a:r>
+            <a:r>
+              <a:rPr b="0" i="0" dirty="0" err="1">
+                <a:solidFill>
+                  <a:srgbClr val="595959"/>
+                </a:solidFill>
+              </a:rPr>
+              <a:t>Low×Outflow</a:t>
+            </a:r>
+            <a:r>
+              <a:rPr b="0" i="0" dirty="0">
+                <a:solidFill>
+                  <a:srgbClr val="595959"/>
+                </a:solidFill>
+              </a:rPr>
+              <a:t>), not β₃    ✓  Report both L &lt; 10% and L &lt; 12% side by side</a:t>
+            </a:r>
+          </a:p>
+        </p:txBody>
+      </p:sp>
+      <p:graphicFrame>
+        <p:nvGraphicFramePr>
+          <p:cNvPr id="13" name="표 12">
+            <a:extLst>
+              <a:ext uri="{FF2B5EF4-FFF2-40B4-BE49-F238E27FC236}">
+                <a16:creationId xmlns:a16="http://schemas.microsoft.com/office/drawing/2014/main" id="{737708DF-983B-E34C-3E21-C98E6A452E56}"/>
+              </a:ext>
+            </a:extLst>
+          </p:cNvPr>
+          <p:cNvGraphicFramePr>
+            <a:graphicFrameLocks noGrp="1"/>
+          </p:cNvGraphicFramePr>
+          <p:nvPr>
+            <p:extLst>
+              <p:ext uri="{D42A27DB-BD31-4B8C-83A1-F6EECF244321}">
+                <p14:modId xmlns:p14="http://schemas.microsoft.com/office/powerpoint/2010/main" val="893376300"/>
+              </p:ext>
+            </p:extLst>
+          </p:nvPr>
+        </p:nvGraphicFramePr>
+        <p:xfrm>
+          <a:off x="548640" y="4559592"/>
+          <a:ext cx="8229600" cy="560070"/>
+        </p:xfrm>
+        <a:graphic>
+          <a:graphicData uri="http://schemas.openxmlformats.org/drawingml/2006/table">
+            <a:tbl>
+              <a:tblPr/>
+              <a:tblGrid>
+                <a:gridCol w="2743200">
+                  <a:extLst>
+                    <a:ext uri="{9D8B030D-6E8A-4147-A177-3AD203B41FA5}">
+                      <a16:colId xmlns:a16="http://schemas.microsoft.com/office/drawing/2014/main" val="1440001443"/>
+                    </a:ext>
+                  </a:extLst>
+                </a:gridCol>
+                <a:gridCol w="2743200">
+                  <a:extLst>
+                    <a:ext uri="{9D8B030D-6E8A-4147-A177-3AD203B41FA5}">
+                      <a16:colId xmlns:a16="http://schemas.microsoft.com/office/drawing/2014/main" val="2436068499"/>
+                    </a:ext>
+                  </a:extLst>
+                </a:gridCol>
+                <a:gridCol w="2743200">
+                  <a:extLst>
+                    <a:ext uri="{9D8B030D-6E8A-4147-A177-3AD203B41FA5}">
+                      <a16:colId xmlns:a16="http://schemas.microsoft.com/office/drawing/2014/main" val="1482346091"/>
+                    </a:ext>
+                  </a:extLst>
+                </a:gridCol>
+              </a:tblGrid>
+              <a:tr h="0">
+                <a:tc>
+                  <a:txBody>
+                    <a:bodyPr/>
+                    <a:lstStyle/>
+                    <a:p>
+                      <a:pPr algn="l">
+                        <a:buNone/>
+                      </a:pPr>
+                      <a:r>
+                        <a:rPr lang="ko-KR" sz="975" b="0" i="0">
+                          <a:solidFill>
+                            <a:srgbClr val="CCCCCC"/>
+                          </a:solidFill>
+                          <a:effectLst/>
+                          <a:latin typeface="-apple-system"/>
+                        </a:rPr>
+                        <a:t>Situation</a:t>
+                      </a:r>
+                    </a:p>
+                  </a:txBody>
+                  <a:tcPr marL="19050" marR="19050" marT="19050" marB="19050" anchor="ctr">
+                    <a:lnL w="9525" cap="flat" cmpd="sng" algn="ctr">
+                      <a:solidFill>
+                        <a:srgbClr val="454545"/>
+                      </a:solidFill>
+                      <a:prstDash val="solid"/>
+                      <a:round/>
+                      <a:headEnd type="none" w="med" len="med"/>
+                      <a:tailEnd type="none" w="med" len="med"/>
+                    </a:lnL>
+                    <a:lnR w="9525" cap="flat" cmpd="sng" algn="ctr">
+                      <a:solidFill>
+                        <a:srgbClr val="454545"/>
+                      </a:solidFill>
+                      <a:prstDash val="solid"/>
+                      <a:round/>
+                      <a:headEnd type="none" w="med" len="med"/>
+                      <a:tailEnd type="none" w="med" len="med"/>
+                    </a:lnR>
+                    <a:lnT w="9525" cap="flat" cmpd="sng" algn="ctr">
+                      <a:solidFill>
+                        <a:srgbClr val="454545"/>
+                      </a:solidFill>
+                      <a:prstDash val="solid"/>
+                      <a:round/>
+                      <a:headEnd type="none" w="med" len="med"/>
+                      <a:tailEnd type="none" w="med" len="med"/>
+                    </a:lnT>
+                    <a:lnB w="9525" cap="flat" cmpd="sng" algn="ctr">
+                      <a:solidFill>
+                        <a:srgbClr val="454545"/>
+                      </a:solidFill>
+                      <a:prstDash val="solid"/>
+                      <a:round/>
+                      <a:headEnd type="none" w="med" len="med"/>
+                      <a:tailEnd type="none" w="med" len="med"/>
+                    </a:lnB>
+                    <a:solidFill>
+                      <a:srgbClr val="181818"/>
+                    </a:solidFill>
+                  </a:tcPr>
+                </a:tc>
+                <a:tc>
+                  <a:txBody>
+                    <a:bodyPr/>
+                    <a:lstStyle/>
+                    <a:p>
+                      <a:pPr algn="l">
+                        <a:buNone/>
+                      </a:pPr>
+                      <a:r>
+                        <a:rPr lang="ko-KR" sz="975" b="0" i="0">
+                          <a:solidFill>
+                            <a:srgbClr val="CCCCCC"/>
+                          </a:solidFill>
+                          <a:effectLst/>
+                          <a:latin typeface="-apple-system"/>
+                        </a:rPr>
+                        <a:t>Buffer L high</a:t>
+                      </a:r>
+                    </a:p>
+                  </a:txBody>
+                  <a:tcPr marL="19050" marR="19050" marT="19050" marB="19050" anchor="ctr">
+                    <a:lnL w="9525" cap="flat" cmpd="sng" algn="ctr">
+                      <a:solidFill>
+                        <a:srgbClr val="454545"/>
+                      </a:solidFill>
+                      <a:prstDash val="solid"/>
+                      <a:round/>
+                      <a:headEnd type="none" w="med" len="med"/>
+                      <a:tailEnd type="none" w="med" len="med"/>
+                    </a:lnL>
+                    <a:lnR w="9525" cap="flat" cmpd="sng" algn="ctr">
+                      <a:solidFill>
+                        <a:srgbClr val="454545"/>
+                      </a:solidFill>
+                      <a:prstDash val="solid"/>
+                      <a:round/>
+                      <a:headEnd type="none" w="med" len="med"/>
+                      <a:tailEnd type="none" w="med" len="med"/>
+                    </a:lnR>
+                    <a:lnT w="9525" cap="flat" cmpd="sng" algn="ctr">
+                      <a:solidFill>
+                        <a:srgbClr val="454545"/>
+                      </a:solidFill>
+                      <a:prstDash val="solid"/>
+                      <a:round/>
+                      <a:headEnd type="none" w="med" len="med"/>
+                      <a:tailEnd type="none" w="med" len="med"/>
+                    </a:lnT>
+                    <a:lnB w="9525" cap="flat" cmpd="sng" algn="ctr">
+                      <a:solidFill>
+                        <a:srgbClr val="454545"/>
+                      </a:solidFill>
+                      <a:prstDash val="solid"/>
+                      <a:round/>
+                      <a:headEnd type="none" w="med" len="med"/>
+                      <a:tailEnd type="none" w="med" len="med"/>
+                    </a:lnB>
+                    <a:solidFill>
+                      <a:srgbClr val="181818"/>
+                    </a:solidFill>
+                  </a:tcPr>
+                </a:tc>
+                <a:tc>
+                  <a:txBody>
+                    <a:bodyPr/>
+                    <a:lstStyle/>
+                    <a:p>
+                      <a:pPr algn="l">
+                        <a:buNone/>
+                      </a:pPr>
+                      <a:r>
+                        <a:rPr lang="ko-KR" sz="975" b="0" i="0">
+                          <a:solidFill>
+                            <a:srgbClr val="CCCCCC"/>
+                          </a:solidFill>
+                          <a:effectLst/>
+                          <a:latin typeface="-apple-system"/>
+                        </a:rPr>
+                        <a:t>Buffer L low</a:t>
+                      </a:r>
+                    </a:p>
+                  </a:txBody>
+                  <a:tcPr marL="19050" marR="19050" marT="19050" marB="19050" anchor="ctr">
+                    <a:lnL w="9525" cap="flat" cmpd="sng" algn="ctr">
+                      <a:solidFill>
+                        <a:srgbClr val="454545"/>
+                      </a:solidFill>
+                      <a:prstDash val="solid"/>
+                      <a:round/>
+                      <a:headEnd type="none" w="med" len="med"/>
+                      <a:tailEnd type="none" w="med" len="med"/>
+                    </a:lnL>
+                    <a:lnR w="9525" cap="flat" cmpd="sng" algn="ctr">
+                      <a:solidFill>
+                        <a:srgbClr val="454545"/>
+                      </a:solidFill>
+                      <a:prstDash val="solid"/>
+                      <a:round/>
+                      <a:headEnd type="none" w="med" len="med"/>
+                      <a:tailEnd type="none" w="med" len="med"/>
+                    </a:lnR>
+                    <a:lnT w="9525" cap="flat" cmpd="sng" algn="ctr">
+                      <a:solidFill>
+                        <a:srgbClr val="454545"/>
+                      </a:solidFill>
+                      <a:prstDash val="solid"/>
+                      <a:round/>
+                      <a:headEnd type="none" w="med" len="med"/>
+                      <a:tailEnd type="none" w="med" len="med"/>
+                    </a:lnT>
+                    <a:lnB w="9525" cap="flat" cmpd="sng" algn="ctr">
+                      <a:solidFill>
+                        <a:srgbClr val="454545"/>
+                      </a:solidFill>
+                      <a:prstDash val="solid"/>
+                      <a:round/>
+                      <a:headEnd type="none" w="med" len="med"/>
+                      <a:tailEnd type="none" w="med" len="med"/>
+                    </a:lnB>
+                    <a:solidFill>
+                      <a:srgbClr val="181818"/>
+                    </a:solidFill>
+                  </a:tcPr>
+                </a:tc>
+                <a:extLst>
+                  <a:ext uri="{0D108BD9-81ED-4DB2-BD59-A6C34878D82A}">
+                    <a16:rowId xmlns:a16="http://schemas.microsoft.com/office/drawing/2014/main" val="2991374801"/>
+                  </a:ext>
+                </a:extLst>
+              </a:tr>
+              <a:tr h="0">
+                <a:tc>
+                  <a:txBody>
+                    <a:bodyPr/>
+                    <a:lstStyle/>
+                    <a:p>
+                      <a:pPr algn="l">
+                        <a:buNone/>
+                      </a:pPr>
+                      <a:r>
+                        <a:rPr lang="ko-KR" sz="975" b="1" i="0">
+                          <a:solidFill>
+                            <a:srgbClr val="CCCCCC"/>
+                          </a:solidFill>
+                          <a:effectLst/>
+                          <a:latin typeface="-apple-system"/>
+                        </a:rPr>
+                        <a:t>Inflow</a:t>
+                      </a:r>
+                      <a:r>
+                        <a:rPr lang="ko-KR" sz="975" b="0" i="0">
+                          <a:solidFill>
+                            <a:srgbClr val="CCCCCC"/>
+                          </a:solidFill>
+                          <a:effectLst/>
+                          <a:latin typeface="-apple-system"/>
+                        </a:rPr>
+                        <a:t> (new issuance)</a:t>
+                      </a:r>
+                    </a:p>
+                  </a:txBody>
+                  <a:tcPr marL="19050" marR="19050" marT="19050" marB="19050" anchor="ctr">
+                    <a:lnL w="9525" cap="flat" cmpd="sng" algn="ctr">
+                      <a:solidFill>
+                        <a:srgbClr val="454545"/>
+                      </a:solidFill>
+                      <a:prstDash val="solid"/>
+                      <a:round/>
+                      <a:headEnd type="none" w="med" len="med"/>
+                      <a:tailEnd type="none" w="med" len="med"/>
+                    </a:lnL>
+                    <a:lnR w="9525" cap="flat" cmpd="sng" algn="ctr">
+                      <a:solidFill>
+                        <a:srgbClr val="454545"/>
+                      </a:solidFill>
+                      <a:prstDash val="solid"/>
+                      <a:round/>
+                      <a:headEnd type="none" w="med" len="med"/>
+                      <a:tailEnd type="none" w="med" len="med"/>
+                    </a:lnR>
+                    <a:lnT w="9525" cap="flat" cmpd="sng" algn="ctr">
+                      <a:solidFill>
+                        <a:srgbClr val="454545"/>
+                      </a:solidFill>
+                      <a:prstDash val="solid"/>
+                      <a:round/>
+                      <a:headEnd type="none" w="med" len="med"/>
+                      <a:tailEnd type="none" w="med" len="med"/>
+                    </a:lnT>
+                    <a:lnB w="9525" cap="flat" cmpd="sng" algn="ctr">
+                      <a:solidFill>
+                        <a:srgbClr val="454545"/>
+                      </a:solidFill>
+                      <a:prstDash val="solid"/>
+                      <a:round/>
+                      <a:headEnd type="none" w="med" len="med"/>
+                      <a:tailEnd type="none" w="med" len="med"/>
+                    </a:lnB>
+                    <a:solidFill>
+                      <a:srgbClr val="181818"/>
+                    </a:solidFill>
+                  </a:tcPr>
+                </a:tc>
+                <a:tc>
+                  <a:txBody>
+                    <a:bodyPr/>
+                    <a:lstStyle/>
+                    <a:p>
+                      <a:pPr algn="l">
+                        <a:buNone/>
+                      </a:pPr>
+                      <a:r>
+                        <a:rPr lang="ko-KR" sz="975" b="0" i="0">
+                          <a:solidFill>
+                            <a:srgbClr val="CCCCCC"/>
+                          </a:solidFill>
+                          <a:effectLst/>
+                          <a:latin typeface="-apple-system"/>
+                        </a:rPr>
+                        <a:t>No spread effect</a:t>
+                      </a:r>
+                    </a:p>
+                  </a:txBody>
+                  <a:tcPr marL="19050" marR="19050" marT="19050" marB="19050" anchor="ctr">
+                    <a:lnL w="9525" cap="flat" cmpd="sng" algn="ctr">
+                      <a:solidFill>
+                        <a:srgbClr val="454545"/>
+                      </a:solidFill>
+                      <a:prstDash val="solid"/>
+                      <a:round/>
+                      <a:headEnd type="none" w="med" len="med"/>
+                      <a:tailEnd type="none" w="med" len="med"/>
+                    </a:lnL>
+                    <a:lnR w="9525" cap="flat" cmpd="sng" algn="ctr">
+                      <a:solidFill>
+                        <a:srgbClr val="454545"/>
+                      </a:solidFill>
+                      <a:prstDash val="solid"/>
+                      <a:round/>
+                      <a:headEnd type="none" w="med" len="med"/>
+                      <a:tailEnd type="none" w="med" len="med"/>
+                    </a:lnR>
+                    <a:lnT w="9525" cap="flat" cmpd="sng" algn="ctr">
+                      <a:solidFill>
+                        <a:srgbClr val="454545"/>
+                      </a:solidFill>
+                      <a:prstDash val="solid"/>
+                      <a:round/>
+                      <a:headEnd type="none" w="med" len="med"/>
+                      <a:tailEnd type="none" w="med" len="med"/>
+                    </a:lnT>
+                    <a:lnB w="9525" cap="flat" cmpd="sng" algn="ctr">
+                      <a:solidFill>
+                        <a:srgbClr val="454545"/>
+                      </a:solidFill>
+                      <a:prstDash val="solid"/>
+                      <a:round/>
+                      <a:headEnd type="none" w="med" len="med"/>
+                      <a:tailEnd type="none" w="med" len="med"/>
+                    </a:lnB>
+                    <a:solidFill>
+                      <a:srgbClr val="181818"/>
+                    </a:solidFill>
+                  </a:tcPr>
+                </a:tc>
+                <a:tc>
+                  <a:txBody>
+                    <a:bodyPr/>
+                    <a:lstStyle/>
+                    <a:p>
+                      <a:pPr algn="l">
+                        <a:buNone/>
+                      </a:pPr>
+                      <a:r>
+                        <a:rPr lang="ko-KR" sz="975" b="0" i="0">
+                          <a:solidFill>
+                            <a:srgbClr val="CCCCCC"/>
+                          </a:solidFill>
+                          <a:effectLst/>
+                          <a:latin typeface="-apple-system"/>
+                        </a:rPr>
+                        <a:t>No spread effect</a:t>
+                      </a:r>
+                    </a:p>
+                  </a:txBody>
+                  <a:tcPr marL="19050" marR="19050" marT="19050" marB="19050" anchor="ctr">
+                    <a:lnL w="9525" cap="flat" cmpd="sng" algn="ctr">
+                      <a:solidFill>
+                        <a:srgbClr val="454545"/>
+                      </a:solidFill>
+                      <a:prstDash val="solid"/>
+                      <a:round/>
+                      <a:headEnd type="none" w="med" len="med"/>
+                      <a:tailEnd type="none" w="med" len="med"/>
+                    </a:lnL>
+                    <a:lnR w="9525" cap="flat" cmpd="sng" algn="ctr">
+                      <a:solidFill>
+                        <a:srgbClr val="454545"/>
+                      </a:solidFill>
+                      <a:prstDash val="solid"/>
+                      <a:round/>
+                      <a:headEnd type="none" w="med" len="med"/>
+                      <a:tailEnd type="none" w="med" len="med"/>
+                    </a:lnR>
+                    <a:lnT w="9525" cap="flat" cmpd="sng" algn="ctr">
+                      <a:solidFill>
+                        <a:srgbClr val="454545"/>
+                      </a:solidFill>
+                      <a:prstDash val="solid"/>
+                      <a:round/>
+                      <a:headEnd type="none" w="med" len="med"/>
+                      <a:tailEnd type="none" w="med" len="med"/>
+                    </a:lnT>
+                    <a:lnB w="9525" cap="flat" cmpd="sng" algn="ctr">
+                      <a:solidFill>
+                        <a:srgbClr val="454545"/>
+                      </a:solidFill>
+                      <a:prstDash val="solid"/>
+                      <a:round/>
+                      <a:headEnd type="none" w="med" len="med"/>
+                      <a:tailEnd type="none" w="med" len="med"/>
+                    </a:lnB>
+                    <a:solidFill>
+                      <a:srgbClr val="181818"/>
+                    </a:solidFill>
+                  </a:tcPr>
+                </a:tc>
+                <a:extLst>
+                  <a:ext uri="{0D108BD9-81ED-4DB2-BD59-A6C34878D82A}">
+                    <a16:rowId xmlns:a16="http://schemas.microsoft.com/office/drawing/2014/main" val="2398762526"/>
+                  </a:ext>
+                </a:extLst>
+              </a:tr>
+              <a:tr h="0">
+                <a:tc>
+                  <a:txBody>
+                    <a:bodyPr/>
+                    <a:lstStyle/>
+                    <a:p>
+                      <a:pPr algn="l">
+                        <a:buNone/>
+                      </a:pPr>
+                      <a:r>
+                        <a:rPr lang="ko-KR" sz="975" b="1" i="0">
+                          <a:solidFill>
+                            <a:srgbClr val="CCCCCC"/>
+                          </a:solidFill>
+                          <a:effectLst/>
+                          <a:latin typeface="-apple-system"/>
+                        </a:rPr>
+                        <a:t>Outflow</a:t>
+                      </a:r>
+                      <a:r>
+                        <a:rPr lang="ko-KR" sz="975" b="0" i="0">
+                          <a:solidFill>
+                            <a:srgbClr val="CCCCCC"/>
+                          </a:solidFill>
+                          <a:effectLst/>
+                          <a:latin typeface="-apple-system"/>
+                        </a:rPr>
+                        <a:t> (redemption)</a:t>
+                      </a:r>
+                    </a:p>
+                  </a:txBody>
+                  <a:tcPr marL="19050" marR="19050" marT="19050" marB="19050" anchor="ctr">
+                    <a:lnL w="9525" cap="flat" cmpd="sng" algn="ctr">
+                      <a:solidFill>
+                        <a:srgbClr val="454545"/>
+                      </a:solidFill>
+                      <a:prstDash val="solid"/>
+                      <a:round/>
+                      <a:headEnd type="none" w="med" len="med"/>
+                      <a:tailEnd type="none" w="med" len="med"/>
+                    </a:lnL>
+                    <a:lnR w="9525" cap="flat" cmpd="sng" algn="ctr">
+                      <a:solidFill>
+                        <a:srgbClr val="454545"/>
+                      </a:solidFill>
+                      <a:prstDash val="solid"/>
+                      <a:round/>
+                      <a:headEnd type="none" w="med" len="med"/>
+                      <a:tailEnd type="none" w="med" len="med"/>
+                    </a:lnR>
+                    <a:lnT w="9525" cap="flat" cmpd="sng" algn="ctr">
+                      <a:solidFill>
+                        <a:srgbClr val="454545"/>
+                      </a:solidFill>
+                      <a:prstDash val="solid"/>
+                      <a:round/>
+                      <a:headEnd type="none" w="med" len="med"/>
+                      <a:tailEnd type="none" w="med" len="med"/>
+                    </a:lnT>
+                    <a:lnB w="9525" cap="flat" cmpd="sng" algn="ctr">
+                      <a:solidFill>
+                        <a:srgbClr val="454545"/>
+                      </a:solidFill>
+                      <a:prstDash val="solid"/>
+                      <a:round/>
+                      <a:headEnd type="none" w="med" len="med"/>
+                      <a:tailEnd type="none" w="med" len="med"/>
+                    </a:lnB>
+                    <a:solidFill>
+                      <a:srgbClr val="181818"/>
+                    </a:solidFill>
+                  </a:tcPr>
+                </a:tc>
+                <a:tc>
+                  <a:txBody>
+                    <a:bodyPr/>
+                    <a:lstStyle/>
+                    <a:p>
+                      <a:pPr algn="l">
+                        <a:buNone/>
+                      </a:pPr>
+                      <a:r>
+                        <a:rPr lang="ko-KR" sz="975" b="0" i="0">
+                          <a:solidFill>
+                            <a:srgbClr val="CCCCCC"/>
+                          </a:solidFill>
+                          <a:effectLst/>
+                          <a:latin typeface="-apple-system"/>
+                        </a:rPr>
+                        <a:t>No spread effect</a:t>
+                      </a:r>
+                    </a:p>
+                  </a:txBody>
+                  <a:tcPr marL="19050" marR="19050" marT="19050" marB="19050" anchor="ctr">
+                    <a:lnL w="9525" cap="flat" cmpd="sng" algn="ctr">
+                      <a:solidFill>
+                        <a:srgbClr val="454545"/>
+                      </a:solidFill>
+                      <a:prstDash val="solid"/>
+                      <a:round/>
+                      <a:headEnd type="none" w="med" len="med"/>
+                      <a:tailEnd type="none" w="med" len="med"/>
+                    </a:lnL>
+                    <a:lnR w="9525" cap="flat" cmpd="sng" algn="ctr">
+                      <a:solidFill>
+                        <a:srgbClr val="454545"/>
+                      </a:solidFill>
+                      <a:prstDash val="solid"/>
+                      <a:round/>
+                      <a:headEnd type="none" w="med" len="med"/>
+                      <a:tailEnd type="none" w="med" len="med"/>
+                    </a:lnR>
+                    <a:lnT w="9525" cap="flat" cmpd="sng" algn="ctr">
+                      <a:solidFill>
+                        <a:srgbClr val="454545"/>
+                      </a:solidFill>
+                      <a:prstDash val="solid"/>
+                      <a:round/>
+                      <a:headEnd type="none" w="med" len="med"/>
+                      <a:tailEnd type="none" w="med" len="med"/>
+                    </a:lnT>
+                    <a:lnB w="9525" cap="flat" cmpd="sng" algn="ctr">
+                      <a:solidFill>
+                        <a:srgbClr val="454545"/>
+                      </a:solidFill>
+                      <a:prstDash val="solid"/>
+                      <a:round/>
+                      <a:headEnd type="none" w="med" len="med"/>
+                      <a:tailEnd type="none" w="med" len="med"/>
+                    </a:lnB>
+                    <a:solidFill>
+                      <a:srgbClr val="181818"/>
+                    </a:solidFill>
+                  </a:tcPr>
+                </a:tc>
+                <a:tc>
+                  <a:txBody>
+                    <a:bodyPr/>
+                    <a:lstStyle/>
+                    <a:p>
+                      <a:pPr algn="l">
+                        <a:buNone/>
+                      </a:pPr>
+                      <a:r>
+                        <a:rPr lang="ko-KR" sz="975" b="1" i="0" dirty="0" err="1">
+                          <a:solidFill>
+                            <a:srgbClr val="CCCCCC"/>
+                          </a:solidFill>
+                          <a:effectLst/>
+                          <a:latin typeface="-apple-system"/>
+                        </a:rPr>
+                        <a:t>Spread</a:t>
+                      </a:r>
+                      <a:r>
+                        <a:rPr lang="ko-KR" sz="975" b="1" i="0" dirty="0">
+                          <a:solidFill>
+                            <a:srgbClr val="CCCCCC"/>
+                          </a:solidFill>
+                          <a:effectLst/>
+                          <a:latin typeface="-apple-system"/>
+                        </a:rPr>
+                        <a:t> </a:t>
+                      </a:r>
+                      <a:r>
+                        <a:rPr lang="ko-KR" sz="975" b="1" i="0" dirty="0" err="1">
+                          <a:solidFill>
+                            <a:srgbClr val="CCCCCC"/>
+                          </a:solidFill>
+                          <a:effectLst/>
+                          <a:latin typeface="-apple-system"/>
+                        </a:rPr>
+                        <a:t>widens</a:t>
+                      </a:r>
+                      <a:endParaRPr lang="ko-KR" sz="975" b="0" i="0" dirty="0">
+                        <a:solidFill>
+                          <a:srgbClr val="CCCCCC"/>
+                        </a:solidFill>
+                        <a:effectLst/>
+                        <a:latin typeface="-apple-system"/>
+                      </a:endParaRPr>
+                    </a:p>
+                  </a:txBody>
+                  <a:tcPr marL="19050" marR="19050" marT="19050" marB="19050" anchor="ctr">
+                    <a:lnL w="9525" cap="flat" cmpd="sng" algn="ctr">
+                      <a:solidFill>
+                        <a:srgbClr val="454545"/>
+                      </a:solidFill>
+                      <a:prstDash val="solid"/>
+                      <a:round/>
+                      <a:headEnd type="none" w="med" len="med"/>
+                      <a:tailEnd type="none" w="med" len="med"/>
+                    </a:lnL>
+                    <a:lnR w="9525" cap="flat" cmpd="sng" algn="ctr">
+                      <a:solidFill>
+                        <a:srgbClr val="454545"/>
+                      </a:solidFill>
+                      <a:prstDash val="solid"/>
+                      <a:round/>
+                      <a:headEnd type="none" w="med" len="med"/>
+                      <a:tailEnd type="none" w="med" len="med"/>
+                    </a:lnR>
+                    <a:lnT w="9525" cap="flat" cmpd="sng" algn="ctr">
+                      <a:solidFill>
+                        <a:srgbClr val="454545"/>
+                      </a:solidFill>
+                      <a:prstDash val="solid"/>
+                      <a:round/>
+                      <a:headEnd type="none" w="med" len="med"/>
+                      <a:tailEnd type="none" w="med" len="med"/>
+                    </a:lnT>
+                    <a:lnB w="9525" cap="flat" cmpd="sng" algn="ctr">
+                      <a:solidFill>
+                        <a:srgbClr val="454545"/>
+                      </a:solidFill>
+                      <a:prstDash val="solid"/>
+                      <a:round/>
+                      <a:headEnd type="none" w="med" len="med"/>
+                      <a:tailEnd type="none" w="med" len="med"/>
+                    </a:lnB>
+                    <a:solidFill>
+                      <a:srgbClr val="181818"/>
+                    </a:solidFill>
+                  </a:tcPr>
+                </a:tc>
+                <a:extLst>
+                  <a:ext uri="{0D108BD9-81ED-4DB2-BD59-A6C34878D82A}">
+                    <a16:rowId xmlns:a16="http://schemas.microsoft.com/office/drawing/2014/main" val="3261405923"/>
+                  </a:ext>
+                </a:extLst>
+              </a:tr>
+            </a:tbl>
+          </a:graphicData>
+        </a:graphic>
+      </p:graphicFrame>
+      <p:sp>
+        <p:nvSpPr>
+          <p:cNvPr id="15" name="TextBox 14">
+            <a:extLst>
+              <a:ext uri="{FF2B5EF4-FFF2-40B4-BE49-F238E27FC236}">
+                <a16:creationId xmlns:a16="http://schemas.microsoft.com/office/drawing/2014/main" id="{3F0EC998-8661-8FC9-2D02-C7CED4823CD2}"/>
+              </a:ext>
+            </a:extLst>
+          </p:cNvPr>
+          <p:cNvSpPr txBox="1"/>
+          <p:nvPr/>
+        </p:nvSpPr>
+        <p:spPr>
+          <a:xfrm>
+            <a:off x="3017520" y="2856268"/>
+            <a:ext cx="6144768" cy="1200329"/>
+          </a:xfrm>
+          <a:prstGeom prst="rect">
+            <a:avLst/>
+          </a:prstGeom>
+          <a:noFill/>
+        </p:spPr>
+        <p:txBody>
+          <a:bodyPr wrap="square">
+            <a:spAutoFit/>
+          </a:bodyPr>
+          <a:lstStyle/>
+          <a:p>
+            <a:pPr indent="0" algn="l">
+              <a:buNone/>
+            </a:pPr>
+            <a:r>
+              <a:rPr lang="ko-KR" altLang="ko-KR" sz="1800" b="1" i="0" dirty="0">
+                <a:solidFill>
+                  <a:srgbClr val="CCCCCC"/>
+                </a:solidFill>
+                <a:effectLst/>
+                <a:latin typeface="-apple-system"/>
+              </a:rPr>
+              <a:t>The </a:t>
+            </a:r>
+            <a:r>
+              <a:rPr lang="ko-KR" altLang="ko-KR" sz="1800" b="1" i="0" dirty="0" err="1">
+                <a:solidFill>
+                  <a:srgbClr val="CCCCCC"/>
+                </a:solidFill>
+                <a:effectLst/>
+                <a:latin typeface="-apple-system"/>
+              </a:rPr>
+              <a:t>asymmetry</a:t>
+            </a:r>
+            <a:r>
+              <a:rPr lang="ko-KR" altLang="ko-KR" sz="1800" b="1" i="0" dirty="0">
+                <a:solidFill>
+                  <a:srgbClr val="CCCCCC"/>
+                </a:solidFill>
+                <a:effectLst/>
+                <a:latin typeface="-apple-system"/>
+              </a:rPr>
+              <a:t> </a:t>
+            </a:r>
+            <a:r>
+              <a:rPr lang="ko-KR" altLang="ko-KR" sz="1800" b="1" i="0" dirty="0" err="1">
+                <a:solidFill>
+                  <a:srgbClr val="CCCCCC"/>
+                </a:solidFill>
+                <a:effectLst/>
+                <a:latin typeface="-apple-system"/>
+              </a:rPr>
+              <a:t>is</a:t>
+            </a:r>
+            <a:r>
+              <a:rPr lang="ko-KR" altLang="ko-KR" sz="1800" b="1" i="0" dirty="0">
+                <a:solidFill>
+                  <a:srgbClr val="CCCCCC"/>
+                </a:solidFill>
+                <a:effectLst/>
+                <a:latin typeface="-apple-system"/>
+              </a:rPr>
+              <a:t>:</a:t>
+            </a:r>
+            <a:r>
+              <a:rPr lang="ko-KR" altLang="ko-KR" sz="1800" b="0" i="0" dirty="0">
+                <a:solidFill>
+                  <a:srgbClr val="CCCCCC"/>
+                </a:solidFill>
+                <a:effectLst/>
+                <a:latin typeface="-apple-system"/>
+              </a:rPr>
+              <a:t> </a:t>
+            </a:r>
+            <a:r>
+              <a:rPr lang="ko-KR" altLang="ko-KR" sz="1800" b="0" i="0" dirty="0" err="1">
+                <a:solidFill>
+                  <a:srgbClr val="CCCCCC"/>
+                </a:solidFill>
+                <a:effectLst/>
+                <a:latin typeface="-apple-system"/>
+              </a:rPr>
+              <a:t>the</a:t>
+            </a:r>
+            <a:r>
+              <a:rPr lang="ko-KR" altLang="ko-KR" sz="1800" b="0" i="0" dirty="0">
+                <a:solidFill>
+                  <a:srgbClr val="CCCCCC"/>
+                </a:solidFill>
+                <a:effectLst/>
+                <a:latin typeface="-apple-system"/>
+              </a:rPr>
+              <a:t> </a:t>
+            </a:r>
+            <a:r>
+              <a:rPr lang="ko-KR" altLang="ko-KR" sz="1800" b="0" i="0" dirty="0" err="1">
+                <a:solidFill>
+                  <a:srgbClr val="CCCCCC"/>
+                </a:solidFill>
+                <a:effectLst/>
+                <a:latin typeface="-apple-system"/>
+              </a:rPr>
+              <a:t>buffer</a:t>
+            </a:r>
+            <a:r>
+              <a:rPr lang="ko-KR" altLang="ko-KR" sz="1800" b="0" i="0" dirty="0">
+                <a:solidFill>
+                  <a:srgbClr val="CCCCCC"/>
+                </a:solidFill>
+                <a:effectLst/>
+                <a:latin typeface="-apple-system"/>
+              </a:rPr>
+              <a:t> </a:t>
+            </a:r>
+            <a:r>
+              <a:rPr lang="ko-KR" altLang="ko-KR" sz="1800" b="0" i="0" dirty="0" err="1">
+                <a:solidFill>
+                  <a:srgbClr val="CCCCCC"/>
+                </a:solidFill>
+                <a:effectLst/>
+                <a:latin typeface="-apple-system"/>
+              </a:rPr>
+              <a:t>L</a:t>
+            </a:r>
+            <a:r>
+              <a:rPr lang="ko-KR" altLang="ko-KR" sz="1800" b="0" i="0" dirty="0">
+                <a:solidFill>
+                  <a:srgbClr val="CCCCCC"/>
+                </a:solidFill>
+                <a:effectLst/>
+                <a:latin typeface="-apple-system"/>
+              </a:rPr>
+              <a:t> </a:t>
+            </a:r>
+            <a:r>
+              <a:rPr lang="ko-KR" altLang="ko-KR" sz="1800" b="0" i="0" dirty="0" err="1">
+                <a:solidFill>
+                  <a:srgbClr val="CCCCCC"/>
+                </a:solidFill>
+                <a:effectLst/>
+                <a:latin typeface="-apple-system"/>
+              </a:rPr>
+              <a:t>only</a:t>
+            </a:r>
+            <a:r>
+              <a:rPr lang="ko-KR" altLang="ko-KR" sz="1800" b="0" i="0" dirty="0">
+                <a:solidFill>
+                  <a:srgbClr val="CCCCCC"/>
+                </a:solidFill>
+                <a:effectLst/>
+                <a:latin typeface="-apple-system"/>
+              </a:rPr>
+              <a:t> </a:t>
+            </a:r>
+            <a:r>
+              <a:rPr lang="ko-KR" altLang="ko-KR" sz="1800" b="0" i="0" dirty="0" err="1">
+                <a:solidFill>
+                  <a:srgbClr val="CCCCCC"/>
+                </a:solidFill>
+                <a:effectLst/>
+                <a:latin typeface="-apple-system"/>
+              </a:rPr>
+              <a:t>matters</a:t>
+            </a:r>
+            <a:r>
+              <a:rPr lang="ko-KR" altLang="ko-KR" sz="1800" b="0" i="0" dirty="0">
+                <a:solidFill>
+                  <a:srgbClr val="CCCCCC"/>
+                </a:solidFill>
+                <a:effectLst/>
+                <a:latin typeface="-apple-system"/>
+              </a:rPr>
+              <a:t> </a:t>
+            </a:r>
+            <a:r>
+              <a:rPr lang="ko-KR" altLang="ko-KR" sz="1800" b="0" i="0" dirty="0" err="1">
+                <a:solidFill>
+                  <a:srgbClr val="CCCCCC"/>
+                </a:solidFill>
+                <a:effectLst/>
+                <a:latin typeface="-apple-system"/>
+              </a:rPr>
+              <a:t>for</a:t>
+            </a:r>
+            <a:r>
+              <a:rPr lang="ko-KR" altLang="ko-KR" sz="1800" b="0" i="0" dirty="0">
+                <a:solidFill>
+                  <a:srgbClr val="CCCCCC"/>
+                </a:solidFill>
+                <a:effectLst/>
+                <a:latin typeface="-apple-system"/>
+              </a:rPr>
+              <a:t> </a:t>
+            </a:r>
+            <a:r>
+              <a:rPr lang="ko-KR" altLang="ko-KR" sz="1800" b="0" i="0" dirty="0" err="1">
+                <a:solidFill>
+                  <a:srgbClr val="CCCCCC"/>
+                </a:solidFill>
+                <a:effectLst/>
+                <a:latin typeface="-apple-system"/>
+              </a:rPr>
+              <a:t>outflows</a:t>
+            </a:r>
+            <a:r>
+              <a:rPr lang="ko-KR" altLang="ko-KR" sz="1800" b="0" i="0" dirty="0">
+                <a:solidFill>
+                  <a:srgbClr val="CCCCCC"/>
+                </a:solidFill>
+                <a:effectLst/>
+                <a:latin typeface="-apple-system"/>
+              </a:rPr>
+              <a:t>, </a:t>
+            </a:r>
+            <a:r>
+              <a:rPr lang="ko-KR" altLang="ko-KR" sz="1800" b="0" i="0" dirty="0" err="1">
+                <a:solidFill>
+                  <a:srgbClr val="CCCCCC"/>
+                </a:solidFill>
+                <a:effectLst/>
+                <a:latin typeface="-apple-system"/>
+              </a:rPr>
+              <a:t>never</a:t>
+            </a:r>
+            <a:r>
+              <a:rPr lang="ko-KR" altLang="ko-KR" sz="1800" b="0" i="0" dirty="0">
+                <a:solidFill>
+                  <a:srgbClr val="CCCCCC"/>
+                </a:solidFill>
+                <a:effectLst/>
+                <a:latin typeface="-apple-system"/>
+              </a:rPr>
+              <a:t> </a:t>
+            </a:r>
+            <a:r>
+              <a:rPr lang="ko-KR" altLang="ko-KR" sz="1800" b="0" i="0" dirty="0" err="1">
+                <a:solidFill>
+                  <a:srgbClr val="CCCCCC"/>
+                </a:solidFill>
+                <a:effectLst/>
+                <a:latin typeface="-apple-system"/>
+              </a:rPr>
+              <a:t>for</a:t>
+            </a:r>
+            <a:r>
+              <a:rPr lang="ko-KR" altLang="ko-KR" sz="1800" b="0" i="0" dirty="0">
+                <a:solidFill>
+                  <a:srgbClr val="CCCCCC"/>
+                </a:solidFill>
+                <a:effectLst/>
+                <a:latin typeface="-apple-system"/>
+              </a:rPr>
+              <a:t> </a:t>
+            </a:r>
+            <a:r>
+              <a:rPr lang="ko-KR" altLang="ko-KR" sz="1800" b="0" i="0" dirty="0" err="1">
+                <a:solidFill>
+                  <a:srgbClr val="CCCCCC"/>
+                </a:solidFill>
+                <a:effectLst/>
+                <a:latin typeface="-apple-system"/>
+              </a:rPr>
+              <a:t>inflows</a:t>
+            </a:r>
+            <a:r>
+              <a:rPr lang="ko-KR" altLang="ko-KR" sz="1800" b="0" i="0" dirty="0">
+                <a:solidFill>
+                  <a:srgbClr val="CCCCCC"/>
+                </a:solidFill>
+                <a:effectLst/>
+                <a:latin typeface="-apple-system"/>
+              </a:rPr>
+              <a:t>.</a:t>
+            </a:r>
+          </a:p>
+          <a:p>
+            <a:pPr>
+              <a:buNone/>
+            </a:pPr>
+            <a:br>
+              <a:rPr lang="ko-KR" altLang="ko-KR" dirty="0"/>
+            </a:br>
+            <a:endParaRPr lang="ko-KR" altLang="en-US" dirty="0"/>
           </a:p>
         </p:txBody>
       </p:sp>
@@ -13710,7 +17428,7 @@
         <p:spPr>
           <a:xfrm>
             <a:off x="0" y="0"/>
-            <a:ext cx="12188952" cy="1143000"/>
+            <a:ext cx="12188952" cy="747130"/>
           </a:xfrm>
           <a:prstGeom prst="rect">
             <a:avLst/>
@@ -13787,7 +17505,7 @@
         </p:nvSpPr>
         <p:spPr>
           <a:xfrm>
-            <a:off x="274320" y="749808"/>
+            <a:off x="3873554" y="201168"/>
             <a:ext cx="9144000" cy="365760"/>
           </a:xfrm>
           <a:prstGeom prst="rect">
@@ -13803,12 +17521,28 @@
           <a:p>
             <a:pPr algn="l"/>
             <a:r>
-              <a:rPr sz="1400" b="0" i="1">
+              <a:rPr sz="1400" b="0" i="1" dirty="0">
                 <a:solidFill>
                   <a:srgbClr val="BFD7ED"/>
                 </a:solidFill>
               </a:rPr>
-              <a:t>Asymmetric Threshold Panel (DV = ΔSpread)</a:t>
+              <a:t>Asymmetric Threshold Panel (DV = </a:t>
+            </a:r>
+            <a:r>
+              <a:rPr sz="1400" b="0" i="1" dirty="0" err="1">
+                <a:solidFill>
+                  <a:srgbClr val="BFD7ED"/>
+                </a:solidFill>
+              </a:rPr>
+              <a:t>ΔSpread</a:t>
+            </a:r>
+            <a:r>
+              <a:rPr sz="1400" b="0" i="1" dirty="0">
+                <a:solidFill>
+                  <a:srgbClr val="BFD7ED"/>
+                </a:solidFill>
+              </a:rPr>
+              <a:t>)</a:t>
             </a:r>
           </a:p>
         </p:txBody>
@@ -13820,9 +17554,9 @@
           <p:nvPr/>
         </p:nvSpPr>
         <p:spPr>
-          <a:xfrm>
-            <a:off x="0" y="6583680"/>
-            <a:ext cx="12188952" cy="274320"/>
+          <a:xfrm flipV="1">
+            <a:off x="0" y="6416407"/>
+            <a:ext cx="12188826" cy="502253"/>
           </a:xfrm>
           <a:prstGeom prst="rect">
             <a:avLst/>
@@ -13865,7 +17599,7 @@
         </p:nvSpPr>
         <p:spPr>
           <a:xfrm>
-            <a:off x="274320" y="6601968"/>
+            <a:off x="27306" y="6160378"/>
             <a:ext cx="9144000" cy="228600"/>
           </a:xfrm>
           <a:prstGeom prst="rect">
@@ -13899,8 +17633,8 @@
         </p:nvSpPr>
         <p:spPr>
           <a:xfrm>
-            <a:off x="11430000" y="6492240"/>
-            <a:ext cx="731520" cy="274320"/>
+            <a:off x="11182986" y="6050650"/>
+            <a:ext cx="731520" cy="246221"/>
           </a:xfrm>
           <a:prstGeom prst="rect">
             <a:avLst/>
@@ -13933,7 +17667,7 @@
         </p:nvSpPr>
         <p:spPr>
           <a:xfrm>
-            <a:off x="274320" y="1298448"/>
+            <a:off x="27306" y="856858"/>
             <a:ext cx="3840480" cy="438912"/>
           </a:xfrm>
           <a:prstGeom prst="rect">
@@ -13977,8 +17711,8 @@
         </p:nvSpPr>
         <p:spPr>
           <a:xfrm>
-            <a:off x="347472" y="1344168"/>
-            <a:ext cx="3730752" cy="347472"/>
+            <a:off x="100458" y="902578"/>
+            <a:ext cx="3730752" cy="292388"/>
           </a:xfrm>
           <a:prstGeom prst="rect">
             <a:avLst/>
@@ -14011,7 +17745,7 @@
         </p:nvSpPr>
         <p:spPr>
           <a:xfrm>
-            <a:off x="4206240" y="1298448"/>
+            <a:off x="3959226" y="856858"/>
             <a:ext cx="3657600" cy="438912"/>
           </a:xfrm>
           <a:prstGeom prst="rect">
@@ -14055,8 +17789,8 @@
         </p:nvSpPr>
         <p:spPr>
           <a:xfrm>
-            <a:off x="4279392" y="1344168"/>
-            <a:ext cx="3547872" cy="347472"/>
+            <a:off x="4032378" y="902578"/>
+            <a:ext cx="3547872" cy="292388"/>
           </a:xfrm>
           <a:prstGeom prst="rect">
             <a:avLst/>
@@ -14089,7 +17823,7 @@
         </p:nvSpPr>
         <p:spPr>
           <a:xfrm>
-            <a:off x="7955279" y="1298448"/>
+            <a:off x="7708265" y="856858"/>
             <a:ext cx="4480560" cy="438912"/>
           </a:xfrm>
           <a:prstGeom prst="rect">
@@ -14133,8 +17867,8 @@
         </p:nvSpPr>
         <p:spPr>
           <a:xfrm>
-            <a:off x="8028431" y="1344168"/>
-            <a:ext cx="4370832" cy="347472"/>
+            <a:off x="7781417" y="902578"/>
+            <a:ext cx="4370832" cy="292388"/>
           </a:xfrm>
           <a:prstGeom prst="rect">
             <a:avLst/>
@@ -14167,7 +17901,7 @@
         </p:nvSpPr>
         <p:spPr>
           <a:xfrm>
-            <a:off x="274320" y="1737360"/>
+            <a:off x="27306" y="1295770"/>
             <a:ext cx="3840480" cy="438912"/>
           </a:xfrm>
           <a:prstGeom prst="rect">
@@ -14213,8 +17947,8 @@
         </p:nvSpPr>
         <p:spPr>
           <a:xfrm>
-            <a:off x="365760" y="1828800"/>
-            <a:ext cx="3703320" cy="338328"/>
+            <a:off x="118746" y="1387210"/>
+            <a:ext cx="3703320" cy="276999"/>
           </a:xfrm>
           <a:prstGeom prst="rect">
             <a:avLst/>
@@ -14247,7 +17981,7 @@
         </p:nvSpPr>
         <p:spPr>
           <a:xfrm>
-            <a:off x="4206240" y="1737360"/>
+            <a:off x="3959226" y="1295770"/>
             <a:ext cx="3657600" cy="438912"/>
           </a:xfrm>
           <a:prstGeom prst="rect">
@@ -14293,8 +18027,8 @@
         </p:nvSpPr>
         <p:spPr>
           <a:xfrm>
-            <a:off x="4297679" y="1828800"/>
-            <a:ext cx="3520440" cy="338328"/>
+            <a:off x="4050665" y="1387210"/>
+            <a:ext cx="3520440" cy="276999"/>
           </a:xfrm>
           <a:prstGeom prst="rect">
             <a:avLst/>
@@ -14327,7 +18061,7 @@
         </p:nvSpPr>
         <p:spPr>
           <a:xfrm>
-            <a:off x="7955279" y="1737360"/>
+            <a:off x="7708265" y="1295770"/>
             <a:ext cx="4480560" cy="438912"/>
           </a:xfrm>
           <a:prstGeom prst="rect">
@@ -14373,8 +18107,8 @@
         </p:nvSpPr>
         <p:spPr>
           <a:xfrm>
-            <a:off x="8046719" y="1828800"/>
-            <a:ext cx="4343400" cy="338328"/>
+            <a:off x="7799705" y="1387210"/>
+            <a:ext cx="4343400" cy="276999"/>
           </a:xfrm>
           <a:prstGeom prst="rect">
             <a:avLst/>
@@ -14407,7 +18141,7 @@
         </p:nvSpPr>
         <p:spPr>
           <a:xfrm>
-            <a:off x="274320" y="2212848"/>
+            <a:off x="27306" y="1771258"/>
             <a:ext cx="3840480" cy="438912"/>
           </a:xfrm>
           <a:prstGeom prst="rect">
@@ -14453,8 +18187,8 @@
         </p:nvSpPr>
         <p:spPr>
           <a:xfrm>
-            <a:off x="365760" y="2304288"/>
-            <a:ext cx="3703320" cy="338328"/>
+            <a:off x="118746" y="1862698"/>
+            <a:ext cx="3703320" cy="276999"/>
           </a:xfrm>
           <a:prstGeom prst="rect">
             <a:avLst/>
@@ -14487,7 +18221,7 @@
         </p:nvSpPr>
         <p:spPr>
           <a:xfrm>
-            <a:off x="4206240" y="2212848"/>
+            <a:off x="3959226" y="1771258"/>
             <a:ext cx="3657600" cy="438912"/>
           </a:xfrm>
           <a:prstGeom prst="rect">
@@ -14533,8 +18267,8 @@
         </p:nvSpPr>
         <p:spPr>
           <a:xfrm>
-            <a:off x="4297679" y="2304288"/>
-            <a:ext cx="3520440" cy="338328"/>
+            <a:off x="4050665" y="1862698"/>
+            <a:ext cx="3520440" cy="276999"/>
           </a:xfrm>
           <a:prstGeom prst="rect">
             <a:avLst/>
@@ -14567,7 +18301,7 @@
         </p:nvSpPr>
         <p:spPr>
           <a:xfrm>
-            <a:off x="7955279" y="2212848"/>
+            <a:off x="7708265" y="1771258"/>
             <a:ext cx="4480560" cy="438912"/>
           </a:xfrm>
           <a:prstGeom prst="rect">
@@ -14613,8 +18347,8 @@
         </p:nvSpPr>
         <p:spPr>
           <a:xfrm>
-            <a:off x="8046719" y="2304288"/>
-            <a:ext cx="4343400" cy="338328"/>
+            <a:off x="7799705" y="1862698"/>
+            <a:ext cx="4343400" cy="276999"/>
           </a:xfrm>
           <a:prstGeom prst="rect">
             <a:avLst/>
@@ -14647,7 +18381,7 @@
         </p:nvSpPr>
         <p:spPr>
           <a:xfrm>
-            <a:off x="274320" y="2688336"/>
+            <a:off x="27306" y="2246746"/>
             <a:ext cx="3840480" cy="438912"/>
           </a:xfrm>
           <a:prstGeom prst="rect">
@@ -14693,8 +18427,8 @@
         </p:nvSpPr>
         <p:spPr>
           <a:xfrm>
-            <a:off x="365760" y="2779776"/>
-            <a:ext cx="3703320" cy="338328"/>
+            <a:off x="118746" y="2338186"/>
+            <a:ext cx="3703320" cy="276999"/>
           </a:xfrm>
           <a:prstGeom prst="rect">
             <a:avLst/>
@@ -14727,7 +18461,7 @@
         </p:nvSpPr>
         <p:spPr>
           <a:xfrm>
-            <a:off x="4206240" y="2688336"/>
+            <a:off x="3959226" y="2246746"/>
             <a:ext cx="3657600" cy="438912"/>
           </a:xfrm>
           <a:prstGeom prst="rect">
@@ -14773,8 +18507,8 @@
         </p:nvSpPr>
         <p:spPr>
           <a:xfrm>
-            <a:off x="4297679" y="2779776"/>
-            <a:ext cx="3520440" cy="338328"/>
+            <a:off x="4050665" y="2338186"/>
+            <a:ext cx="3520440" cy="276999"/>
           </a:xfrm>
           <a:prstGeom prst="rect">
             <a:avLst/>
@@ -14807,7 +18541,7 @@
         </p:nvSpPr>
         <p:spPr>
           <a:xfrm>
-            <a:off x="7955279" y="2688336"/>
+            <a:off x="7708265" y="2246746"/>
             <a:ext cx="4480560" cy="438912"/>
           </a:xfrm>
           <a:prstGeom prst="rect">
@@ -14853,8 +18587,8 @@
         </p:nvSpPr>
         <p:spPr>
           <a:xfrm>
-            <a:off x="8046719" y="2779776"/>
-            <a:ext cx="4343400" cy="338328"/>
+            <a:off x="7799705" y="2338186"/>
+            <a:ext cx="4343400" cy="276999"/>
           </a:xfrm>
           <a:prstGeom prst="rect">
             <a:avLst/>
@@ -14887,7 +18621,7 @@
         </p:nvSpPr>
         <p:spPr>
           <a:xfrm>
-            <a:off x="274320" y="3163824"/>
+            <a:off x="27306" y="2722234"/>
             <a:ext cx="3840480" cy="438912"/>
           </a:xfrm>
           <a:prstGeom prst="rect">
@@ -14933,8 +18667,8 @@
         </p:nvSpPr>
         <p:spPr>
           <a:xfrm>
-            <a:off x="365760" y="3255264"/>
-            <a:ext cx="3703320" cy="338328"/>
+            <a:off x="118746" y="2813674"/>
+            <a:ext cx="3703320" cy="276999"/>
           </a:xfrm>
           <a:prstGeom prst="rect">
             <a:avLst/>
@@ -14967,7 +18701,7 @@
         </p:nvSpPr>
         <p:spPr>
           <a:xfrm>
-            <a:off x="4206240" y="3163824"/>
+            <a:off x="3959226" y="2722234"/>
             <a:ext cx="3657600" cy="438912"/>
           </a:xfrm>
           <a:prstGeom prst="rect">
@@ -15013,8 +18747,8 @@
         </p:nvSpPr>
         <p:spPr>
           <a:xfrm>
-            <a:off x="4297679" y="3255264"/>
-            <a:ext cx="3520440" cy="338328"/>
+            <a:off x="4050665" y="2813674"/>
+            <a:ext cx="3520440" cy="276999"/>
           </a:xfrm>
           <a:prstGeom prst="rect">
             <a:avLst/>
@@ -15047,7 +18781,7 @@
         </p:nvSpPr>
         <p:spPr>
           <a:xfrm>
-            <a:off x="7955279" y="3163824"/>
+            <a:off x="7708265" y="2722234"/>
             <a:ext cx="4480560" cy="438912"/>
           </a:xfrm>
           <a:prstGeom prst="rect">
@@ -15093,8 +18827,8 @@
         </p:nvSpPr>
         <p:spPr>
           <a:xfrm>
-            <a:off x="8046719" y="3255264"/>
-            <a:ext cx="4343400" cy="338328"/>
+            <a:off x="7799705" y="2813674"/>
+            <a:ext cx="4343400" cy="276999"/>
           </a:xfrm>
           <a:prstGeom prst="rect">
             <a:avLst/>
@@ -15127,7 +18861,7 @@
         </p:nvSpPr>
         <p:spPr>
           <a:xfrm>
-            <a:off x="274320" y="3639312"/>
+            <a:off x="27306" y="3197722"/>
             <a:ext cx="3840480" cy="438912"/>
           </a:xfrm>
           <a:prstGeom prst="rect">
@@ -15173,8 +18907,8 @@
         </p:nvSpPr>
         <p:spPr>
           <a:xfrm>
-            <a:off x="365760" y="3730752"/>
-            <a:ext cx="3703320" cy="338328"/>
+            <a:off x="118746" y="3289162"/>
+            <a:ext cx="3703320" cy="292388"/>
           </a:xfrm>
           <a:prstGeom prst="rect">
             <a:avLst/>
@@ -15207,7 +18941,7 @@
         </p:nvSpPr>
         <p:spPr>
           <a:xfrm>
-            <a:off x="4206240" y="3639312"/>
+            <a:off x="3959226" y="3197722"/>
             <a:ext cx="3657600" cy="438912"/>
           </a:xfrm>
           <a:prstGeom prst="rect">
@@ -15253,8 +18987,8 @@
         </p:nvSpPr>
         <p:spPr>
           <a:xfrm>
-            <a:off x="4297679" y="3730752"/>
-            <a:ext cx="3520440" cy="338328"/>
+            <a:off x="4050665" y="3289162"/>
+            <a:ext cx="3520440" cy="292388"/>
           </a:xfrm>
           <a:prstGeom prst="rect">
             <a:avLst/>
@@ -15287,7 +19021,7 @@
         </p:nvSpPr>
         <p:spPr>
           <a:xfrm>
-            <a:off x="7955279" y="3639312"/>
+            <a:off x="7708265" y="3197722"/>
             <a:ext cx="4480560" cy="438912"/>
           </a:xfrm>
           <a:prstGeom prst="rect">
@@ -15333,8 +19067,8 @@
         </p:nvSpPr>
         <p:spPr>
           <a:xfrm>
-            <a:off x="8046719" y="3730752"/>
-            <a:ext cx="4343400" cy="338328"/>
+            <a:off x="7799705" y="3289162"/>
+            <a:ext cx="4343400" cy="292388"/>
           </a:xfrm>
           <a:prstGeom prst="rect">
             <a:avLst/>
@@ -15367,7 +19101,7 @@
         </p:nvSpPr>
         <p:spPr>
           <a:xfrm>
-            <a:off x="274320" y="4114800"/>
+            <a:off x="27306" y="3673210"/>
             <a:ext cx="3840480" cy="438912"/>
           </a:xfrm>
           <a:prstGeom prst="rect">
@@ -15413,8 +19147,8 @@
         </p:nvSpPr>
         <p:spPr>
           <a:xfrm>
-            <a:off x="365760" y="4206240"/>
-            <a:ext cx="3703320" cy="338328"/>
+            <a:off x="118746" y="3764650"/>
+            <a:ext cx="3703320" cy="276999"/>
           </a:xfrm>
           <a:prstGeom prst="rect">
             <a:avLst/>
@@ -15447,7 +19181,7 @@
         </p:nvSpPr>
         <p:spPr>
           <a:xfrm>
-            <a:off x="4206240" y="4114800"/>
+            <a:off x="3959226" y="3673210"/>
             <a:ext cx="3657600" cy="438912"/>
           </a:xfrm>
           <a:prstGeom prst="rect">
@@ -15493,8 +19227,8 @@
         </p:nvSpPr>
         <p:spPr>
           <a:xfrm>
-            <a:off x="4297679" y="4206240"/>
-            <a:ext cx="3520440" cy="338328"/>
+            <a:off x="4050665" y="3764650"/>
+            <a:ext cx="3520440" cy="276999"/>
           </a:xfrm>
           <a:prstGeom prst="rect">
             <a:avLst/>
@@ -15527,7 +19261,7 @@
         </p:nvSpPr>
         <p:spPr>
           <a:xfrm>
-            <a:off x="7955279" y="4114800"/>
+            <a:off x="7708265" y="3673210"/>
             <a:ext cx="4480560" cy="438912"/>
           </a:xfrm>
           <a:prstGeom prst="rect">
@@ -15573,8 +19307,8 @@
         </p:nvSpPr>
         <p:spPr>
           <a:xfrm>
-            <a:off x="8046719" y="4206240"/>
-            <a:ext cx="4343400" cy="338328"/>
+            <a:off x="7799705" y="3764650"/>
+            <a:ext cx="4343400" cy="276999"/>
           </a:xfrm>
           <a:prstGeom prst="rect">
             <a:avLst/>
@@ -15607,7 +19341,7 @@
         </p:nvSpPr>
         <p:spPr>
           <a:xfrm>
-            <a:off x="274320" y="4590288"/>
+            <a:off x="27306" y="4148698"/>
             <a:ext cx="3840480" cy="438912"/>
           </a:xfrm>
           <a:prstGeom prst="rect">
@@ -15653,8 +19387,8 @@
         </p:nvSpPr>
         <p:spPr>
           <a:xfrm>
-            <a:off x="365760" y="4681727"/>
-            <a:ext cx="3703320" cy="338328"/>
+            <a:off x="118746" y="4240137"/>
+            <a:ext cx="3703320" cy="276999"/>
           </a:xfrm>
           <a:prstGeom prst="rect">
             <a:avLst/>
@@ -15687,7 +19421,7 @@
         </p:nvSpPr>
         <p:spPr>
           <a:xfrm>
-            <a:off x="4206240" y="4590288"/>
+            <a:off x="3959226" y="4148698"/>
             <a:ext cx="3657600" cy="438912"/>
           </a:xfrm>
           <a:prstGeom prst="rect">
@@ -15733,8 +19467,8 @@
         </p:nvSpPr>
         <p:spPr>
           <a:xfrm>
-            <a:off x="4297679" y="4681727"/>
-            <a:ext cx="3520440" cy="338328"/>
+            <a:off x="4050665" y="4240137"/>
+            <a:ext cx="3520440" cy="276999"/>
           </a:xfrm>
           <a:prstGeom prst="rect">
             <a:avLst/>
@@ -15767,7 +19501,7 @@
         </p:nvSpPr>
         <p:spPr>
           <a:xfrm>
-            <a:off x="7955279" y="4590288"/>
+            <a:off x="7708265" y="4148698"/>
             <a:ext cx="4480560" cy="438912"/>
           </a:xfrm>
           <a:prstGeom prst="rect">
@@ -15813,8 +19547,8 @@
         </p:nvSpPr>
         <p:spPr>
           <a:xfrm>
-            <a:off x="8046719" y="4681727"/>
-            <a:ext cx="4343400" cy="338328"/>
+            <a:off x="7799705" y="4240137"/>
+            <a:ext cx="4343400" cy="276999"/>
           </a:xfrm>
           <a:prstGeom prst="rect">
             <a:avLst/>
@@ -15847,7 +19581,7 @@
         </p:nvSpPr>
         <p:spPr>
           <a:xfrm>
-            <a:off x="274320" y="5065776"/>
+            <a:off x="27306" y="4624186"/>
             <a:ext cx="3840480" cy="438912"/>
           </a:xfrm>
           <a:prstGeom prst="rect">
@@ -15893,8 +19627,8 @@
         </p:nvSpPr>
         <p:spPr>
           <a:xfrm>
-            <a:off x="365760" y="5157216"/>
-            <a:ext cx="3703320" cy="338328"/>
+            <a:off x="118746" y="4715626"/>
+            <a:ext cx="3703320" cy="276999"/>
           </a:xfrm>
           <a:prstGeom prst="rect">
             <a:avLst/>
@@ -15927,7 +19661,7 @@
         </p:nvSpPr>
         <p:spPr>
           <a:xfrm>
-            <a:off x="4206240" y="5065776"/>
+            <a:off x="3959226" y="4624186"/>
             <a:ext cx="3657600" cy="438912"/>
           </a:xfrm>
           <a:prstGeom prst="rect">
@@ -15973,8 +19707,8 @@
         </p:nvSpPr>
         <p:spPr>
           <a:xfrm>
-            <a:off x="4297679" y="5157216"/>
-            <a:ext cx="3520440" cy="338328"/>
+            <a:off x="4050665" y="4715626"/>
+            <a:ext cx="3520440" cy="276999"/>
           </a:xfrm>
           <a:prstGeom prst="rect">
             <a:avLst/>
@@ -16007,7 +19741,7 @@
         </p:nvSpPr>
         <p:spPr>
           <a:xfrm>
-            <a:off x="7955279" y="5065776"/>
+            <a:off x="7708265" y="4624186"/>
             <a:ext cx="4480560" cy="438912"/>
           </a:xfrm>
           <a:prstGeom prst="rect">
@@ -16053,8 +19787,8 @@
         </p:nvSpPr>
         <p:spPr>
           <a:xfrm>
-            <a:off x="8046719" y="5157216"/>
-            <a:ext cx="4343400" cy="338328"/>
+            <a:off x="7799705" y="4715626"/>
+            <a:ext cx="4343400" cy="276999"/>
           </a:xfrm>
           <a:prstGeom prst="rect">
             <a:avLst/>
@@ -16087,7 +19821,7 @@
         </p:nvSpPr>
         <p:spPr>
           <a:xfrm>
-            <a:off x="274320" y="5541264"/>
+            <a:off x="27306" y="5099674"/>
             <a:ext cx="3840480" cy="438912"/>
           </a:xfrm>
           <a:prstGeom prst="rect">
@@ -16133,8 +19867,8 @@
         </p:nvSpPr>
         <p:spPr>
           <a:xfrm>
-            <a:off x="365760" y="5632704"/>
-            <a:ext cx="3703320" cy="338328"/>
+            <a:off x="118746" y="5191114"/>
+            <a:ext cx="3703320" cy="276999"/>
           </a:xfrm>
           <a:prstGeom prst="rect">
             <a:avLst/>
@@ -16167,7 +19901,7 @@
         </p:nvSpPr>
         <p:spPr>
           <a:xfrm>
-            <a:off x="4206240" y="5541264"/>
+            <a:off x="3959226" y="5099674"/>
             <a:ext cx="3657600" cy="438912"/>
           </a:xfrm>
           <a:prstGeom prst="rect">
@@ -16213,8 +19947,8 @@
         </p:nvSpPr>
         <p:spPr>
           <a:xfrm>
-            <a:off x="4297679" y="5632704"/>
-            <a:ext cx="3520440" cy="338328"/>
+            <a:off x="4050665" y="5191114"/>
+            <a:ext cx="3520440" cy="276999"/>
           </a:xfrm>
           <a:prstGeom prst="rect">
             <a:avLst/>
@@ -16247,7 +19981,7 @@
         </p:nvSpPr>
         <p:spPr>
           <a:xfrm>
-            <a:off x="7955279" y="5541264"/>
+            <a:off x="7708265" y="5099674"/>
             <a:ext cx="4480560" cy="438912"/>
           </a:xfrm>
           <a:prstGeom prst="rect">
@@ -16293,8 +20027,8 @@
         </p:nvSpPr>
         <p:spPr>
           <a:xfrm>
-            <a:off x="8046719" y="5632704"/>
-            <a:ext cx="4343400" cy="338328"/>
+            <a:off x="7799705" y="5191114"/>
+            <a:ext cx="4343400" cy="276999"/>
           </a:xfrm>
           <a:prstGeom prst="rect">
             <a:avLst/>
@@ -16327,7 +20061,7 @@
         </p:nvSpPr>
         <p:spPr>
           <a:xfrm>
-            <a:off x="274320" y="6016752"/>
+            <a:off x="27306" y="5575162"/>
             <a:ext cx="3840480" cy="438912"/>
           </a:xfrm>
           <a:prstGeom prst="rect">
@@ -16373,8 +20107,8 @@
         </p:nvSpPr>
         <p:spPr>
           <a:xfrm>
-            <a:off x="365760" y="6108192"/>
-            <a:ext cx="3703320" cy="338328"/>
+            <a:off x="118746" y="5666602"/>
+            <a:ext cx="3703320" cy="276999"/>
           </a:xfrm>
           <a:prstGeom prst="rect">
             <a:avLst/>
@@ -16407,7 +20141,7 @@
         </p:nvSpPr>
         <p:spPr>
           <a:xfrm>
-            <a:off x="4206240" y="6016752"/>
+            <a:off x="3959226" y="5575162"/>
             <a:ext cx="3657600" cy="438912"/>
           </a:xfrm>
           <a:prstGeom prst="rect">
@@ -16453,8 +20187,8 @@
         </p:nvSpPr>
         <p:spPr>
           <a:xfrm>
-            <a:off x="4297679" y="6108192"/>
-            <a:ext cx="3520440" cy="338328"/>
+            <a:off x="4050665" y="5666602"/>
+            <a:ext cx="3520440" cy="276999"/>
           </a:xfrm>
           <a:prstGeom prst="rect">
             <a:avLst/>
@@ -16487,7 +20221,7 @@
         </p:nvSpPr>
         <p:spPr>
           <a:xfrm>
-            <a:off x="7955279" y="6016752"/>
+            <a:off x="7708265" y="5575162"/>
             <a:ext cx="4480560" cy="438912"/>
           </a:xfrm>
           <a:prstGeom prst="rect">
@@ -16533,8 +20267,8 @@
         </p:nvSpPr>
         <p:spPr>
           <a:xfrm>
-            <a:off x="8046719" y="6108192"/>
-            <a:ext cx="4343400" cy="338328"/>
+            <a:off x="7799705" y="5666602"/>
+            <a:ext cx="4343400" cy="276999"/>
           </a:xfrm>
           <a:prstGeom prst="rect">
             <a:avLst/>
@@ -16567,7 +20301,7 @@
         </p:nvSpPr>
         <p:spPr>
           <a:xfrm>
-            <a:off x="274320" y="6492240"/>
+            <a:off x="27306" y="6050650"/>
             <a:ext cx="3840480" cy="438912"/>
           </a:xfrm>
           <a:prstGeom prst="rect">
@@ -16613,8 +20347,8 @@
         </p:nvSpPr>
         <p:spPr>
           <a:xfrm>
-            <a:off x="365760" y="6583679"/>
-            <a:ext cx="3703320" cy="338328"/>
+            <a:off x="118746" y="6142089"/>
+            <a:ext cx="3703320" cy="276999"/>
           </a:xfrm>
           <a:prstGeom prst="rect">
             <a:avLst/>
@@ -16647,7 +20381,7 @@
         </p:nvSpPr>
         <p:spPr>
           <a:xfrm>
-            <a:off x="4206240" y="6492240"/>
+            <a:off x="3959226" y="6050650"/>
             <a:ext cx="3657600" cy="438912"/>
           </a:xfrm>
           <a:prstGeom prst="rect">
@@ -16693,8 +20427,8 @@
         </p:nvSpPr>
         <p:spPr>
           <a:xfrm>
-            <a:off x="4297679" y="6583679"/>
-            <a:ext cx="3520440" cy="338328"/>
+            <a:off x="4050665" y="6142089"/>
+            <a:ext cx="3520440" cy="276999"/>
           </a:xfrm>
           <a:prstGeom prst="rect">
             <a:avLst/>
@@ -16727,7 +20461,7 @@
         </p:nvSpPr>
         <p:spPr>
           <a:xfrm>
-            <a:off x="7955279" y="6492240"/>
+            <a:off x="7708265" y="6050650"/>
             <a:ext cx="4480560" cy="438912"/>
           </a:xfrm>
           <a:prstGeom prst="rect">
@@ -16773,8 +20507,8 @@
         </p:nvSpPr>
         <p:spPr>
           <a:xfrm>
-            <a:off x="8046719" y="6583679"/>
-            <a:ext cx="4343400" cy="338328"/>
+            <a:off x="7799705" y="6142089"/>
+            <a:ext cx="4343400" cy="276999"/>
           </a:xfrm>
           <a:prstGeom prst="rect">
             <a:avLst/>
@@ -16807,8 +20541,8 @@
         </p:nvSpPr>
         <p:spPr>
           <a:xfrm>
-            <a:off x="274320" y="6446520"/>
-            <a:ext cx="11612880" cy="274320"/>
+            <a:off x="274320" y="6590591"/>
+            <a:ext cx="11612880" cy="246221"/>
           </a:xfrm>
           <a:prstGeom prst="rect">
             <a:avLst/>
@@ -16823,12 +20557,28 @@
           <a:p>
             <a:pPr algn="ctr"/>
             <a:r>
-              <a:rPr sz="1000" b="0" i="1">
+              <a:rPr sz="1000" b="0" i="1" dirty="0">
                 <a:solidFill>
                   <a:srgbClr val="AAAAAA"/>
                 </a:solidFill>
               </a:rPr>
-              <a:t>SE clustered by month. Controls: VIX, ΔlnN*, USDT issuer dummy. *** p&lt;0.01  * p&lt;0.10</a:t>
+              <a:t>SE clustered by month. Controls: VIX, </a:t>
+            </a:r>
+            <a:r>
+              <a:rPr sz="1000" b="0" i="1" dirty="0" err="1">
+                <a:solidFill>
+                  <a:srgbClr val="AAAAAA"/>
+                </a:solidFill>
+              </a:rPr>
+              <a:t>ΔlnN</a:t>
+            </a:r>
+            <a:r>
+              <a:rPr sz="1000" b="0" i="1" dirty="0">
+                <a:solidFill>
+                  <a:srgbClr val="AAAAAA"/>
+                </a:solidFill>
+              </a:rPr>
+              <a:t>*, USDT issuer dummy. *** p&lt;0.01  * p&lt;0.10</a:t>
             </a:r>
           </a:p>
         </p:txBody>

--- a/presentations/0624_Methodology_Update_Final.pptx
+++ b/presentations/0624_Methodology_Update_Final.pptx
@@ -11849,7 +11849,7 @@
         <p:spPr>
           <a:xfrm>
             <a:off x="960120" y="1435608"/>
-            <a:ext cx="10515600" cy="411480"/>
+            <a:ext cx="10515600" cy="353943"/>
           </a:xfrm>
           <a:prstGeom prst="rect">
             <a:avLst/>
@@ -11864,12 +11864,12 @@
           <a:p>
             <a:pPr algn="l"/>
             <a:r>
-              <a:rPr sz="1700" b="0" i="0">
+              <a:rPr sz="1700" b="0" i="0" dirty="0">
                 <a:solidFill>
                   <a:srgbClr val="595959"/>
                 </a:solidFill>
               </a:rPr>
-              <a:t>Quick Recap — where we were (2 min)</a:t>
+              <a:t>Quick Recap — where we were </a:t>
             </a:r>
           </a:p>
         </p:txBody>
@@ -11961,7 +11961,7 @@
         <p:spPr>
           <a:xfrm>
             <a:off x="960120" y="2093975"/>
-            <a:ext cx="10515600" cy="411480"/>
+            <a:ext cx="10515600" cy="353943"/>
           </a:xfrm>
           <a:prstGeom prst="rect">
             <a:avLst/>
@@ -11976,12 +11976,12 @@
           <a:p>
             <a:pPr algn="l"/>
             <a:r>
-              <a:rPr sz="1700" b="0" i="0">
+              <a:rPr sz="1700" b="0" i="0" dirty="0">
                 <a:solidFill>
                   <a:srgbClr val="595959"/>
                 </a:solidFill>
               </a:rPr>
-              <a:t>What changed and why — professor's feedback (5 min)</a:t>
+              <a:t>What changed and why — professor's feedback </a:t>
             </a:r>
           </a:p>
         </p:txBody>
@@ -12073,7 +12073,7 @@
         <p:spPr>
           <a:xfrm>
             <a:off x="960120" y="2752344"/>
-            <a:ext cx="10515600" cy="411480"/>
+            <a:ext cx="10515600" cy="353943"/>
           </a:xfrm>
           <a:prstGeom prst="rect">
             <a:avLst/>
@@ -12088,12 +12088,12 @@
           <a:p>
             <a:pPr algn="l"/>
             <a:r>
-              <a:rPr sz="1700" b="0" i="0">
+              <a:rPr sz="1700" b="0" i="0" dirty="0">
                 <a:solidFill>
                   <a:srgbClr val="595959"/>
                 </a:solidFill>
               </a:rPr>
-              <a:t>New specification — asymmetric threshold model (8 min)</a:t>
+              <a:t>New specification — asymmetric threshold model </a:t>
             </a:r>
           </a:p>
         </p:txBody>
@@ -12185,7 +12185,7 @@
         <p:spPr>
           <a:xfrm>
             <a:off x="960120" y="3410712"/>
-            <a:ext cx="10515600" cy="411480"/>
+            <a:ext cx="10515600" cy="353943"/>
           </a:xfrm>
           <a:prstGeom prst="rect">
             <a:avLst/>
@@ -12200,12 +12200,12 @@
           <a:p>
             <a:pPr algn="l"/>
             <a:r>
-              <a:rPr sz="1700" b="0" i="0">
+              <a:rPr sz="1700" b="0" i="0" dirty="0">
                 <a:solidFill>
                   <a:srgbClr val="595959"/>
                 </a:solidFill>
               </a:rPr>
-              <a:t>Results — main finding β₅ = +7.55 (6 min)</a:t>
+              <a:t>Results — main finding β₅ = +7.55</a:t>
             </a:r>
           </a:p>
         </p:txBody>
@@ -12297,7 +12297,7 @@
         <p:spPr>
           <a:xfrm>
             <a:off x="960120" y="4069080"/>
-            <a:ext cx="10515600" cy="411480"/>
+            <a:ext cx="10515600" cy="353943"/>
           </a:xfrm>
           <a:prstGeom prst="rect">
             <a:avLst/>
@@ -12312,12 +12312,12 @@
           <a:p>
             <a:pPr algn="l"/>
             <a:r>
-              <a:rPr sz="1700" b="0" i="0">
+              <a:rPr sz="1700" b="0" i="0" dirty="0">
                 <a:solidFill>
                   <a:srgbClr val="595959"/>
                 </a:solidFill>
               </a:rPr>
-              <a:t>Robustness checks (4 min)</a:t>
+              <a:t>Robustness checks </a:t>
             </a:r>
           </a:p>
         </p:txBody>
@@ -12409,7 +12409,7 @@
         <p:spPr>
           <a:xfrm>
             <a:off x="960120" y="4727448"/>
-            <a:ext cx="10515600" cy="411480"/>
+            <a:ext cx="10515600" cy="353943"/>
           </a:xfrm>
           <a:prstGeom prst="rect">
             <a:avLst/>
@@ -12424,12 +12424,12 @@
           <a:p>
             <a:pPr algn="l"/>
             <a:r>
-              <a:rPr sz="1700" b="0" i="0">
+              <a:rPr sz="1700" b="0" i="0" dirty="0">
                 <a:solidFill>
                   <a:srgbClr val="595959"/>
                 </a:solidFill>
               </a:rPr>
-              <a:t>Economic magnitude &amp; policy implication (3 min)</a:t>
+              <a:t>Economic magnitude &amp; policy implication </a:t>
             </a:r>
           </a:p>
         </p:txBody>
@@ -12521,7 +12521,7 @@
         <p:spPr>
           <a:xfrm>
             <a:off x="960120" y="5385816"/>
-            <a:ext cx="10515600" cy="411480"/>
+            <a:ext cx="10515600" cy="353943"/>
           </a:xfrm>
           <a:prstGeom prst="rect">
             <a:avLst/>
@@ -12536,12 +12536,12 @@
           <a:p>
             <a:pPr algn="l"/>
             <a:r>
-              <a:rPr sz="1700" b="0" i="0">
+              <a:rPr sz="1700" b="0" i="0" dirty="0">
                 <a:solidFill>
                   <a:srgbClr val="595959"/>
                 </a:solidFill>
               </a:rPr>
-              <a:t>Conclusion &amp; limitations (2 min)</a:t>
+              <a:t>Conclusion &amp; limitations </a:t>
             </a:r>
           </a:p>
         </p:txBody>
@@ -14662,309 +14662,6 @@
           </a:graphicData>
         </a:graphic>
       </p:graphicFrame>
-      <p:sp>
-        <p:nvSpPr>
-          <p:cNvPr id="15" name="TextBox 14">
-            <a:extLst>
-              <a:ext uri="{FF2B5EF4-FFF2-40B4-BE49-F238E27FC236}">
-                <a16:creationId xmlns:a16="http://schemas.microsoft.com/office/drawing/2014/main" id="{3F0EC998-8661-8FC9-2D02-C7CED4823CD2}"/>
-              </a:ext>
-            </a:extLst>
-          </p:cNvPr>
-          <p:cNvSpPr txBox="1"/>
-          <p:nvPr/>
-        </p:nvSpPr>
-        <p:spPr>
-          <a:xfrm>
-            <a:off x="3017520" y="2856268"/>
-            <a:ext cx="6144768" cy="1200329"/>
-          </a:xfrm>
-          <a:prstGeom prst="rect">
-            <a:avLst/>
-          </a:prstGeom>
-          <a:noFill/>
-        </p:spPr>
-        <p:txBody>
-          <a:bodyPr wrap="square">
-            <a:spAutoFit/>
-          </a:bodyPr>
-          <a:lstStyle/>
-          <a:p>
-            <a:pPr indent="0" algn="l">
-              <a:buNone/>
-            </a:pPr>
-            <a:r>
-              <a:rPr lang="ko-KR" altLang="ko-KR" sz="1800" b="1" i="0" dirty="0">
-                <a:solidFill>
-                  <a:srgbClr val="CCCCCC"/>
-                </a:solidFill>
-                <a:effectLst/>
-                <a:latin typeface="-apple-system"/>
-              </a:rPr>
-              <a:t>The </a:t>
-            </a:r>
-            <a:r>
-              <a:rPr lang="ko-KR" altLang="ko-KR" sz="1800" b="1" i="0" dirty="0" err="1">
-                <a:solidFill>
-                  <a:srgbClr val="CCCCCC"/>
-                </a:solidFill>
-                <a:effectLst/>
-                <a:latin typeface="-apple-system"/>
-              </a:rPr>
-              <a:t>asymmetry</a:t>
-            </a:r>
-            <a:r>
-              <a:rPr lang="ko-KR" altLang="ko-KR" sz="1800" b="1" i="0" dirty="0">
-                <a:solidFill>
-                  <a:srgbClr val="CCCCCC"/>
-                </a:solidFill>
-                <a:effectLst/>
-                <a:latin typeface="-apple-system"/>
-              </a:rPr>
-              <a:t> </a:t>
-            </a:r>
-            <a:r>
-              <a:rPr lang="ko-KR" altLang="ko-KR" sz="1800" b="1" i="0" dirty="0" err="1">
-                <a:solidFill>
-                  <a:srgbClr val="CCCCCC"/>
-                </a:solidFill>
-                <a:effectLst/>
-                <a:latin typeface="-apple-system"/>
-              </a:rPr>
-              <a:t>is</a:t>
-            </a:r>
-            <a:r>
-              <a:rPr lang="ko-KR" altLang="ko-KR" sz="1800" b="1" i="0" dirty="0">
-                <a:solidFill>
-                  <a:srgbClr val="CCCCCC"/>
-                </a:solidFill>
-                <a:effectLst/>
-                <a:latin typeface="-apple-system"/>
-              </a:rPr>
-              <a:t>:</a:t>
-            </a:r>
-            <a:r>
-              <a:rPr lang="ko-KR" altLang="ko-KR" sz="1800" b="0" i="0" dirty="0">
-                <a:solidFill>
-                  <a:srgbClr val="CCCCCC"/>
-                </a:solidFill>
-                <a:effectLst/>
-                <a:latin typeface="-apple-system"/>
-              </a:rPr>
-              <a:t> </a:t>
-            </a:r>
-            <a:r>
-              <a:rPr lang="ko-KR" altLang="ko-KR" sz="1800" b="0" i="0" dirty="0" err="1">
-                <a:solidFill>
-                  <a:srgbClr val="CCCCCC"/>
-                </a:solidFill>
-                <a:effectLst/>
-                <a:latin typeface="-apple-system"/>
-              </a:rPr>
-              <a:t>the</a:t>
-            </a:r>
-            <a:r>
-              <a:rPr lang="ko-KR" altLang="ko-KR" sz="1800" b="0" i="0" dirty="0">
-                <a:solidFill>
-                  <a:srgbClr val="CCCCCC"/>
-                </a:solidFill>
-                <a:effectLst/>
-                <a:latin typeface="-apple-system"/>
-              </a:rPr>
-              <a:t> </a:t>
-            </a:r>
-            <a:r>
-              <a:rPr lang="ko-KR" altLang="ko-KR" sz="1800" b="0" i="0" dirty="0" err="1">
-                <a:solidFill>
-                  <a:srgbClr val="CCCCCC"/>
-                </a:solidFill>
-                <a:effectLst/>
-                <a:latin typeface="-apple-system"/>
-              </a:rPr>
-              <a:t>buffer</a:t>
-            </a:r>
-            <a:r>
-              <a:rPr lang="ko-KR" altLang="ko-KR" sz="1800" b="0" i="0" dirty="0">
-                <a:solidFill>
-                  <a:srgbClr val="CCCCCC"/>
-                </a:solidFill>
-                <a:effectLst/>
-                <a:latin typeface="-apple-system"/>
-              </a:rPr>
-              <a:t> </a:t>
-            </a:r>
-            <a:r>
-              <a:rPr lang="ko-KR" altLang="ko-KR" sz="1800" b="0" i="0" dirty="0" err="1">
-                <a:solidFill>
-                  <a:srgbClr val="CCCCCC"/>
-                </a:solidFill>
-                <a:effectLst/>
-                <a:latin typeface="-apple-system"/>
-              </a:rPr>
-              <a:t>L</a:t>
-            </a:r>
-            <a:r>
-              <a:rPr lang="ko-KR" altLang="ko-KR" sz="1800" b="0" i="0" dirty="0">
-                <a:solidFill>
-                  <a:srgbClr val="CCCCCC"/>
-                </a:solidFill>
-                <a:effectLst/>
-                <a:latin typeface="-apple-system"/>
-              </a:rPr>
-              <a:t> </a:t>
-            </a:r>
-            <a:r>
-              <a:rPr lang="ko-KR" altLang="ko-KR" sz="1800" b="0" i="0" dirty="0" err="1">
-                <a:solidFill>
-                  <a:srgbClr val="CCCCCC"/>
-                </a:solidFill>
-                <a:effectLst/>
-                <a:latin typeface="-apple-system"/>
-              </a:rPr>
-              <a:t>only</a:t>
-            </a:r>
-            <a:r>
-              <a:rPr lang="ko-KR" altLang="ko-KR" sz="1800" b="0" i="0" dirty="0">
-                <a:solidFill>
-                  <a:srgbClr val="CCCCCC"/>
-                </a:solidFill>
-                <a:effectLst/>
-                <a:latin typeface="-apple-system"/>
-              </a:rPr>
-              <a:t> </a:t>
-            </a:r>
-            <a:r>
-              <a:rPr lang="ko-KR" altLang="ko-KR" sz="1800" b="0" i="0" dirty="0" err="1">
-                <a:solidFill>
-                  <a:srgbClr val="CCCCCC"/>
-                </a:solidFill>
-                <a:effectLst/>
-                <a:latin typeface="-apple-system"/>
-              </a:rPr>
-              <a:t>matters</a:t>
-            </a:r>
-            <a:r>
-              <a:rPr lang="ko-KR" altLang="ko-KR" sz="1800" b="0" i="0" dirty="0">
-                <a:solidFill>
-                  <a:srgbClr val="CCCCCC"/>
-                </a:solidFill>
-                <a:effectLst/>
-                <a:latin typeface="-apple-system"/>
-              </a:rPr>
-              <a:t> </a:t>
-            </a:r>
-            <a:r>
-              <a:rPr lang="ko-KR" altLang="ko-KR" sz="1800" b="0" i="0" dirty="0" err="1">
-                <a:solidFill>
-                  <a:srgbClr val="CCCCCC"/>
-                </a:solidFill>
-                <a:effectLst/>
-                <a:latin typeface="-apple-system"/>
-              </a:rPr>
-              <a:t>for</a:t>
-            </a:r>
-            <a:r>
-              <a:rPr lang="ko-KR" altLang="ko-KR" sz="1800" b="0" i="0" dirty="0">
-                <a:solidFill>
-                  <a:srgbClr val="CCCCCC"/>
-                </a:solidFill>
-                <a:effectLst/>
-                <a:latin typeface="-apple-system"/>
-              </a:rPr>
-              <a:t> </a:t>
-            </a:r>
-            <a:r>
-              <a:rPr lang="ko-KR" altLang="ko-KR" sz="1800" b="0" i="0" dirty="0" err="1">
-                <a:solidFill>
-                  <a:srgbClr val="CCCCCC"/>
-                </a:solidFill>
-                <a:effectLst/>
-                <a:latin typeface="-apple-system"/>
-              </a:rPr>
-              <a:t>outflows</a:t>
-            </a:r>
-            <a:r>
-              <a:rPr lang="ko-KR" altLang="ko-KR" sz="1800" b="0" i="0" dirty="0">
-                <a:solidFill>
-                  <a:srgbClr val="CCCCCC"/>
-                </a:solidFill>
-                <a:effectLst/>
-                <a:latin typeface="-apple-system"/>
-              </a:rPr>
-              <a:t>, </a:t>
-            </a:r>
-            <a:r>
-              <a:rPr lang="ko-KR" altLang="ko-KR" sz="1800" b="0" i="0" dirty="0" err="1">
-                <a:solidFill>
-                  <a:srgbClr val="CCCCCC"/>
-                </a:solidFill>
-                <a:effectLst/>
-                <a:latin typeface="-apple-system"/>
-              </a:rPr>
-              <a:t>never</a:t>
-            </a:r>
-            <a:r>
-              <a:rPr lang="ko-KR" altLang="ko-KR" sz="1800" b="0" i="0" dirty="0">
-                <a:solidFill>
-                  <a:srgbClr val="CCCCCC"/>
-                </a:solidFill>
-                <a:effectLst/>
-                <a:latin typeface="-apple-system"/>
-              </a:rPr>
-              <a:t> </a:t>
-            </a:r>
-            <a:r>
-              <a:rPr lang="ko-KR" altLang="ko-KR" sz="1800" b="0" i="0" dirty="0" err="1">
-                <a:solidFill>
-                  <a:srgbClr val="CCCCCC"/>
-                </a:solidFill>
-                <a:effectLst/>
-                <a:latin typeface="-apple-system"/>
-              </a:rPr>
-              <a:t>for</a:t>
-            </a:r>
-            <a:r>
-              <a:rPr lang="ko-KR" altLang="ko-KR" sz="1800" b="0" i="0" dirty="0">
-                <a:solidFill>
-                  <a:srgbClr val="CCCCCC"/>
-                </a:solidFill>
-                <a:effectLst/>
-                <a:latin typeface="-apple-system"/>
-              </a:rPr>
-              <a:t> </a:t>
-            </a:r>
-            <a:r>
-              <a:rPr lang="ko-KR" altLang="ko-KR" sz="1800" b="0" i="0" dirty="0" err="1">
-                <a:solidFill>
-                  <a:srgbClr val="CCCCCC"/>
-                </a:solidFill>
-                <a:effectLst/>
-                <a:latin typeface="-apple-system"/>
-              </a:rPr>
-              <a:t>inflows</a:t>
-            </a:r>
-            <a:r>
-              <a:rPr lang="ko-KR" altLang="ko-KR" sz="1800" b="0" i="0" dirty="0">
-                <a:solidFill>
-                  <a:srgbClr val="CCCCCC"/>
-                </a:solidFill>
-                <a:effectLst/>
-                <a:latin typeface="-apple-system"/>
-              </a:rPr>
-              <a:t>.</a:t>
-            </a:r>
-          </a:p>
-          <a:p>
-            <a:pPr>
-              <a:buNone/>
-            </a:pPr>
-            <a:br>
-              <a:rPr lang="ko-KR" altLang="ko-KR" dirty="0"/>
-            </a:br>
-            <a:endParaRPr lang="ko-KR" altLang="en-US" dirty="0"/>
-          </a:p>
-        </p:txBody>
-      </p:sp>
     </p:spTree>
   </p:cSld>
   <p:clrMapOvr>
@@ -20965,7 +20662,7 @@
         <p:spPr>
           <a:xfrm>
             <a:off x="384048" y="1828800"/>
-            <a:ext cx="3593592" cy="4526280"/>
+            <a:ext cx="3593592" cy="2554545"/>
           </a:xfrm>
           <a:prstGeom prst="rect">
             <a:avLst/>
@@ -20980,15 +20677,61 @@
           <a:p>
             <a:pPr algn="l"/>
             <a:r>
-              <a:rPr sz="1250" b="0" i="0">
+              <a:rPr sz="1600" b="0" i="0" dirty="0">
                 <a:solidFill>
                   <a:srgbClr val="595959"/>
                 </a:solidFill>
               </a:rPr>
               <a:t>A 1-unit increase in monthly outflow rate
-(i.e., 100% of supply redeemed in one month)
-in a low-buffer state (L &lt; 12%) is associated
-with a +7.55 pp increase in ΔSpread.
+(i.e., 100% of supply redeemed in one month)</a:t>
+            </a:r>
+            <a:r>
+              <a:rPr lang="en-US" sz="1600" b="0" i="0" dirty="0">
+                <a:solidFill>
+                  <a:srgbClr val="595959"/>
+                </a:solidFill>
+              </a:rPr>
+              <a:t> </a:t>
+            </a:r>
+            <a:r>
+              <a:rPr sz="1600" b="0" i="0" dirty="0">
+                <a:solidFill>
+                  <a:srgbClr val="595959"/>
+                </a:solidFill>
+              </a:rPr>
+              <a:t>in a low-buffer state (L &lt; 12%) is associated</a:t>
+            </a:r>
+            <a:r>
+              <a:rPr lang="en-US" sz="1600" b="0" i="0" dirty="0">
+                <a:solidFill>
+                  <a:srgbClr val="595959"/>
+                </a:solidFill>
+              </a:rPr>
+              <a:t> </a:t>
+            </a:r>
+            <a:r>
+              <a:rPr sz="1600" b="0" i="0" dirty="0">
+                <a:solidFill>
+                  <a:srgbClr val="595959"/>
+                </a:solidFill>
+              </a:rPr>
+              <a:t>with a +7.55 pp increase in </a:t>
+            </a:r>
+            <a:r>
+              <a:rPr sz="1600" b="0" i="0" dirty="0" err="1">
+                <a:solidFill>
+                  <a:srgbClr val="595959"/>
+                </a:solidFill>
+              </a:rPr>
+              <a:t>ΔSpread</a:t>
+            </a:r>
+            <a:r>
+              <a:rPr sz="1600" b="0" i="0" dirty="0">
+                <a:solidFill>
+                  <a:srgbClr val="595959"/>
+                </a:solidFill>
+              </a:rPr>
+              <a:t>.
 More practically: a 5% monthly outflow
 at current buffer L = 2.6% →
 +7.55 × 0.05 ≈ +0.378 pp = +38 bps</a:t>
@@ -21129,7 +20872,7 @@
         <p:spPr>
           <a:xfrm>
             <a:off x="4361688" y="1828800"/>
-            <a:ext cx="3593592" cy="4526280"/>
+            <a:ext cx="3593592" cy="2800767"/>
           </a:xfrm>
           <a:prstGeom prst="rect">
             <a:avLst/>
@@ -21144,7 +20887,7 @@
           <a:p>
             <a:pPr algn="l"/>
             <a:r>
-              <a:rPr sz="1250" b="0" i="0">
+              <a:rPr sz="1600" b="0" i="0" dirty="0">
                 <a:solidFill>
                   <a:srgbClr val="595959"/>
                 </a:solidFill>
@@ -21293,7 +21036,7 @@
         <p:spPr>
           <a:xfrm>
             <a:off x="8339327" y="1828800"/>
-            <a:ext cx="3593592" cy="4526280"/>
+            <a:ext cx="3593592" cy="2800767"/>
           </a:xfrm>
           <a:prstGeom prst="rect">
             <a:avLst/>
@@ -21308,7 +21051,7 @@
           <a:p>
             <a:pPr algn="l"/>
             <a:r>
-              <a:rPr sz="1250" b="0" i="0">
+              <a:rPr sz="1600" b="0" i="0">
                 <a:solidFill>
                   <a:srgbClr val="595959"/>
                 </a:solidFill>
